--- a/datos/Grupo4_laminas_clasificacion.pptx
+++ b/datos/Grupo4_laminas_clasificacion.pptx
@@ -4,17 +4,20 @@
   <p:sldMasterIdLst>
     <p:sldMasterId id="2147483648" r:id="rId1"/>
   </p:sldMasterIdLst>
+  <p:notesMasterIdLst>
+    <p:notesMasterId r:id="rId10"/>
+  </p:notesMasterIdLst>
   <p:sldIdLst>
-    <p:sldId id="256" r:id="rId7"/>
-    <p:sldId id="257" r:id="rId9"/>
-    <p:sldId id="258" r:id="rId10"/>
-    <p:sldId id="259" r:id="rId11"/>
-    <p:sldId id="260" r:id="rId12"/>
-    <p:sldId id="261" r:id="rId13"/>
-    <p:sldId id="262" r:id="rId14"/>
-    <p:sldId id="263" r:id="rId15"/>
+    <p:sldId id="256" r:id="rId2"/>
+    <p:sldId id="257" r:id="rId3"/>
+    <p:sldId id="258" r:id="rId4"/>
+    <p:sldId id="259" r:id="rId5"/>
+    <p:sldId id="260" r:id="rId6"/>
+    <p:sldId id="261" r:id="rId7"/>
+    <p:sldId id="262" r:id="rId8"/>
+    <p:sldId id="263" r:id="rId9"/>
   </p:sldIdLst>
-  <p:sldSz cx="12191695" cy="6858000" type="screen4x3"/>
+  <p:sldSz cx="12192000" cy="6858000"/>
   <p:notesSz cx="6858000" cy="9144000"/>
   <p:defaultTextStyle>
     <a:defPPr>
@@ -111,11 +114,27 @@
       </a:defRPr>
     </a:lvl9pPr>
   </p:defaultTextStyle>
+  <p:extLst>
+    <p:ext uri="{EFAFB233-063F-42B5-8137-9DF3F51BA10A}">
+      <p15:sldGuideLst xmlns:p15="http://schemas.microsoft.com/office/powerpoint/2012/main">
+        <p15:guide id="1" orient="horz" pos="2160">
+          <p15:clr>
+            <a:srgbClr val="A4A3A4"/>
+          </p15:clr>
+        </p15:guide>
+        <p15:guide id="2" pos="2880">
+          <p15:clr>
+            <a:srgbClr val="A4A3A4"/>
+          </p15:clr>
+        </p15:guide>
+      </p15:sldGuideLst>
+    </p:ext>
+  </p:extLst>
 </p:presentation>
 </file>
 
 <file path=ppt/notesMasters/notesMaster1.xml><?xml version="1.0" encoding="utf-8"?>
-<p:notesMaster xmlns:a="http://schemas.openxmlformats.org/drawingml/2006/main" xmlns:p="http://schemas.openxmlformats.org/presentationml/2006/main" xmlns:r="http://schemas.openxmlformats.org/officeDocument/2006/relationships">
+<p:notesMaster xmlns:a="http://schemas.openxmlformats.org/drawingml/2006/main" xmlns:r="http://schemas.openxmlformats.org/officeDocument/2006/relationships" xmlns:p="http://schemas.openxmlformats.org/presentationml/2006/main">
   <p:cSld>
     <p:bg>
       <p:bgRef idx="1001">
@@ -136,241 +155,16 @@
           <a:chExt cx="0" cy="0"/>
         </a:xfrm>
       </p:grpSpPr>
-      <p:sp>
-        <p:nvSpPr>
-          <p:cNvPr id="2" name="Header Placeholder 1"/>
-          <p:cNvSpPr>
-            <a:spLocks noGrp="1"/>
-          </p:cNvSpPr>
-          <p:nvPr>
-            <p:ph type="hdr" sz="quarter"/>
-          </p:nvPr>
-        </p:nvSpPr>
-        <p:spPr>
-          <a:xfrm>
-            <a:off x="0" y="0"/>
-            <a:ext cx="2971800" cy="457200"/>
-          </a:xfrm>
-          <a:prstGeom prst="rect">
-            <a:avLst/>
-          </a:prstGeom>
-        </p:spPr>
-        <p:txBody>
-          <a:bodyPr vert="horz" lIns="91440" tIns="45720" rIns="91440" bIns="45720" rtlCol="0"/>
-          <a:lstStyle>
-            <a:lvl1pPr algn="l">
-              <a:defRPr sz="1200"/>
-            </a:lvl1pPr>
-          </a:lstStyle>
-          <a:p>
-            <a:endParaRPr lang="en-US"/>
-          </a:p>
-        </p:txBody>
-      </p:sp>
-      <p:sp>
-        <p:nvSpPr>
-          <p:cNvPr id="3" name="Date Placeholder 2"/>
-          <p:cNvSpPr>
-            <a:spLocks noGrp="1"/>
-          </p:cNvSpPr>
-          <p:nvPr>
-            <p:ph type="dt" idx="1"/>
-          </p:nvPr>
-        </p:nvSpPr>
-        <p:spPr>
-          <a:xfrm>
-            <a:off x="3884613" y="0"/>
-            <a:ext cx="2971800" cy="457200"/>
-          </a:xfrm>
-          <a:prstGeom prst="rect">
-            <a:avLst/>
-          </a:prstGeom>
-        </p:spPr>
-        <p:txBody>
-          <a:bodyPr vert="horz" lIns="91440" tIns="45720" rIns="91440" bIns="45720" rtlCol="0"/>
-          <a:lstStyle>
-            <a:lvl1pPr algn="r">
-              <a:defRPr sz="1200"/>
-            </a:lvl1pPr>
-          </a:lstStyle>
-          <a:p>
-            <a:fld id="{0F89C1C7-3DCD-1040-A9CF-14679D8B5DDD}" type="datetimeFigureOut">
-              <a:rPr lang="en-US" smtClean="0"/>
-              <a:t>10/17/16</a:t>
-            </a:fld>
-            <a:endParaRPr lang="en-US"/>
-          </a:p>
-        </p:txBody>
-      </p:sp>
-      <p:sp>
-        <p:nvSpPr>
-          <p:cNvPr id="4" name="Slide Image Placeholder 3"/>
-          <p:cNvSpPr>
-            <a:spLocks noGrp="1" noRot="1" noChangeAspect="1"/>
-          </p:cNvSpPr>
-          <p:nvPr>
-            <p:ph type="sldImg" idx="2"/>
-          </p:nvPr>
-        </p:nvSpPr>
-        <p:spPr>
-          <a:xfrm>
-            <a:off x="1143000" y="685800"/>
-            <a:ext cx="4572000" cy="3429000"/>
-          </a:xfrm>
-          <a:prstGeom prst="rect">
-            <a:avLst/>
-          </a:prstGeom>
-          <a:noFill/>
-          <a:ln w="12700">
-            <a:solidFill>
-              <a:prstClr val="black"/>
-            </a:solidFill>
-          </a:ln>
-        </p:spPr>
-        <p:txBody>
-          <a:bodyPr vert="horz" lIns="91440" tIns="45720" rIns="91440" bIns="45720" rtlCol="0" anchor="ctr"/>
-          <a:lstStyle/>
-          <a:p>
-            <a:endParaRPr lang="en-US"/>
-          </a:p>
-        </p:txBody>
-      </p:sp>
-      <p:sp>
-        <p:nvSpPr>
-          <p:cNvPr id="5" name="Notes Placeholder 4"/>
-          <p:cNvSpPr>
-            <a:spLocks noGrp="1"/>
-          </p:cNvSpPr>
-          <p:nvPr>
-            <p:ph type="body" sz="quarter" idx="3"/>
-          </p:nvPr>
-        </p:nvSpPr>
-        <p:spPr>
-          <a:xfrm>
-            <a:off x="685800" y="4343400"/>
-            <a:ext cx="5486400" cy="4114800"/>
-          </a:xfrm>
-          <a:prstGeom prst="rect">
-            <a:avLst/>
-          </a:prstGeom>
-        </p:spPr>
-        <p:txBody>
-          <a:bodyPr vert="horz" lIns="91440" tIns="45720" rIns="91440" bIns="45720" rtlCol="0"/>
-          <a:lstStyle/>
-          <a:p>
-            <a:pPr lvl="0"/>
-            <a:r>
-              <a:rPr lang="en-US" smtClean="0"/>
-              <a:t>Click to edit Master text styles</a:t>
-            </a:r>
-          </a:p>
-          <a:p>
-            <a:pPr lvl="1"/>
-            <a:r>
-              <a:rPr lang="en-US" smtClean="0"/>
-              <a:t>Second level</a:t>
-            </a:r>
-          </a:p>
-          <a:p>
-            <a:pPr lvl="2"/>
-            <a:r>
-              <a:rPr lang="en-US" smtClean="0"/>
-              <a:t>Third level</a:t>
-            </a:r>
-          </a:p>
-          <a:p>
-            <a:pPr lvl="3"/>
-            <a:r>
-              <a:rPr lang="en-US" smtClean="0"/>
-              <a:t>Fourth level</a:t>
-            </a:r>
-          </a:p>
-          <a:p>
-            <a:pPr lvl="4"/>
-            <a:r>
-              <a:rPr lang="en-US" smtClean="0"/>
-              <a:t>Fifth level</a:t>
-            </a:r>
-            <a:endParaRPr lang="en-US"/>
-          </a:p>
-        </p:txBody>
-      </p:sp>
-      <p:sp>
-        <p:nvSpPr>
-          <p:cNvPr id="6" name="Footer Placeholder 5"/>
-          <p:cNvSpPr>
-            <a:spLocks noGrp="1"/>
-          </p:cNvSpPr>
-          <p:nvPr>
-            <p:ph type="ftr" sz="quarter" idx="4"/>
-          </p:nvPr>
-        </p:nvSpPr>
-        <p:spPr>
-          <a:xfrm>
-            <a:off x="0" y="8685213"/>
-            <a:ext cx="2971800" cy="457200"/>
-          </a:xfrm>
-          <a:prstGeom prst="rect">
-            <a:avLst/>
-          </a:prstGeom>
-        </p:spPr>
-        <p:txBody>
-          <a:bodyPr vert="horz" lIns="91440" tIns="45720" rIns="91440" bIns="45720" rtlCol="0" anchor="b"/>
-          <a:lstStyle>
-            <a:lvl1pPr algn="l">
-              <a:defRPr sz="1200"/>
-            </a:lvl1pPr>
-          </a:lstStyle>
-          <a:p>
-            <a:endParaRPr lang="en-US"/>
-          </a:p>
-        </p:txBody>
-      </p:sp>
-      <p:sp>
-        <p:nvSpPr>
-          <p:cNvPr id="7" name="Slide Number Placeholder 6"/>
-          <p:cNvSpPr>
-            <a:spLocks noGrp="1"/>
-          </p:cNvSpPr>
-          <p:nvPr>
-            <p:ph type="sldNum" sz="quarter" idx="5"/>
-          </p:nvPr>
-        </p:nvSpPr>
-        <p:spPr>
-          <a:xfrm>
-            <a:off x="3884613" y="8685213"/>
-            <a:ext cx="2971800" cy="457200"/>
-          </a:xfrm>
-          <a:prstGeom prst="rect">
-            <a:avLst/>
-          </a:prstGeom>
-        </p:spPr>
-        <p:txBody>
-          <a:bodyPr vert="horz" lIns="91440" tIns="45720" rIns="91440" bIns="45720" rtlCol="0" anchor="b"/>
-          <a:lstStyle>
-            <a:lvl1pPr algn="r">
-              <a:defRPr sz="1200"/>
-            </a:lvl1pPr>
-          </a:lstStyle>
-          <a:p>
-            <a:fld id="{BB5E49A5-4136-284D-997B-48E1D791AD67}" type="slidenum">
-              <a:rPr lang="en-US" smtClean="0"/>
-              <a:t>‹#›</a:t>
-            </a:fld>
-            <a:endParaRPr lang="en-US"/>
-          </a:p>
-        </p:txBody>
-      </p:sp>
     </p:spTree>
     <p:extLst>
       <p:ext uri="{BB962C8B-B14F-4D97-AF65-F5344CB8AC3E}">
-        <p14:creationId xmlns:p14="http://schemas.microsoft.com/office/powerpoint/2010/main" val="2623252185"/>
+        <p14:creationId xmlns:p14="http://schemas.microsoft.com/office/powerpoint/2010/main" val="304704301"/>
       </p:ext>
     </p:extLst>
   </p:cSld>
   <p:clrMap bg1="lt1" tx1="dk1" bg2="lt2" tx2="dk2" accent1="accent1" accent2="accent2" accent3="accent3" accent4="accent4" accent5="accent5" accent6="accent6" hlink="hlink" folHlink="folHlink"/>
   <p:notesStyle>
-    <a:lvl1pPr marL="0" algn="l" defTabSz="457200" rtl="0" eaLnBrk="1" latinLnBrk="0" hangingPunct="1">
+    <a:lvl1pPr marL="0" algn="l" defTabSz="914400" rtl="0" eaLnBrk="1" latinLnBrk="0" hangingPunct="1">
       <a:defRPr sz="1200" kern="1200">
         <a:solidFill>
           <a:schemeClr val="tx1"/>
@@ -380,7 +174,7 @@
         <a:cs typeface="+mn-cs"/>
       </a:defRPr>
     </a:lvl1pPr>
-    <a:lvl2pPr marL="457200" algn="l" defTabSz="457200" rtl="0" eaLnBrk="1" latinLnBrk="0" hangingPunct="1">
+    <a:lvl2pPr marL="457200" algn="l" defTabSz="914400" rtl="0" eaLnBrk="1" latinLnBrk="0" hangingPunct="1">
       <a:defRPr sz="1200" kern="1200">
         <a:solidFill>
           <a:schemeClr val="tx1"/>
@@ -390,7 +184,7 @@
         <a:cs typeface="+mn-cs"/>
       </a:defRPr>
     </a:lvl2pPr>
-    <a:lvl3pPr marL="914400" algn="l" defTabSz="457200" rtl="0" eaLnBrk="1" latinLnBrk="0" hangingPunct="1">
+    <a:lvl3pPr marL="914400" algn="l" defTabSz="914400" rtl="0" eaLnBrk="1" latinLnBrk="0" hangingPunct="1">
       <a:defRPr sz="1200" kern="1200">
         <a:solidFill>
           <a:schemeClr val="tx1"/>
@@ -400,7 +194,7 @@
         <a:cs typeface="+mn-cs"/>
       </a:defRPr>
     </a:lvl3pPr>
-    <a:lvl4pPr marL="1371600" algn="l" defTabSz="457200" rtl="0" eaLnBrk="1" latinLnBrk="0" hangingPunct="1">
+    <a:lvl4pPr marL="1371600" algn="l" defTabSz="914400" rtl="0" eaLnBrk="1" latinLnBrk="0" hangingPunct="1">
       <a:defRPr sz="1200" kern="1200">
         <a:solidFill>
           <a:schemeClr val="tx1"/>
@@ -410,7 +204,7 @@
         <a:cs typeface="+mn-cs"/>
       </a:defRPr>
     </a:lvl4pPr>
-    <a:lvl5pPr marL="1828800" algn="l" defTabSz="457200" rtl="0" eaLnBrk="1" latinLnBrk="0" hangingPunct="1">
+    <a:lvl5pPr marL="1828800" algn="l" defTabSz="914400" rtl="0" eaLnBrk="1" latinLnBrk="0" hangingPunct="1">
       <a:defRPr sz="1200" kern="1200">
         <a:solidFill>
           <a:schemeClr val="tx1"/>
@@ -420,7 +214,7 @@
         <a:cs typeface="+mn-cs"/>
       </a:defRPr>
     </a:lvl5pPr>
-    <a:lvl6pPr marL="2286000" algn="l" defTabSz="457200" rtl="0" eaLnBrk="1" latinLnBrk="0" hangingPunct="1">
+    <a:lvl6pPr marL="2286000" algn="l" defTabSz="914400" rtl="0" eaLnBrk="1" latinLnBrk="0" hangingPunct="1">
       <a:defRPr sz="1200" kern="1200">
         <a:solidFill>
           <a:schemeClr val="tx1"/>
@@ -430,7 +224,7 @@
         <a:cs typeface="+mn-cs"/>
       </a:defRPr>
     </a:lvl6pPr>
-    <a:lvl7pPr marL="2743200" algn="l" defTabSz="457200" rtl="0" eaLnBrk="1" latinLnBrk="0" hangingPunct="1">
+    <a:lvl7pPr marL="2743200" algn="l" defTabSz="914400" rtl="0" eaLnBrk="1" latinLnBrk="0" hangingPunct="1">
       <a:defRPr sz="1200" kern="1200">
         <a:solidFill>
           <a:schemeClr val="tx1"/>
@@ -440,7 +234,7 @@
         <a:cs typeface="+mn-cs"/>
       </a:defRPr>
     </a:lvl7pPr>
-    <a:lvl8pPr marL="3200400" algn="l" defTabSz="457200" rtl="0" eaLnBrk="1" latinLnBrk="0" hangingPunct="1">
+    <a:lvl8pPr marL="3200400" algn="l" defTabSz="914400" rtl="0" eaLnBrk="1" latinLnBrk="0" hangingPunct="1">
       <a:defRPr sz="1200" kern="1200">
         <a:solidFill>
           <a:schemeClr val="tx1"/>
@@ -450,7 +244,7 @@
         <a:cs typeface="+mn-cs"/>
       </a:defRPr>
     </a:lvl8pPr>
-    <a:lvl9pPr marL="3657600" algn="l" defTabSz="457200" rtl="0" eaLnBrk="1" latinLnBrk="0" hangingPunct="1">
+    <a:lvl9pPr marL="3657600" algn="l" defTabSz="914400" rtl="0" eaLnBrk="1" latinLnBrk="0" hangingPunct="1">
       <a:defRPr sz="1200" kern="1200">
         <a:solidFill>
           <a:schemeClr val="tx1"/>
@@ -465,7 +259,7 @@
 </file>
 
 <file path=ppt/notesSlides/notesSlide1.xml><?xml version="1.0" encoding="utf-8"?>
-<p:notes xmlns:a="http://schemas.openxmlformats.org/drawingml/2006/main" xmlns:p="http://schemas.openxmlformats.org/presentationml/2006/main" xmlns:r="http://schemas.openxmlformats.org/officeDocument/2006/relationships">
+<p:notes xmlns:a="http://schemas.openxmlformats.org/drawingml/2006/main" xmlns:r="http://schemas.openxmlformats.org/officeDocument/2006/relationships" xmlns:p="http://schemas.openxmlformats.org/presentationml/2006/main">
   <p:cSld>
     <p:spTree>
       <p:nvGrpSpPr>
@@ -485,7 +279,7 @@
         <p:nvSpPr>
           <p:cNvPr id="2" name="Slide Image Placeholder 1"/>
           <p:cNvSpPr>
-            <a:spLocks noGrp="1"/>
+            <a:spLocks noGrp="1" noRot="1" noChangeAspect="1"/>
           </p:cNvSpPr>
           <p:nvPr>
             <p:ph type="sldImg" idx="2"/>
@@ -500,7 +294,7 @@
             <a:spLocks noGrp="1"/>
           </p:cNvSpPr>
           <p:nvPr>
-            <p:ph type="body" idx="3" sz="quarter"/>
+            <p:ph type="body" sz="quarter" idx="3"/>
           </p:nvPr>
         </p:nvSpPr>
         <p:spPr/>
@@ -521,7 +315,7 @@
             <a:spLocks noGrp="1"/>
           </p:cNvSpPr>
           <p:nvPr>
-            <p:ph type="sldNum" idx="5" sz="quarter"/>
+            <p:ph type="sldNum" sz="quarter" idx="5"/>
           </p:nvPr>
         </p:nvSpPr>
         <p:spPr/>
@@ -535,7 +329,7 @@
 </file>
 
 <file path=ppt/notesSlides/notesSlide2.xml><?xml version="1.0" encoding="utf-8"?>
-<p:notes xmlns:a="http://schemas.openxmlformats.org/drawingml/2006/main" xmlns:p="http://schemas.openxmlformats.org/presentationml/2006/main" xmlns:r="http://schemas.openxmlformats.org/officeDocument/2006/relationships">
+<p:notes xmlns:a="http://schemas.openxmlformats.org/drawingml/2006/main" xmlns:r="http://schemas.openxmlformats.org/officeDocument/2006/relationships" xmlns:p="http://schemas.openxmlformats.org/presentationml/2006/main">
   <p:cSld>
     <p:spTree>
       <p:nvGrpSpPr>
@@ -555,7 +349,7 @@
         <p:nvSpPr>
           <p:cNvPr id="2" name="Slide Image Placeholder 1"/>
           <p:cNvSpPr>
-            <a:spLocks noGrp="1"/>
+            <a:spLocks noGrp="1" noRot="1" noChangeAspect="1"/>
           </p:cNvSpPr>
           <p:nvPr>
             <p:ph type="sldImg" idx="2"/>
@@ -570,7 +364,7 @@
             <a:spLocks noGrp="1"/>
           </p:cNvSpPr>
           <p:nvPr>
-            <p:ph type="body" idx="3" sz="quarter"/>
+            <p:ph type="body" sz="quarter" idx="3"/>
           </p:nvPr>
         </p:nvSpPr>
         <p:spPr/>
@@ -582,7 +376,9 @@
               <a:t>La curva plana de C no es un resultado pobre: dice que con siete predictoras y mil casos la regularización no es el cuello de botella. El techo lo pone la señal disponible, no el ajuste.</a:t>
             </a:r>
           </a:p>
-          <a:p/>
+          <a:p>
+            <a:endParaRPr/>
+          </a:p>
           <a:p>
             <a:r>
               <a:t>OJO: la versión anterior de esta lámina mencionaba SMOTE y RandomizedSearchCV. No se usó ninguno de los dos.</a:t>
@@ -597,7 +393,7 @@
             <a:spLocks noGrp="1"/>
           </p:cNvSpPr>
           <p:nvPr>
-            <p:ph type="sldNum" idx="5" sz="quarter"/>
+            <p:ph type="sldNum" sz="quarter" idx="5"/>
           </p:nvPr>
         </p:nvSpPr>
         <p:spPr/>
@@ -611,7 +407,7 @@
 </file>
 
 <file path=ppt/notesSlides/notesSlide3.xml><?xml version="1.0" encoding="utf-8"?>
-<p:notes xmlns:a="http://schemas.openxmlformats.org/drawingml/2006/main" xmlns:p="http://schemas.openxmlformats.org/presentationml/2006/main" xmlns:r="http://schemas.openxmlformats.org/officeDocument/2006/relationships">
+<p:notes xmlns:a="http://schemas.openxmlformats.org/drawingml/2006/main" xmlns:r="http://schemas.openxmlformats.org/officeDocument/2006/relationships" xmlns:p="http://schemas.openxmlformats.org/presentationml/2006/main">
   <p:cSld>
     <p:spTree>
       <p:nvGrpSpPr>
@@ -631,7 +427,7 @@
         <p:nvSpPr>
           <p:cNvPr id="2" name="Slide Image Placeholder 1"/>
           <p:cNvSpPr>
-            <a:spLocks noGrp="1"/>
+            <a:spLocks noGrp="1" noRot="1" noChangeAspect="1"/>
           </p:cNvSpPr>
           <p:nvPr>
             <p:ph type="sldImg" idx="2"/>
@@ -646,7 +442,7 @@
             <a:spLocks noGrp="1"/>
           </p:cNvSpPr>
           <p:nvPr>
-            <p:ph type="body" idx="3" sz="quarter"/>
+            <p:ph type="body" sz="quarter" idx="3"/>
           </p:nvPr>
         </p:nvSpPr>
         <p:spPr/>
@@ -667,7 +463,7 @@
             <a:spLocks noGrp="1"/>
           </p:cNvSpPr>
           <p:nvPr>
-            <p:ph type="sldNum" idx="5" sz="quarter"/>
+            <p:ph type="sldNum" sz="quarter" idx="5"/>
           </p:nvPr>
         </p:nvSpPr>
         <p:spPr/>
@@ -681,7 +477,7 @@
 </file>
 
 <file path=ppt/notesSlides/notesSlide4.xml><?xml version="1.0" encoding="utf-8"?>
-<p:notes xmlns:a="http://schemas.openxmlformats.org/drawingml/2006/main" xmlns:p="http://schemas.openxmlformats.org/presentationml/2006/main" xmlns:r="http://schemas.openxmlformats.org/officeDocument/2006/relationships">
+<p:notes xmlns:a="http://schemas.openxmlformats.org/drawingml/2006/main" xmlns:r="http://schemas.openxmlformats.org/officeDocument/2006/relationships" xmlns:p="http://schemas.openxmlformats.org/presentationml/2006/main">
   <p:cSld>
     <p:spTree>
       <p:nvGrpSpPr>
@@ -701,7 +497,7 @@
         <p:nvSpPr>
           <p:cNvPr id="2" name="Slide Image Placeholder 1"/>
           <p:cNvSpPr>
-            <a:spLocks noGrp="1"/>
+            <a:spLocks noGrp="1" noRot="1" noChangeAspect="1"/>
           </p:cNvSpPr>
           <p:nvPr>
             <p:ph type="sldImg" idx="2"/>
@@ -716,7 +512,7 @@
             <a:spLocks noGrp="1"/>
           </p:cNvSpPr>
           <p:nvPr>
-            <p:ph type="body" idx="3" sz="quarter"/>
+            <p:ph type="body" sz="quarter" idx="3"/>
           </p:nvPr>
         </p:nvSpPr>
         <p:spPr/>
@@ -737,7 +533,7 @@
             <a:spLocks noGrp="1"/>
           </p:cNvSpPr>
           <p:nvPr>
-            <p:ph type="sldNum" idx="5" sz="quarter"/>
+            <p:ph type="sldNum" sz="quarter" idx="5"/>
           </p:nvPr>
         </p:nvSpPr>
         <p:spPr/>
@@ -751,7 +547,7 @@
 </file>
 
 <file path=ppt/notesSlides/notesSlide5.xml><?xml version="1.0" encoding="utf-8"?>
-<p:notes xmlns:a="http://schemas.openxmlformats.org/drawingml/2006/main" xmlns:p="http://schemas.openxmlformats.org/presentationml/2006/main" xmlns:r="http://schemas.openxmlformats.org/officeDocument/2006/relationships">
+<p:notes xmlns:a="http://schemas.openxmlformats.org/drawingml/2006/main" xmlns:r="http://schemas.openxmlformats.org/officeDocument/2006/relationships" xmlns:p="http://schemas.openxmlformats.org/presentationml/2006/main">
   <p:cSld>
     <p:spTree>
       <p:nvGrpSpPr>
@@ -771,7 +567,7 @@
         <p:nvSpPr>
           <p:cNvPr id="2" name="Slide Image Placeholder 1"/>
           <p:cNvSpPr>
-            <a:spLocks noGrp="1"/>
+            <a:spLocks noGrp="1" noRot="1" noChangeAspect="1"/>
           </p:cNvSpPr>
           <p:nvPr>
             <p:ph type="sldImg" idx="2"/>
@@ -786,7 +582,7 @@
             <a:spLocks noGrp="1"/>
           </p:cNvSpPr>
           <p:nvPr>
-            <p:ph type="body" idx="3" sz="quarter"/>
+            <p:ph type="body" sz="quarter" idx="3"/>
           </p:nvPr>
         </p:nvSpPr>
         <p:spPr/>
@@ -807,7 +603,7 @@
             <a:spLocks noGrp="1"/>
           </p:cNvSpPr>
           <p:nvPr>
-            <p:ph type="sldNum" idx="5" sz="quarter"/>
+            <p:ph type="sldNum" sz="quarter" idx="5"/>
           </p:nvPr>
         </p:nvSpPr>
         <p:spPr/>
@@ -821,7 +617,7 @@
 </file>
 
 <file path=ppt/notesSlides/notesSlide6.xml><?xml version="1.0" encoding="utf-8"?>
-<p:notes xmlns:a="http://schemas.openxmlformats.org/drawingml/2006/main" xmlns:p="http://schemas.openxmlformats.org/presentationml/2006/main" xmlns:r="http://schemas.openxmlformats.org/officeDocument/2006/relationships">
+<p:notes xmlns:a="http://schemas.openxmlformats.org/drawingml/2006/main" xmlns:r="http://schemas.openxmlformats.org/officeDocument/2006/relationships" xmlns:p="http://schemas.openxmlformats.org/presentationml/2006/main">
   <p:cSld>
     <p:spTree>
       <p:nvGrpSpPr>
@@ -841,7 +637,7 @@
         <p:nvSpPr>
           <p:cNvPr id="2" name="Slide Image Placeholder 1"/>
           <p:cNvSpPr>
-            <a:spLocks noGrp="1"/>
+            <a:spLocks noGrp="1" noRot="1" noChangeAspect="1"/>
           </p:cNvSpPr>
           <p:nvPr>
             <p:ph type="sldImg" idx="2"/>
@@ -856,7 +652,7 @@
             <a:spLocks noGrp="1"/>
           </p:cNvSpPr>
           <p:nvPr>
-            <p:ph type="body" idx="3" sz="quarter"/>
+            <p:ph type="body" sz="quarter" idx="3"/>
           </p:nvPr>
         </p:nvSpPr>
         <p:spPr/>
@@ -868,7 +664,9 @@
               <a:t>Advertencia de lectura, por si la piden: la importancia por permutación mide pérdida de AUC y SHAP mide desplazamiento de la predicción. Son escalas distintas, por eso los números no son comparables entre sí — solo lo es el orden dentro de cada uno.</a:t>
             </a:r>
           </a:p>
-          <a:p/>
+          <a:p>
+            <a:endParaRPr/>
+          </a:p>
           <a:p>
             <a:r>
               <a:t>Figuras de respaldo disponibles: L4-6d_shap_forma_asistencia_2m.png y L4-6d_shap_forma_convivencia.png muestran la saturación en forma de S.</a:t>
@@ -883,7 +681,7 @@
             <a:spLocks noGrp="1"/>
           </p:cNvSpPr>
           <p:nvPr>
-            <p:ph type="sldNum" idx="5" sz="quarter"/>
+            <p:ph type="sldNum" sz="quarter" idx="5"/>
           </p:nvPr>
         </p:nvSpPr>
         <p:spPr/>
@@ -897,7 +695,7 @@
 </file>
 
 <file path=ppt/notesSlides/notesSlide7.xml><?xml version="1.0" encoding="utf-8"?>
-<p:notes xmlns:a="http://schemas.openxmlformats.org/drawingml/2006/main" xmlns:p="http://schemas.openxmlformats.org/presentationml/2006/main" xmlns:r="http://schemas.openxmlformats.org/officeDocument/2006/relationships">
+<p:notes xmlns:a="http://schemas.openxmlformats.org/drawingml/2006/main" xmlns:r="http://schemas.openxmlformats.org/officeDocument/2006/relationships" xmlns:p="http://schemas.openxmlformats.org/presentationml/2006/main">
   <p:cSld>
     <p:spTree>
       <p:nvGrpSpPr>
@@ -917,7 +715,7 @@
         <p:nvSpPr>
           <p:cNvPr id="2" name="Slide Image Placeholder 1"/>
           <p:cNvSpPr>
-            <a:spLocks noGrp="1"/>
+            <a:spLocks noGrp="1" noRot="1" noChangeAspect="1"/>
           </p:cNvSpPr>
           <p:nvPr>
             <p:ph type="sldImg" idx="2"/>
@@ -932,7 +730,7 @@
             <a:spLocks noGrp="1"/>
           </p:cNvSpPr>
           <p:nvPr>
-            <p:ph type="body" idx="3" sz="quarter"/>
+            <p:ph type="body" sz="quarter" idx="3"/>
           </p:nvPr>
         </p:nvSpPr>
         <p:spPr/>
@@ -944,7 +742,9 @@
               <a:t>El remate: el falso positivo (Alto Lauquén, 236 puntos) y un acierto (Colegio Renacer TP, Puente Alto, 256 puntos) tienen descomposiciones SHAP prácticamente idénticas —0,807 contra 0,812— y resultados separados por 20 puntos. Lo que los distingue no está en los datos que tenemos: ese es el límite honesto del modelo y la puerta de entrada al estudio cualitativo.</a:t>
             </a:r>
           </a:p>
-          <a:p/>
+          <a:p>
+            <a:endParaRPr/>
+          </a:p>
           <a:p>
             <a:r>
               <a:t>Ojo con los scores: los de la tabla vienen de la logística; los de los gráficos SHAP, del Random Forest. Por eso Loncoche aparece con 0,19 en una y 0,072 en el otro.</a:t>
@@ -959,7 +759,7 @@
             <a:spLocks noGrp="1"/>
           </p:cNvSpPr>
           <p:nvPr>
-            <p:ph type="sldNum" idx="5" sz="quarter"/>
+            <p:ph type="sldNum" sz="quarter" idx="5"/>
           </p:nvPr>
         </p:nvSpPr>
         <p:spPr/>
@@ -973,7 +773,7 @@
 </file>
 
 <file path=ppt/notesSlides/notesSlide8.xml><?xml version="1.0" encoding="utf-8"?>
-<p:notes xmlns:a="http://schemas.openxmlformats.org/drawingml/2006/main" xmlns:p="http://schemas.openxmlformats.org/presentationml/2006/main" xmlns:r="http://schemas.openxmlformats.org/officeDocument/2006/relationships">
+<p:notes xmlns:a="http://schemas.openxmlformats.org/drawingml/2006/main" xmlns:r="http://schemas.openxmlformats.org/officeDocument/2006/relationships" xmlns:p="http://schemas.openxmlformats.org/presentationml/2006/main">
   <p:cSld>
     <p:spTree>
       <p:nvGrpSpPr>
@@ -993,7 +793,7 @@
         <p:nvSpPr>
           <p:cNvPr id="2" name="Slide Image Placeholder 1"/>
           <p:cNvSpPr>
-            <a:spLocks noGrp="1"/>
+            <a:spLocks noGrp="1" noRot="1" noChangeAspect="1"/>
           </p:cNvSpPr>
           <p:nvPr>
             <p:ph type="sldImg" idx="2"/>
@@ -1008,7 +808,7 @@
             <a:spLocks noGrp="1"/>
           </p:cNvSpPr>
           <p:nvPr>
-            <p:ph type="body" idx="3" sz="quarter"/>
+            <p:ph type="body" sz="quarter" idx="3"/>
           </p:nvPr>
         </p:nvSpPr>
         <p:spPr/>
@@ -1029,7 +829,7 @@
             <a:spLocks noGrp="1"/>
           </p:cNvSpPr>
           <p:nvPr>
-            <p:ph type="sldNum" idx="5" sz="quarter"/>
+            <p:ph type="sldNum" sz="quarter" idx="5"/>
           </p:nvPr>
         </p:nvSpPr>
         <p:spPr/>
@@ -1080,10 +880,9 @@
           <a:lstStyle/>
           <a:p>
             <a:r>
-              <a:rPr lang="en-US" smtClean="0"/>
+              <a:rPr lang="en-US"/>
               <a:t>Click to edit Master title style</a:t>
             </a:r>
-            <a:endParaRPr lang="en-US"/>
           </a:p>
         </p:txBody>
       </p:sp>
@@ -1199,10 +998,9 @@
           </a:lstStyle>
           <a:p>
             <a:r>
-              <a:rPr lang="en-US" smtClean="0"/>
+              <a:rPr lang="en-US"/>
               <a:t>Click to edit Master subtitle style</a:t>
             </a:r>
-            <a:endParaRPr lang="en-US"/>
           </a:p>
         </p:txBody>
       </p:sp>
@@ -1223,7 +1021,7 @@
           <a:p>
             <a:fld id="{5BCAD085-E8A6-8845-BD4E-CB4CCA059FC4}" type="datetimeFigureOut">
               <a:rPr lang="en-US" smtClean="0"/>
-              <a:t>1/27/13</a:t>
+              <a:t>9/1/26</a:t>
             </a:fld>
             <a:endParaRPr lang="en-US"/>
           </a:p>
@@ -1317,10 +1115,9 @@
           <a:lstStyle/>
           <a:p>
             <a:r>
-              <a:rPr lang="en-US" smtClean="0"/>
+              <a:rPr lang="en-US"/>
               <a:t>Click to edit Master title style</a:t>
             </a:r>
-            <a:endParaRPr lang="en-US"/>
           </a:p>
         </p:txBody>
       </p:sp>
@@ -1341,38 +1138,37 @@
           <a:p>
             <a:pPr lvl="0"/>
             <a:r>
-              <a:rPr lang="en-US" smtClean="0"/>
+              <a:rPr lang="en-US"/>
               <a:t>Click to edit Master text styles</a:t>
             </a:r>
           </a:p>
           <a:p>
             <a:pPr lvl="1"/>
             <a:r>
-              <a:rPr lang="en-US" smtClean="0"/>
+              <a:rPr lang="en-US"/>
               <a:t>Second level</a:t>
             </a:r>
           </a:p>
           <a:p>
             <a:pPr lvl="2"/>
             <a:r>
-              <a:rPr lang="en-US" smtClean="0"/>
+              <a:rPr lang="en-US"/>
               <a:t>Third level</a:t>
             </a:r>
           </a:p>
           <a:p>
             <a:pPr lvl="3"/>
             <a:r>
-              <a:rPr lang="en-US" smtClean="0"/>
+              <a:rPr lang="en-US"/>
               <a:t>Fourth level</a:t>
             </a:r>
           </a:p>
           <a:p>
             <a:pPr lvl="4"/>
             <a:r>
-              <a:rPr lang="en-US" smtClean="0"/>
+              <a:rPr lang="en-US"/>
               <a:t>Fifth level</a:t>
             </a:r>
-            <a:endParaRPr lang="en-US"/>
           </a:p>
         </p:txBody>
       </p:sp>
@@ -1393,7 +1189,7 @@
           <a:p>
             <a:fld id="{5BCAD085-E8A6-8845-BD4E-CB4CCA059FC4}" type="datetimeFigureOut">
               <a:rPr lang="en-US" smtClean="0"/>
-              <a:t>1/27/13</a:t>
+              <a:t>9/1/26</a:t>
             </a:fld>
             <a:endParaRPr lang="en-US"/>
           </a:p>
@@ -1492,10 +1288,9 @@
           <a:lstStyle/>
           <a:p>
             <a:r>
-              <a:rPr lang="en-US" smtClean="0"/>
+              <a:rPr lang="en-US"/>
               <a:t>Click to edit Master title style</a:t>
             </a:r>
-            <a:endParaRPr lang="en-US"/>
           </a:p>
         </p:txBody>
       </p:sp>
@@ -1521,38 +1316,37 @@
           <a:p>
             <a:pPr lvl="0"/>
             <a:r>
-              <a:rPr lang="en-US" smtClean="0"/>
+              <a:rPr lang="en-US"/>
               <a:t>Click to edit Master text styles</a:t>
             </a:r>
           </a:p>
           <a:p>
             <a:pPr lvl="1"/>
             <a:r>
-              <a:rPr lang="en-US" smtClean="0"/>
+              <a:rPr lang="en-US"/>
               <a:t>Second level</a:t>
             </a:r>
           </a:p>
           <a:p>
             <a:pPr lvl="2"/>
             <a:r>
-              <a:rPr lang="en-US" smtClean="0"/>
+              <a:rPr lang="en-US"/>
               <a:t>Third level</a:t>
             </a:r>
           </a:p>
           <a:p>
             <a:pPr lvl="3"/>
             <a:r>
-              <a:rPr lang="en-US" smtClean="0"/>
+              <a:rPr lang="en-US"/>
               <a:t>Fourth level</a:t>
             </a:r>
           </a:p>
           <a:p>
             <a:pPr lvl="4"/>
             <a:r>
-              <a:rPr lang="en-US" smtClean="0"/>
+              <a:rPr lang="en-US"/>
               <a:t>Fifth level</a:t>
             </a:r>
-            <a:endParaRPr lang="en-US"/>
           </a:p>
         </p:txBody>
       </p:sp>
@@ -1573,7 +1367,7 @@
           <a:p>
             <a:fld id="{5BCAD085-E8A6-8845-BD4E-CB4CCA059FC4}" type="datetimeFigureOut">
               <a:rPr lang="en-US" smtClean="0"/>
-              <a:t>1/27/13</a:t>
+              <a:t>9/1/26</a:t>
             </a:fld>
             <a:endParaRPr lang="en-US"/>
           </a:p>
@@ -1667,10 +1461,9 @@
           <a:lstStyle/>
           <a:p>
             <a:r>
-              <a:rPr lang="en-US" smtClean="0"/>
+              <a:rPr lang="en-US"/>
               <a:t>Click to edit Master title style</a:t>
             </a:r>
-            <a:endParaRPr lang="en-US"/>
           </a:p>
         </p:txBody>
       </p:sp>
@@ -1691,38 +1484,37 @@
           <a:p>
             <a:pPr lvl="0"/>
             <a:r>
-              <a:rPr lang="en-US" smtClean="0"/>
+              <a:rPr lang="en-US"/>
               <a:t>Click to edit Master text styles</a:t>
             </a:r>
           </a:p>
           <a:p>
             <a:pPr lvl="1"/>
             <a:r>
-              <a:rPr lang="en-US" smtClean="0"/>
+              <a:rPr lang="en-US"/>
               <a:t>Second level</a:t>
             </a:r>
           </a:p>
           <a:p>
             <a:pPr lvl="2"/>
             <a:r>
-              <a:rPr lang="en-US" smtClean="0"/>
+              <a:rPr lang="en-US"/>
               <a:t>Third level</a:t>
             </a:r>
           </a:p>
           <a:p>
             <a:pPr lvl="3"/>
             <a:r>
-              <a:rPr lang="en-US" smtClean="0"/>
+              <a:rPr lang="en-US"/>
               <a:t>Fourth level</a:t>
             </a:r>
           </a:p>
           <a:p>
             <a:pPr lvl="4"/>
             <a:r>
-              <a:rPr lang="en-US" smtClean="0"/>
+              <a:rPr lang="en-US"/>
               <a:t>Fifth level</a:t>
             </a:r>
-            <a:endParaRPr lang="en-US"/>
           </a:p>
         </p:txBody>
       </p:sp>
@@ -1743,7 +1535,7 @@
           <a:p>
             <a:fld id="{5BCAD085-E8A6-8845-BD4E-CB4CCA059FC4}" type="datetimeFigureOut">
               <a:rPr lang="en-US" smtClean="0"/>
-              <a:t>1/27/13</a:t>
+              <a:t>9/1/26</a:t>
             </a:fld>
             <a:endParaRPr lang="en-US"/>
           </a:p>
@@ -1846,10 +1638,9 @@
           </a:lstStyle>
           <a:p>
             <a:r>
-              <a:rPr lang="en-US" smtClean="0"/>
+              <a:rPr lang="en-US"/>
               <a:t>Click to edit Master title style</a:t>
             </a:r>
-            <a:endParaRPr lang="en-US"/>
           </a:p>
         </p:txBody>
       </p:sp>
@@ -1966,7 +1757,7 @@
           <a:p>
             <a:pPr lvl="0"/>
             <a:r>
-              <a:rPr lang="en-US" smtClean="0"/>
+              <a:rPr lang="en-US"/>
               <a:t>Click to edit Master text styles</a:t>
             </a:r>
           </a:p>
@@ -1989,7 +1780,7 @@
           <a:p>
             <a:fld id="{5BCAD085-E8A6-8845-BD4E-CB4CCA059FC4}" type="datetimeFigureOut">
               <a:rPr lang="en-US" smtClean="0"/>
-              <a:t>1/27/13</a:t>
+              <a:t>9/1/26</a:t>
             </a:fld>
             <a:endParaRPr lang="en-US"/>
           </a:p>
@@ -2083,10 +1874,9 @@
           <a:lstStyle/>
           <a:p>
             <a:r>
-              <a:rPr lang="en-US" smtClean="0"/>
+              <a:rPr lang="en-US"/>
               <a:t>Click to edit Master title style</a:t>
             </a:r>
-            <a:endParaRPr lang="en-US"/>
           </a:p>
         </p:txBody>
       </p:sp>
@@ -2140,38 +1930,37 @@
           <a:p>
             <a:pPr lvl="0"/>
             <a:r>
-              <a:rPr lang="en-US" smtClean="0"/>
+              <a:rPr lang="en-US"/>
               <a:t>Click to edit Master text styles</a:t>
             </a:r>
           </a:p>
           <a:p>
             <a:pPr lvl="1"/>
             <a:r>
-              <a:rPr lang="en-US" smtClean="0"/>
+              <a:rPr lang="en-US"/>
               <a:t>Second level</a:t>
             </a:r>
           </a:p>
           <a:p>
             <a:pPr lvl="2"/>
             <a:r>
-              <a:rPr lang="en-US" smtClean="0"/>
+              <a:rPr lang="en-US"/>
               <a:t>Third level</a:t>
             </a:r>
           </a:p>
           <a:p>
             <a:pPr lvl="3"/>
             <a:r>
-              <a:rPr lang="en-US" smtClean="0"/>
+              <a:rPr lang="en-US"/>
               <a:t>Fourth level</a:t>
             </a:r>
           </a:p>
           <a:p>
             <a:pPr lvl="4"/>
             <a:r>
-              <a:rPr lang="en-US" smtClean="0"/>
+              <a:rPr lang="en-US"/>
               <a:t>Fifth level</a:t>
             </a:r>
-            <a:endParaRPr lang="en-US"/>
           </a:p>
         </p:txBody>
       </p:sp>
@@ -2225,38 +2014,37 @@
           <a:p>
             <a:pPr lvl="0"/>
             <a:r>
-              <a:rPr lang="en-US" smtClean="0"/>
+              <a:rPr lang="en-US"/>
               <a:t>Click to edit Master text styles</a:t>
             </a:r>
           </a:p>
           <a:p>
             <a:pPr lvl="1"/>
             <a:r>
-              <a:rPr lang="en-US" smtClean="0"/>
+              <a:rPr lang="en-US"/>
               <a:t>Second level</a:t>
             </a:r>
           </a:p>
           <a:p>
             <a:pPr lvl="2"/>
             <a:r>
-              <a:rPr lang="en-US" smtClean="0"/>
+              <a:rPr lang="en-US"/>
               <a:t>Third level</a:t>
             </a:r>
           </a:p>
           <a:p>
             <a:pPr lvl="3"/>
             <a:r>
-              <a:rPr lang="en-US" smtClean="0"/>
+              <a:rPr lang="en-US"/>
               <a:t>Fourth level</a:t>
             </a:r>
           </a:p>
           <a:p>
             <a:pPr lvl="4"/>
             <a:r>
-              <a:rPr lang="en-US" smtClean="0"/>
+              <a:rPr lang="en-US"/>
               <a:t>Fifth level</a:t>
             </a:r>
-            <a:endParaRPr lang="en-US"/>
           </a:p>
         </p:txBody>
       </p:sp>
@@ -2277,7 +2065,7 @@
           <a:p>
             <a:fld id="{5BCAD085-E8A6-8845-BD4E-CB4CCA059FC4}" type="datetimeFigureOut">
               <a:rPr lang="en-US" smtClean="0"/>
-              <a:t>1/27/13</a:t>
+              <a:t>9/1/26</a:t>
             </a:fld>
             <a:endParaRPr lang="en-US"/>
           </a:p>
@@ -2375,10 +2163,9 @@
           </a:lstStyle>
           <a:p>
             <a:r>
-              <a:rPr lang="en-US" smtClean="0"/>
+              <a:rPr lang="en-US"/>
               <a:t>Click to edit Master title style</a:t>
             </a:r>
-            <a:endParaRPr lang="en-US"/>
           </a:p>
         </p:txBody>
       </p:sp>
@@ -2441,7 +2228,7 @@
           <a:p>
             <a:pPr lvl="0"/>
             <a:r>
-              <a:rPr lang="en-US" smtClean="0"/>
+              <a:rPr lang="en-US"/>
               <a:t>Click to edit Master text styles</a:t>
             </a:r>
           </a:p>
@@ -2497,38 +2284,37 @@
           <a:p>
             <a:pPr lvl="0"/>
             <a:r>
-              <a:rPr lang="en-US" smtClean="0"/>
+              <a:rPr lang="en-US"/>
               <a:t>Click to edit Master text styles</a:t>
             </a:r>
           </a:p>
           <a:p>
             <a:pPr lvl="1"/>
             <a:r>
-              <a:rPr lang="en-US" smtClean="0"/>
+              <a:rPr lang="en-US"/>
               <a:t>Second level</a:t>
             </a:r>
           </a:p>
           <a:p>
             <a:pPr lvl="2"/>
             <a:r>
-              <a:rPr lang="en-US" smtClean="0"/>
+              <a:rPr lang="en-US"/>
               <a:t>Third level</a:t>
             </a:r>
           </a:p>
           <a:p>
             <a:pPr lvl="3"/>
             <a:r>
-              <a:rPr lang="en-US" smtClean="0"/>
+              <a:rPr lang="en-US"/>
               <a:t>Fourth level</a:t>
             </a:r>
           </a:p>
           <a:p>
             <a:pPr lvl="4"/>
             <a:r>
-              <a:rPr lang="en-US" smtClean="0"/>
+              <a:rPr lang="en-US"/>
               <a:t>Fifth level</a:t>
             </a:r>
-            <a:endParaRPr lang="en-US"/>
           </a:p>
         </p:txBody>
       </p:sp>
@@ -2591,7 +2377,7 @@
           <a:p>
             <a:pPr lvl="0"/>
             <a:r>
-              <a:rPr lang="en-US" smtClean="0"/>
+              <a:rPr lang="en-US"/>
               <a:t>Click to edit Master text styles</a:t>
             </a:r>
           </a:p>
@@ -2647,38 +2433,37 @@
           <a:p>
             <a:pPr lvl="0"/>
             <a:r>
-              <a:rPr lang="en-US" smtClean="0"/>
+              <a:rPr lang="en-US"/>
               <a:t>Click to edit Master text styles</a:t>
             </a:r>
           </a:p>
           <a:p>
             <a:pPr lvl="1"/>
             <a:r>
-              <a:rPr lang="en-US" smtClean="0"/>
+              <a:rPr lang="en-US"/>
               <a:t>Second level</a:t>
             </a:r>
           </a:p>
           <a:p>
             <a:pPr lvl="2"/>
             <a:r>
-              <a:rPr lang="en-US" smtClean="0"/>
+              <a:rPr lang="en-US"/>
               <a:t>Third level</a:t>
             </a:r>
           </a:p>
           <a:p>
             <a:pPr lvl="3"/>
             <a:r>
-              <a:rPr lang="en-US" smtClean="0"/>
+              <a:rPr lang="en-US"/>
               <a:t>Fourth level</a:t>
             </a:r>
           </a:p>
           <a:p>
             <a:pPr lvl="4"/>
             <a:r>
-              <a:rPr lang="en-US" smtClean="0"/>
+              <a:rPr lang="en-US"/>
               <a:t>Fifth level</a:t>
             </a:r>
-            <a:endParaRPr lang="en-US"/>
           </a:p>
         </p:txBody>
       </p:sp>
@@ -2699,7 +2484,7 @@
           <a:p>
             <a:fld id="{5BCAD085-E8A6-8845-BD4E-CB4CCA059FC4}" type="datetimeFigureOut">
               <a:rPr lang="en-US" smtClean="0"/>
-              <a:t>1/27/13</a:t>
+              <a:t>9/1/26</a:t>
             </a:fld>
             <a:endParaRPr lang="en-US"/>
           </a:p>
@@ -2793,10 +2578,9 @@
           <a:lstStyle/>
           <a:p>
             <a:r>
-              <a:rPr lang="en-US" smtClean="0"/>
+              <a:rPr lang="en-US"/>
               <a:t>Click to edit Master title style</a:t>
             </a:r>
-            <a:endParaRPr lang="en-US"/>
           </a:p>
         </p:txBody>
       </p:sp>
@@ -2817,7 +2601,7 @@
           <a:p>
             <a:fld id="{5BCAD085-E8A6-8845-BD4E-CB4CCA059FC4}" type="datetimeFigureOut">
               <a:rPr lang="en-US" smtClean="0"/>
-              <a:t>1/27/13</a:t>
+              <a:t>9/1/26</a:t>
             </a:fld>
             <a:endParaRPr lang="en-US"/>
           </a:p>
@@ -2912,7 +2696,7 @@
           <a:p>
             <a:fld id="{5BCAD085-E8A6-8845-BD4E-CB4CCA059FC4}" type="datetimeFigureOut">
               <a:rPr lang="en-US" smtClean="0"/>
-              <a:t>1/27/13</a:t>
+              <a:t>9/1/26</a:t>
             </a:fld>
             <a:endParaRPr lang="en-US"/>
           </a:p>
@@ -3015,10 +2799,9 @@
           </a:lstStyle>
           <a:p>
             <a:r>
-              <a:rPr lang="en-US" smtClean="0"/>
+              <a:rPr lang="en-US"/>
               <a:t>Click to edit Master title style</a:t>
             </a:r>
-            <a:endParaRPr lang="en-US"/>
           </a:p>
         </p:txBody>
       </p:sp>
@@ -3072,38 +2855,37 @@
           <a:p>
             <a:pPr lvl="0"/>
             <a:r>
-              <a:rPr lang="en-US" smtClean="0"/>
+              <a:rPr lang="en-US"/>
               <a:t>Click to edit Master text styles</a:t>
             </a:r>
           </a:p>
           <a:p>
             <a:pPr lvl="1"/>
             <a:r>
-              <a:rPr lang="en-US" smtClean="0"/>
+              <a:rPr lang="en-US"/>
               <a:t>Second level</a:t>
             </a:r>
           </a:p>
           <a:p>
             <a:pPr lvl="2"/>
             <a:r>
-              <a:rPr lang="en-US" smtClean="0"/>
+              <a:rPr lang="en-US"/>
               <a:t>Third level</a:t>
             </a:r>
           </a:p>
           <a:p>
             <a:pPr lvl="3"/>
             <a:r>
-              <a:rPr lang="en-US" smtClean="0"/>
+              <a:rPr lang="en-US"/>
               <a:t>Fourth level</a:t>
             </a:r>
           </a:p>
           <a:p>
             <a:pPr lvl="4"/>
             <a:r>
-              <a:rPr lang="en-US" smtClean="0"/>
+              <a:rPr lang="en-US"/>
               <a:t>Fifth level</a:t>
             </a:r>
-            <a:endParaRPr lang="en-US"/>
           </a:p>
         </p:txBody>
       </p:sp>
@@ -3166,7 +2948,7 @@
           <a:p>
             <a:pPr lvl="0"/>
             <a:r>
-              <a:rPr lang="en-US" smtClean="0"/>
+              <a:rPr lang="en-US"/>
               <a:t>Click to edit Master text styles</a:t>
             </a:r>
           </a:p>
@@ -3189,7 +2971,7 @@
           <a:p>
             <a:fld id="{5BCAD085-E8A6-8845-BD4E-CB4CCA059FC4}" type="datetimeFigureOut">
               <a:rPr lang="en-US" smtClean="0"/>
-              <a:t>1/27/13</a:t>
+              <a:t>9/1/26</a:t>
             </a:fld>
             <a:endParaRPr lang="en-US"/>
           </a:p>
@@ -3292,10 +3074,9 @@
           </a:lstStyle>
           <a:p>
             <a:r>
-              <a:rPr lang="en-US" smtClean="0"/>
+              <a:rPr lang="en-US"/>
               <a:t>Click to edit Master title style</a:t>
             </a:r>
-            <a:endParaRPr lang="en-US"/>
           </a:p>
         </p:txBody>
       </p:sp>
@@ -3419,7 +3200,7 @@
           <a:p>
             <a:pPr lvl="0"/>
             <a:r>
-              <a:rPr lang="en-US" smtClean="0"/>
+              <a:rPr lang="en-US"/>
               <a:t>Click to edit Master text styles</a:t>
             </a:r>
           </a:p>
@@ -3442,7 +3223,7 @@
           <a:p>
             <a:fld id="{5BCAD085-E8A6-8845-BD4E-CB4CCA059FC4}" type="datetimeFigureOut">
               <a:rPr lang="en-US" smtClean="0"/>
-              <a:t>1/27/13</a:t>
+              <a:t>9/1/26</a:t>
             </a:fld>
             <a:endParaRPr lang="en-US"/>
           </a:p>
@@ -3551,10 +3332,9 @@
           <a:lstStyle/>
           <a:p>
             <a:r>
-              <a:rPr lang="en-US" smtClean="0"/>
+              <a:rPr lang="en-US"/>
               <a:t>Click to edit Master title style</a:t>
             </a:r>
-            <a:endParaRPr lang="en-US"/>
           </a:p>
         </p:txBody>
       </p:sp>
@@ -3585,38 +3365,37 @@
           <a:p>
             <a:pPr lvl="0"/>
             <a:r>
-              <a:rPr lang="en-US" smtClean="0"/>
+              <a:rPr lang="en-US"/>
               <a:t>Click to edit Master text styles</a:t>
             </a:r>
           </a:p>
           <a:p>
             <a:pPr lvl="1"/>
             <a:r>
-              <a:rPr lang="en-US" smtClean="0"/>
+              <a:rPr lang="en-US"/>
               <a:t>Second level</a:t>
             </a:r>
           </a:p>
           <a:p>
             <a:pPr lvl="2"/>
             <a:r>
-              <a:rPr lang="en-US" smtClean="0"/>
+              <a:rPr lang="en-US"/>
               <a:t>Third level</a:t>
             </a:r>
           </a:p>
           <a:p>
             <a:pPr lvl="3"/>
             <a:r>
-              <a:rPr lang="en-US" smtClean="0"/>
+              <a:rPr lang="en-US"/>
               <a:t>Fourth level</a:t>
             </a:r>
           </a:p>
           <a:p>
             <a:pPr lvl="4"/>
             <a:r>
-              <a:rPr lang="en-US" smtClean="0"/>
+              <a:rPr lang="en-US"/>
               <a:t>Fifth level</a:t>
             </a:r>
-            <a:endParaRPr lang="en-US"/>
           </a:p>
         </p:txBody>
       </p:sp>
@@ -3655,7 +3434,7 @@
           <a:p>
             <a:fld id="{5BCAD085-E8A6-8845-BD4E-CB4CCA059FC4}" type="datetimeFigureOut">
               <a:rPr lang="en-US" smtClean="0"/>
-              <a:t>1/27/13</a:t>
+              <a:t>9/1/26</a:t>
             </a:fld>
             <a:endParaRPr lang="en-US"/>
           </a:p>
@@ -4014,7 +3793,7 @@
 </file>
 
 <file path=ppt/slides/slide1.xml><?xml version="1.0" encoding="utf-8"?>
-<p:sld xmlns:a="http://schemas.openxmlformats.org/drawingml/2006/main" xmlns:p="http://schemas.openxmlformats.org/presentationml/2006/main" xmlns:r="http://schemas.openxmlformats.org/officeDocument/2006/relationships">
+<p:sld xmlns:a="http://schemas.openxmlformats.org/drawingml/2006/main" xmlns:r="http://schemas.openxmlformats.org/officeDocument/2006/relationships" xmlns:p="http://schemas.openxmlformats.org/presentationml/2006/main">
   <p:cSld>
     <p:spTree>
       <p:nvGrpSpPr>
@@ -4022,7 +3801,14 @@
         <p:cNvGrpSpPr/>
         <p:nvPr/>
       </p:nvGrpSpPr>
-      <p:grpSpPr/>
+      <p:grpSpPr>
+        <a:xfrm>
+          <a:off x="0" y="0"/>
+          <a:ext cx="0" cy="0"/>
+          <a:chOff x="0" y="0"/>
+          <a:chExt cx="0" cy="0"/>
+        </a:xfrm>
+      </p:grpSpPr>
       <p:sp>
         <p:nvSpPr>
           <p:cNvPr id="2" name="TextBox 1"/>
@@ -4040,7 +3826,7 @@
           <a:noFill/>
         </p:spPr>
         <p:txBody>
-          <a:bodyPr wrap="square" anchor="t" lIns="0" rIns="0" tIns="0" bIns="0">
+          <a:bodyPr wrap="square" lIns="0" tIns="0" rIns="0" bIns="0" anchor="t">
             <a:spAutoFit/>
           </a:bodyPr>
           <a:lstStyle/>
@@ -4082,7 +3868,7 @@
           <a:noFill/>
         </p:spPr>
         <p:txBody>
-          <a:bodyPr wrap="square" anchor="t" lIns="0" rIns="0" tIns="0" bIns="0">
+          <a:bodyPr wrap="square" lIns="0" tIns="0" rIns="0" bIns="0" anchor="t">
             <a:spAutoFit/>
           </a:bodyPr>
           <a:lstStyle/>
@@ -4148,6 +3934,7 @@
           <a:lstStyle/>
           <a:p>
             <a:pPr algn="ctr"/>
+            <a:endParaRPr/>
           </a:p>
         </p:txBody>
       </p:sp>
@@ -4168,7 +3955,7 @@
           <a:noFill/>
         </p:spPr>
         <p:txBody>
-          <a:bodyPr wrap="square" anchor="t" lIns="0" rIns="0" tIns="0" bIns="0">
+          <a:bodyPr wrap="square" lIns="0" tIns="0" rIns="0" bIns="0" anchor="t">
             <a:spAutoFit/>
           </a:bodyPr>
           <a:lstStyle/>
@@ -4182,7 +3969,7 @@
               </a:spcBef>
             </a:pPr>
             <a:r>
-              <a:rPr sz="1350" b="0">
+              <a:rPr sz="1350" b="0" dirty="0">
                 <a:solidFill>
                   <a:srgbClr val="16202C"/>
                 </a:solidFill>
@@ -4191,22 +3978,283 @@
               <a:t>•  </a:t>
             </a:r>
             <a:r>
-              <a:rPr sz="1350" b="1">
-                <a:solidFill>
-                  <a:srgbClr val="16202C"/>
-                </a:solidFill>
-                <a:latin typeface="Arial"/>
-              </a:rPr>
-              <a:t>Qué se predice.</a:t>
-            </a:r>
-            <a:r>
-              <a:rPr sz="1350" b="0">
-                <a:solidFill>
-                  <a:srgbClr val="16202C"/>
-                </a:solidFill>
-                <a:latin typeface="Arial"/>
-              </a:rPr>
-              <a:t> target_bin = 1 si el establecimiento alcanza 252 puntos o más en Matemática 2° medio (Elemental o adecuado); 0 si queda en Insuficiente.</a:t>
+              <a:rPr sz="1350" b="1" dirty="0" err="1">
+                <a:solidFill>
+                  <a:srgbClr val="16202C"/>
+                </a:solidFill>
+                <a:latin typeface="Arial"/>
+              </a:rPr>
+              <a:t>Qué</a:t>
+            </a:r>
+            <a:r>
+              <a:rPr sz="1350" b="1" dirty="0">
+                <a:solidFill>
+                  <a:srgbClr val="16202C"/>
+                </a:solidFill>
+                <a:latin typeface="Arial"/>
+              </a:rPr>
+              <a:t> se </a:t>
+            </a:r>
+            <a:r>
+              <a:rPr sz="1350" b="1" dirty="0" err="1">
+                <a:solidFill>
+                  <a:srgbClr val="16202C"/>
+                </a:solidFill>
+                <a:latin typeface="Arial"/>
+              </a:rPr>
+              <a:t>predice</a:t>
+            </a:r>
+            <a:r>
+              <a:rPr sz="1350" b="1" dirty="0">
+                <a:solidFill>
+                  <a:srgbClr val="16202C"/>
+                </a:solidFill>
+                <a:latin typeface="Arial"/>
+              </a:rPr>
+              <a:t>.</a:t>
+            </a:r>
+            <a:r>
+              <a:rPr sz="1350" b="0" dirty="0">
+                <a:solidFill>
+                  <a:srgbClr val="16202C"/>
+                </a:solidFill>
+                <a:latin typeface="Arial"/>
+              </a:rPr>
+              <a:t> </a:t>
+            </a:r>
+            <a:r>
+              <a:rPr sz="1350" b="0" dirty="0" err="1">
+                <a:solidFill>
+                  <a:srgbClr val="16202C"/>
+                </a:solidFill>
+                <a:latin typeface="Arial"/>
+              </a:rPr>
+              <a:t>target_bin</a:t>
+            </a:r>
+            <a:r>
+              <a:rPr sz="1350" b="0" dirty="0">
+                <a:solidFill>
+                  <a:srgbClr val="16202C"/>
+                </a:solidFill>
+                <a:latin typeface="Arial"/>
+              </a:rPr>
+              <a:t> = 1 </a:t>
+            </a:r>
+            <a:r>
+              <a:rPr sz="1350" b="0" dirty="0" err="1">
+                <a:solidFill>
+                  <a:srgbClr val="16202C"/>
+                </a:solidFill>
+                <a:latin typeface="Arial"/>
+              </a:rPr>
+              <a:t>si</a:t>
+            </a:r>
+            <a:r>
+              <a:rPr sz="1350" b="0" dirty="0">
+                <a:solidFill>
+                  <a:srgbClr val="16202C"/>
+                </a:solidFill>
+                <a:latin typeface="Arial"/>
+              </a:rPr>
+              <a:t> </a:t>
+            </a:r>
+            <a:r>
+              <a:rPr sz="1350" b="0" dirty="0" err="1">
+                <a:solidFill>
+                  <a:srgbClr val="16202C"/>
+                </a:solidFill>
+                <a:latin typeface="Arial"/>
+              </a:rPr>
+              <a:t>el</a:t>
+            </a:r>
+            <a:r>
+              <a:rPr sz="1350" b="0" dirty="0">
+                <a:solidFill>
+                  <a:srgbClr val="16202C"/>
+                </a:solidFill>
+                <a:latin typeface="Arial"/>
+              </a:rPr>
+              <a:t> </a:t>
+            </a:r>
+            <a:r>
+              <a:rPr sz="1350" b="0" dirty="0" err="1">
+                <a:solidFill>
+                  <a:srgbClr val="16202C"/>
+                </a:solidFill>
+                <a:latin typeface="Arial"/>
+              </a:rPr>
+              <a:t>establecimiento</a:t>
+            </a:r>
+            <a:r>
+              <a:rPr sz="1350" b="0" dirty="0">
+                <a:solidFill>
+                  <a:srgbClr val="16202C"/>
+                </a:solidFill>
+                <a:latin typeface="Arial"/>
+              </a:rPr>
+              <a:t> </a:t>
+            </a:r>
+            <a:r>
+              <a:rPr sz="1350" b="0" dirty="0" err="1">
+                <a:solidFill>
+                  <a:srgbClr val="16202C"/>
+                </a:solidFill>
+                <a:latin typeface="Arial"/>
+              </a:rPr>
+              <a:t>alcanza</a:t>
+            </a:r>
+            <a:r>
+              <a:rPr sz="1350" b="0" dirty="0">
+                <a:solidFill>
+                  <a:srgbClr val="16202C"/>
+                </a:solidFill>
+                <a:latin typeface="Arial"/>
+              </a:rPr>
+              <a:t> 252 puntos o </a:t>
+            </a:r>
+            <a:r>
+              <a:rPr sz="1350" b="0" dirty="0" err="1">
+                <a:solidFill>
+                  <a:srgbClr val="16202C"/>
+                </a:solidFill>
+                <a:latin typeface="Arial"/>
+              </a:rPr>
+              <a:t>más</a:t>
+            </a:r>
+            <a:r>
+              <a:rPr sz="1350" b="0" dirty="0">
+                <a:solidFill>
+                  <a:srgbClr val="16202C"/>
+                </a:solidFill>
+                <a:latin typeface="Arial"/>
+              </a:rPr>
+              <a:t> </a:t>
+            </a:r>
+            <a:r>
+              <a:rPr sz="1350" b="0" dirty="0" err="1">
+                <a:solidFill>
+                  <a:srgbClr val="16202C"/>
+                </a:solidFill>
+                <a:latin typeface="Arial"/>
+              </a:rPr>
+              <a:t>en</a:t>
+            </a:r>
+            <a:r>
+              <a:rPr sz="1350" b="0" dirty="0">
+                <a:solidFill>
+                  <a:srgbClr val="16202C"/>
+                </a:solidFill>
+                <a:latin typeface="Arial"/>
+              </a:rPr>
+              <a:t> </a:t>
+            </a:r>
+            <a:r>
+              <a:rPr sz="1350" b="0" dirty="0" err="1">
+                <a:solidFill>
+                  <a:srgbClr val="16202C"/>
+                </a:solidFill>
+                <a:latin typeface="Arial"/>
+              </a:rPr>
+              <a:t>Matemática</a:t>
+            </a:r>
+            <a:r>
+              <a:rPr sz="1350" b="0" dirty="0">
+                <a:solidFill>
+                  <a:srgbClr val="16202C"/>
+                </a:solidFill>
+                <a:latin typeface="Arial"/>
+              </a:rPr>
+              <a:t> 2° medio (Elemental o </a:t>
+            </a:r>
+            <a:r>
+              <a:rPr sz="1350" b="0" dirty="0" err="1">
+                <a:solidFill>
+                  <a:srgbClr val="16202C"/>
+                </a:solidFill>
+                <a:latin typeface="Arial"/>
+              </a:rPr>
+              <a:t>adecuado</a:t>
+            </a:r>
+            <a:r>
+              <a:rPr sz="1350" b="0" dirty="0">
+                <a:solidFill>
+                  <a:srgbClr val="16202C"/>
+                </a:solidFill>
+                <a:latin typeface="Arial"/>
+              </a:rPr>
+              <a:t>); 0 </a:t>
+            </a:r>
+            <a:r>
+              <a:rPr sz="1350" b="0" dirty="0" err="1">
+                <a:solidFill>
+                  <a:srgbClr val="16202C"/>
+                </a:solidFill>
+                <a:latin typeface="Arial"/>
+              </a:rPr>
+              <a:t>si</a:t>
+            </a:r>
+            <a:r>
+              <a:rPr sz="1350" b="0" dirty="0">
+                <a:solidFill>
+                  <a:srgbClr val="16202C"/>
+                </a:solidFill>
+                <a:latin typeface="Arial"/>
+              </a:rPr>
+              <a:t> </a:t>
+            </a:r>
+            <a:r>
+              <a:rPr sz="1350" b="0" dirty="0" err="1">
+                <a:solidFill>
+                  <a:srgbClr val="16202C"/>
+                </a:solidFill>
+                <a:latin typeface="Arial"/>
+              </a:rPr>
+              <a:t>queda</a:t>
+            </a:r>
+            <a:r>
+              <a:rPr sz="1350" b="0" dirty="0">
+                <a:solidFill>
+                  <a:srgbClr val="16202C"/>
+                </a:solidFill>
+                <a:latin typeface="Arial"/>
+              </a:rPr>
+              <a:t> </a:t>
+            </a:r>
+            <a:r>
+              <a:rPr sz="1350" b="0" dirty="0" err="1">
+                <a:solidFill>
+                  <a:srgbClr val="16202C"/>
+                </a:solidFill>
+                <a:latin typeface="Arial"/>
+              </a:rPr>
+              <a:t>en</a:t>
+            </a:r>
+            <a:r>
+              <a:rPr sz="1350" b="0" dirty="0">
+                <a:solidFill>
+                  <a:srgbClr val="16202C"/>
+                </a:solidFill>
+                <a:latin typeface="Arial"/>
+              </a:rPr>
+              <a:t> </a:t>
+            </a:r>
+            <a:r>
+              <a:rPr sz="1350" b="0" dirty="0" err="1">
+                <a:solidFill>
+                  <a:srgbClr val="16202C"/>
+                </a:solidFill>
+                <a:latin typeface="Arial"/>
+              </a:rPr>
+              <a:t>Insuficiente</a:t>
+            </a:r>
+            <a:r>
+              <a:rPr sz="1350" b="0" dirty="0">
+                <a:solidFill>
+                  <a:srgbClr val="16202C"/>
+                </a:solidFill>
+                <a:latin typeface="Arial"/>
+              </a:rPr>
+              <a:t>.</a:t>
             </a:r>
           </a:p>
           <a:p>
@@ -4219,13 +4267,103 @@
               </a:spcBef>
             </a:pPr>
             <a:r>
-              <a:rPr sz="1200" b="0">
+              <a:rPr sz="1200" b="0" dirty="0">
                 <a:solidFill>
                   <a:srgbClr val="556378"/>
                 </a:solidFill>
                 <a:latin typeface="Arial"/>
               </a:rPr>
-              <a:t>     –  1.075 Insuficiente · 354 Elemental o adecuado → la clase positiva es solo el 24,8 %.</a:t>
+              <a:t>     –  1.075 </a:t>
+            </a:r>
+            <a:r>
+              <a:rPr sz="1200" b="0" dirty="0" err="1">
+                <a:solidFill>
+                  <a:srgbClr val="556378"/>
+                </a:solidFill>
+                <a:latin typeface="Arial"/>
+              </a:rPr>
+              <a:t>Insuficiente</a:t>
+            </a:r>
+            <a:r>
+              <a:rPr sz="1200" b="0" dirty="0">
+                <a:solidFill>
+                  <a:srgbClr val="556378"/>
+                </a:solidFill>
+                <a:latin typeface="Arial"/>
+              </a:rPr>
+              <a:t> · 354 Elemental o </a:t>
+            </a:r>
+            <a:r>
+              <a:rPr sz="1200" b="0" dirty="0" err="1">
+                <a:solidFill>
+                  <a:srgbClr val="556378"/>
+                </a:solidFill>
+                <a:latin typeface="Arial"/>
+              </a:rPr>
+              <a:t>adecuado</a:t>
+            </a:r>
+            <a:r>
+              <a:rPr sz="1200" b="0" dirty="0">
+                <a:solidFill>
+                  <a:srgbClr val="556378"/>
+                </a:solidFill>
+                <a:latin typeface="Arial"/>
+              </a:rPr>
+              <a:t> → la </a:t>
+            </a:r>
+            <a:r>
+              <a:rPr sz="1200" b="0" dirty="0" err="1">
+                <a:solidFill>
+                  <a:srgbClr val="556378"/>
+                </a:solidFill>
+                <a:latin typeface="Arial"/>
+              </a:rPr>
+              <a:t>clase</a:t>
+            </a:r>
+            <a:r>
+              <a:rPr sz="1200" b="0" dirty="0">
+                <a:solidFill>
+                  <a:srgbClr val="556378"/>
+                </a:solidFill>
+                <a:latin typeface="Arial"/>
+              </a:rPr>
+              <a:t> </a:t>
+            </a:r>
+            <a:r>
+              <a:rPr sz="1200" b="0" dirty="0" err="1">
+                <a:solidFill>
+                  <a:srgbClr val="556378"/>
+                </a:solidFill>
+                <a:latin typeface="Arial"/>
+              </a:rPr>
+              <a:t>positiva</a:t>
+            </a:r>
+            <a:r>
+              <a:rPr sz="1200" b="0" dirty="0">
+                <a:solidFill>
+                  <a:srgbClr val="556378"/>
+                </a:solidFill>
+                <a:latin typeface="Arial"/>
+              </a:rPr>
+              <a:t> es solo </a:t>
+            </a:r>
+            <a:r>
+              <a:rPr sz="1200" b="0" dirty="0" err="1">
+                <a:solidFill>
+                  <a:srgbClr val="556378"/>
+                </a:solidFill>
+                <a:latin typeface="Arial"/>
+              </a:rPr>
+              <a:t>el</a:t>
+            </a:r>
+            <a:r>
+              <a:rPr sz="1200" b="0" dirty="0">
+                <a:solidFill>
+                  <a:srgbClr val="556378"/>
+                </a:solidFill>
+                <a:latin typeface="Arial"/>
+              </a:rPr>
+              <a:t> 24,8 %.</a:t>
             </a:r>
           </a:p>
           <a:p>
@@ -4238,7 +4376,7 @@
               </a:spcBef>
             </a:pPr>
             <a:r>
-              <a:rPr sz="1350" b="0">
+              <a:rPr sz="1350" b="0" dirty="0">
                 <a:solidFill>
                   <a:srgbClr val="16202C"/>
                 </a:solidFill>
@@ -4247,22 +4385,166 @@
               <a:t>•  </a:t>
             </a:r>
             <a:r>
-              <a:rPr sz="1350" b="1">
-                <a:solidFill>
-                  <a:srgbClr val="16202C"/>
-                </a:solidFill>
-                <a:latin typeface="Arial"/>
-              </a:rPr>
-              <a:t>Unidad de análisis.</a:t>
-            </a:r>
-            <a:r>
-              <a:rPr sz="1350" b="0">
-                <a:solidFill>
-                  <a:srgbClr val="16202C"/>
-                </a:solidFill>
-                <a:latin typeface="Arial"/>
-              </a:rPr>
-              <a:t> El establecimiento (rbd), no el estudiante: 1.429 escuelas de GSE bajo y medio-bajo, sin datos faltantes.</a:t>
+              <a:rPr sz="1350" b="1" dirty="0">
+                <a:solidFill>
+                  <a:srgbClr val="16202C"/>
+                </a:solidFill>
+                <a:latin typeface="Arial"/>
+              </a:rPr>
+              <a:t>Unidad de </a:t>
+            </a:r>
+            <a:r>
+              <a:rPr sz="1350" b="1" dirty="0" err="1">
+                <a:solidFill>
+                  <a:srgbClr val="16202C"/>
+                </a:solidFill>
+                <a:latin typeface="Arial"/>
+              </a:rPr>
+              <a:t>análisis</a:t>
+            </a:r>
+            <a:r>
+              <a:rPr sz="1350" b="1" dirty="0">
+                <a:solidFill>
+                  <a:srgbClr val="16202C"/>
+                </a:solidFill>
+                <a:latin typeface="Arial"/>
+              </a:rPr>
+              <a:t>.</a:t>
+            </a:r>
+            <a:r>
+              <a:rPr sz="1350" b="0" dirty="0">
+                <a:solidFill>
+                  <a:srgbClr val="16202C"/>
+                </a:solidFill>
+                <a:latin typeface="Arial"/>
+              </a:rPr>
+              <a:t> El </a:t>
+            </a:r>
+            <a:r>
+              <a:rPr sz="1350" b="0" dirty="0" err="1">
+                <a:solidFill>
+                  <a:srgbClr val="16202C"/>
+                </a:solidFill>
+                <a:latin typeface="Arial"/>
+              </a:rPr>
+              <a:t>establecimiento</a:t>
+            </a:r>
+            <a:r>
+              <a:rPr sz="1350" b="0" dirty="0">
+                <a:solidFill>
+                  <a:srgbClr val="16202C"/>
+                </a:solidFill>
+                <a:latin typeface="Arial"/>
+              </a:rPr>
+              <a:t> (</a:t>
+            </a:r>
+            <a:r>
+              <a:rPr sz="1350" b="0" dirty="0" err="1">
+                <a:solidFill>
+                  <a:srgbClr val="16202C"/>
+                </a:solidFill>
+                <a:latin typeface="Arial"/>
+              </a:rPr>
+              <a:t>rbd</a:t>
+            </a:r>
+            <a:r>
+              <a:rPr sz="1350" b="0" dirty="0">
+                <a:solidFill>
+                  <a:srgbClr val="16202C"/>
+                </a:solidFill>
+                <a:latin typeface="Arial"/>
+              </a:rPr>
+              <a:t>), no </a:t>
+            </a:r>
+            <a:r>
+              <a:rPr sz="1350" b="0" dirty="0" err="1">
+                <a:solidFill>
+                  <a:srgbClr val="16202C"/>
+                </a:solidFill>
+                <a:latin typeface="Arial"/>
+              </a:rPr>
+              <a:t>el</a:t>
+            </a:r>
+            <a:r>
+              <a:rPr sz="1350" b="0" dirty="0">
+                <a:solidFill>
+                  <a:srgbClr val="16202C"/>
+                </a:solidFill>
+                <a:latin typeface="Arial"/>
+              </a:rPr>
+              <a:t> </a:t>
+            </a:r>
+            <a:r>
+              <a:rPr sz="1350" b="0" dirty="0" err="1">
+                <a:solidFill>
+                  <a:srgbClr val="16202C"/>
+                </a:solidFill>
+                <a:latin typeface="Arial"/>
+              </a:rPr>
+              <a:t>estudiante</a:t>
+            </a:r>
+            <a:r>
+              <a:rPr sz="1350" b="0" dirty="0">
+                <a:solidFill>
+                  <a:srgbClr val="16202C"/>
+                </a:solidFill>
+                <a:latin typeface="Arial"/>
+              </a:rPr>
+              <a:t>: 1.429 </a:t>
+            </a:r>
+            <a:r>
+              <a:rPr sz="1350" b="0" dirty="0" err="1">
+                <a:solidFill>
+                  <a:srgbClr val="16202C"/>
+                </a:solidFill>
+                <a:latin typeface="Arial"/>
+              </a:rPr>
+              <a:t>escuelas</a:t>
+            </a:r>
+            <a:r>
+              <a:rPr sz="1350" b="0" dirty="0">
+                <a:solidFill>
+                  <a:srgbClr val="16202C"/>
+                </a:solidFill>
+                <a:latin typeface="Arial"/>
+              </a:rPr>
+              <a:t> de GSE bajo y medio-bajo, sin </a:t>
+            </a:r>
+            <a:r>
+              <a:rPr sz="1350" b="0" dirty="0" err="1">
+                <a:solidFill>
+                  <a:srgbClr val="16202C"/>
+                </a:solidFill>
+                <a:latin typeface="Arial"/>
+              </a:rPr>
+              <a:t>datos</a:t>
+            </a:r>
+            <a:r>
+              <a:rPr sz="1350" b="0" dirty="0">
+                <a:solidFill>
+                  <a:srgbClr val="16202C"/>
+                </a:solidFill>
+                <a:latin typeface="Arial"/>
+              </a:rPr>
+              <a:t> </a:t>
+            </a:r>
+            <a:r>
+              <a:rPr sz="1350" b="0" dirty="0" err="1">
+                <a:solidFill>
+                  <a:srgbClr val="16202C"/>
+                </a:solidFill>
+                <a:latin typeface="Arial"/>
+              </a:rPr>
+              <a:t>faltantes</a:t>
+            </a:r>
+            <a:r>
+              <a:rPr sz="1350" b="0" dirty="0">
+                <a:solidFill>
+                  <a:srgbClr val="16202C"/>
+                </a:solidFill>
+                <a:latin typeface="Arial"/>
+              </a:rPr>
+              <a:t>.</a:t>
             </a:r>
           </a:p>
           <a:p>
@@ -4275,7 +4557,7 @@
               </a:spcBef>
             </a:pPr>
             <a:r>
-              <a:rPr sz="1350" b="0">
+              <a:rPr sz="1350" b="0" dirty="0">
                 <a:solidFill>
                   <a:srgbClr val="16202C"/>
                 </a:solidFill>
@@ -4284,22 +4566,130 @@
               <a:t>•  </a:t>
             </a:r>
             <a:r>
-              <a:rPr sz="1350" b="1">
-                <a:solidFill>
-                  <a:srgbClr val="16202C"/>
-                </a:solidFill>
-                <a:latin typeface="Arial"/>
-              </a:rPr>
-              <a:t>Siete predictoras</a:t>
-            </a:r>
-            <a:r>
-              <a:rPr sz="1350" b="0">
-                <a:solidFill>
-                  <a:srgbClr val="16202C"/>
-                </a:solidFill>
-                <a:latin typeface="Arial"/>
-              </a:rPr>
-              <a:t>, cinco continuas y dos indicadoras de dependencia (referencia: Municipal).</a:t>
+              <a:rPr sz="1350" b="1" dirty="0" err="1">
+                <a:solidFill>
+                  <a:srgbClr val="16202C"/>
+                </a:solidFill>
+                <a:latin typeface="Arial"/>
+              </a:rPr>
+              <a:t>Siete</a:t>
+            </a:r>
+            <a:r>
+              <a:rPr sz="1350" b="1" dirty="0">
+                <a:solidFill>
+                  <a:srgbClr val="16202C"/>
+                </a:solidFill>
+                <a:latin typeface="Arial"/>
+              </a:rPr>
+              <a:t> </a:t>
+            </a:r>
+            <a:r>
+              <a:rPr sz="1350" b="1" dirty="0" err="1">
+                <a:solidFill>
+                  <a:srgbClr val="16202C"/>
+                </a:solidFill>
+                <a:latin typeface="Arial"/>
+              </a:rPr>
+              <a:t>predictoras</a:t>
+            </a:r>
+            <a:r>
+              <a:rPr sz="1350" b="0" dirty="0">
+                <a:solidFill>
+                  <a:srgbClr val="16202C"/>
+                </a:solidFill>
+                <a:latin typeface="Arial"/>
+              </a:rPr>
+              <a:t>, </a:t>
+            </a:r>
+            <a:r>
+              <a:rPr sz="1350" b="0" dirty="0" err="1">
+                <a:solidFill>
+                  <a:srgbClr val="16202C"/>
+                </a:solidFill>
+                <a:latin typeface="Arial"/>
+              </a:rPr>
+              <a:t>cinco</a:t>
+            </a:r>
+            <a:r>
+              <a:rPr sz="1350" b="0" dirty="0">
+                <a:solidFill>
+                  <a:srgbClr val="16202C"/>
+                </a:solidFill>
+                <a:latin typeface="Arial"/>
+              </a:rPr>
+              <a:t> </a:t>
+            </a:r>
+            <a:r>
+              <a:rPr sz="1350" b="0" dirty="0" err="1">
+                <a:solidFill>
+                  <a:srgbClr val="16202C"/>
+                </a:solidFill>
+                <a:latin typeface="Arial"/>
+              </a:rPr>
+              <a:t>continuas</a:t>
+            </a:r>
+            <a:r>
+              <a:rPr sz="1350" b="0" dirty="0">
+                <a:solidFill>
+                  <a:srgbClr val="16202C"/>
+                </a:solidFill>
+                <a:latin typeface="Arial"/>
+              </a:rPr>
+              <a:t> y dos </a:t>
+            </a:r>
+            <a:r>
+              <a:rPr sz="1350" b="0" dirty="0" err="1">
+                <a:solidFill>
+                  <a:srgbClr val="16202C"/>
+                </a:solidFill>
+                <a:latin typeface="Arial"/>
+              </a:rPr>
+              <a:t>indicadoras</a:t>
+            </a:r>
+            <a:r>
+              <a:rPr sz="1350" b="0" dirty="0">
+                <a:solidFill>
+                  <a:srgbClr val="16202C"/>
+                </a:solidFill>
+                <a:latin typeface="Arial"/>
+              </a:rPr>
+              <a:t> de </a:t>
+            </a:r>
+            <a:r>
+              <a:rPr sz="1350" b="0" dirty="0" err="1">
+                <a:solidFill>
+                  <a:srgbClr val="16202C"/>
+                </a:solidFill>
+                <a:latin typeface="Arial"/>
+              </a:rPr>
+              <a:t>dependencia</a:t>
+            </a:r>
+            <a:r>
+              <a:rPr sz="1350" b="0" dirty="0">
+                <a:solidFill>
+                  <a:srgbClr val="16202C"/>
+                </a:solidFill>
+                <a:latin typeface="Arial"/>
+              </a:rPr>
+              <a:t> (</a:t>
+            </a:r>
+            <a:r>
+              <a:rPr sz="1350" b="0" dirty="0" err="1">
+                <a:solidFill>
+                  <a:srgbClr val="16202C"/>
+                </a:solidFill>
+                <a:latin typeface="Arial"/>
+              </a:rPr>
+              <a:t>referencia</a:t>
+            </a:r>
+            <a:r>
+              <a:rPr sz="1350" b="0" dirty="0">
+                <a:solidFill>
+                  <a:srgbClr val="16202C"/>
+                </a:solidFill>
+                <a:latin typeface="Arial"/>
+              </a:rPr>
+              <a:t>: Municipal).</a:t>
             </a:r>
           </a:p>
           <a:p>
@@ -4312,13 +4702,193 @@
               </a:spcBef>
             </a:pPr>
             <a:r>
-              <a:rPr sz="1200" b="0">
+              <a:rPr sz="1200" b="0" dirty="0">
                 <a:solidFill>
                   <a:srgbClr val="556378"/>
                 </a:solidFill>
                 <a:latin typeface="Arial"/>
               </a:rPr>
-              <a:t>     –  Clima y convivencia · Estereotipos de género · IVE · Asistencia 2° medio · % docentes en tramo avanzado o superior · Part. subvencionado · SLEP</a:t>
+              <a:t>     –  </a:t>
+            </a:r>
+            <a:r>
+              <a:rPr sz="1200" b="0" dirty="0" err="1">
+                <a:solidFill>
+                  <a:srgbClr val="556378"/>
+                </a:solidFill>
+                <a:latin typeface="Arial"/>
+              </a:rPr>
+              <a:t>Clima</a:t>
+            </a:r>
+            <a:r>
+              <a:rPr sz="1200" b="0" dirty="0">
+                <a:solidFill>
+                  <a:srgbClr val="556378"/>
+                </a:solidFill>
+                <a:latin typeface="Arial"/>
+              </a:rPr>
+              <a:t> y </a:t>
+            </a:r>
+            <a:r>
+              <a:rPr sz="1200" b="0" dirty="0" err="1">
+                <a:solidFill>
+                  <a:srgbClr val="556378"/>
+                </a:solidFill>
+                <a:latin typeface="Arial"/>
+              </a:rPr>
+              <a:t>convivencia</a:t>
+            </a:r>
+            <a:r>
+              <a:rPr sz="1200" b="0" dirty="0">
+                <a:solidFill>
+                  <a:srgbClr val="556378"/>
+                </a:solidFill>
+                <a:latin typeface="Arial"/>
+              </a:rPr>
+              <a:t> · </a:t>
+            </a:r>
+            <a:r>
+              <a:rPr sz="1200" b="0" dirty="0" err="1">
+                <a:solidFill>
+                  <a:srgbClr val="556378"/>
+                </a:solidFill>
+                <a:latin typeface="Arial"/>
+              </a:rPr>
+              <a:t>Estereotipos</a:t>
+            </a:r>
+            <a:r>
+              <a:rPr sz="1200" b="0" dirty="0">
+                <a:solidFill>
+                  <a:srgbClr val="556378"/>
+                </a:solidFill>
+                <a:latin typeface="Arial"/>
+              </a:rPr>
+              <a:t> de </a:t>
+            </a:r>
+            <a:r>
+              <a:rPr sz="1200" b="0" dirty="0" err="1">
+                <a:solidFill>
+                  <a:srgbClr val="556378"/>
+                </a:solidFill>
+                <a:latin typeface="Arial"/>
+              </a:rPr>
+              <a:t>género</a:t>
+            </a:r>
+            <a:r>
+              <a:rPr sz="1200" b="0" dirty="0">
+                <a:solidFill>
+                  <a:srgbClr val="556378"/>
+                </a:solidFill>
+                <a:latin typeface="Arial"/>
+              </a:rPr>
+              <a:t> · IVE · </a:t>
+            </a:r>
+            <a:r>
+              <a:rPr sz="1200" b="0" dirty="0" err="1">
+                <a:solidFill>
+                  <a:srgbClr val="556378"/>
+                </a:solidFill>
+                <a:latin typeface="Arial"/>
+              </a:rPr>
+              <a:t>Asistencia</a:t>
+            </a:r>
+            <a:r>
+              <a:rPr sz="1200" b="0" dirty="0">
+                <a:solidFill>
+                  <a:srgbClr val="556378"/>
+                </a:solidFill>
+                <a:latin typeface="Arial"/>
+              </a:rPr>
+              <a:t> 2° medio · % </a:t>
+            </a:r>
+            <a:r>
+              <a:rPr sz="1200" b="0" dirty="0" err="1">
+                <a:solidFill>
+                  <a:srgbClr val="556378"/>
+                </a:solidFill>
+                <a:latin typeface="Arial"/>
+              </a:rPr>
+              <a:t>docentes</a:t>
+            </a:r>
+            <a:r>
+              <a:rPr sz="1200" b="0" dirty="0">
+                <a:solidFill>
+                  <a:srgbClr val="556378"/>
+                </a:solidFill>
+                <a:latin typeface="Arial"/>
+              </a:rPr>
+              <a:t> </a:t>
+            </a:r>
+            <a:r>
+              <a:rPr sz="1200" b="0" dirty="0" err="1">
+                <a:solidFill>
+                  <a:srgbClr val="556378"/>
+                </a:solidFill>
+                <a:latin typeface="Arial"/>
+              </a:rPr>
+              <a:t>en</a:t>
+            </a:r>
+            <a:r>
+              <a:rPr sz="1200" b="0" dirty="0">
+                <a:solidFill>
+                  <a:srgbClr val="556378"/>
+                </a:solidFill>
+                <a:latin typeface="Arial"/>
+              </a:rPr>
+              <a:t> </a:t>
+            </a:r>
+            <a:r>
+              <a:rPr sz="1200" b="0" dirty="0" err="1">
+                <a:solidFill>
+                  <a:srgbClr val="556378"/>
+                </a:solidFill>
+                <a:latin typeface="Arial"/>
+              </a:rPr>
+              <a:t>tramo</a:t>
+            </a:r>
+            <a:r>
+              <a:rPr sz="1200" b="0" dirty="0">
+                <a:solidFill>
+                  <a:srgbClr val="556378"/>
+                </a:solidFill>
+                <a:latin typeface="Arial"/>
+              </a:rPr>
+              <a:t> </a:t>
+            </a:r>
+            <a:r>
+              <a:rPr sz="1200" b="0" dirty="0" err="1">
+                <a:solidFill>
+                  <a:srgbClr val="556378"/>
+                </a:solidFill>
+                <a:latin typeface="Arial"/>
+              </a:rPr>
+              <a:t>avanzado</a:t>
+            </a:r>
+            <a:r>
+              <a:rPr sz="1200" b="0" dirty="0">
+                <a:solidFill>
+                  <a:srgbClr val="556378"/>
+                </a:solidFill>
+                <a:latin typeface="Arial"/>
+              </a:rPr>
+              <a:t> o superior · Part. </a:t>
+            </a:r>
+            <a:r>
+              <a:rPr sz="1200" b="0" dirty="0" err="1">
+                <a:solidFill>
+                  <a:srgbClr val="556378"/>
+                </a:solidFill>
+                <a:latin typeface="Arial"/>
+              </a:rPr>
+              <a:t>subvencionado</a:t>
+            </a:r>
+            <a:r>
+              <a:rPr sz="1200" b="0" dirty="0">
+                <a:solidFill>
+                  <a:srgbClr val="556378"/>
+                </a:solidFill>
+                <a:latin typeface="Arial"/>
+              </a:rPr>
+              <a:t> · SLEP</a:t>
             </a:r>
           </a:p>
           <a:p>
@@ -4331,7 +4901,7 @@
               </a:spcBef>
             </a:pPr>
             <a:r>
-              <a:rPr sz="1350" b="0">
+              <a:rPr sz="1350" b="0" dirty="0">
                 <a:solidFill>
                   <a:srgbClr val="16202C"/>
                 </a:solidFill>
@@ -4340,22 +4910,283 @@
               <a:t>•  </a:t>
             </a:r>
             <a:r>
-              <a:rPr sz="1350" b="1">
-                <a:solidFill>
-                  <a:srgbClr val="16202C"/>
-                </a:solidFill>
-                <a:latin typeface="Arial"/>
-              </a:rPr>
-              <a:t>Qué se dejó fuera y por qué.</a:t>
-            </a:r>
-            <a:r>
-              <a:rPr sz="1350" b="0">
-                <a:solidFill>
-                  <a:srgbClr val="16202C"/>
-                </a:solidFill>
-                <a:latin typeface="Arial"/>
-              </a:rPr>
-              <a:t> El puntaje, porque el target deriva de él; el GSE, redundante con el IVE; la zona urbano/rural, sin señal (Cramér's V = 0,016).</a:t>
+              <a:rPr sz="1350" b="1" dirty="0" err="1">
+                <a:solidFill>
+                  <a:srgbClr val="16202C"/>
+                </a:solidFill>
+                <a:latin typeface="Arial"/>
+              </a:rPr>
+              <a:t>Qué</a:t>
+            </a:r>
+            <a:r>
+              <a:rPr sz="1350" b="1" dirty="0">
+                <a:solidFill>
+                  <a:srgbClr val="16202C"/>
+                </a:solidFill>
+                <a:latin typeface="Arial"/>
+              </a:rPr>
+              <a:t> se </a:t>
+            </a:r>
+            <a:r>
+              <a:rPr sz="1350" b="1" dirty="0" err="1">
+                <a:solidFill>
+                  <a:srgbClr val="16202C"/>
+                </a:solidFill>
+                <a:latin typeface="Arial"/>
+              </a:rPr>
+              <a:t>dejó</a:t>
+            </a:r>
+            <a:r>
+              <a:rPr sz="1350" b="1" dirty="0">
+                <a:solidFill>
+                  <a:srgbClr val="16202C"/>
+                </a:solidFill>
+                <a:latin typeface="Arial"/>
+              </a:rPr>
+              <a:t> </a:t>
+            </a:r>
+            <a:r>
+              <a:rPr sz="1350" b="1" dirty="0" err="1">
+                <a:solidFill>
+                  <a:srgbClr val="16202C"/>
+                </a:solidFill>
+                <a:latin typeface="Arial"/>
+              </a:rPr>
+              <a:t>fuera</a:t>
+            </a:r>
+            <a:r>
+              <a:rPr sz="1350" b="1" dirty="0">
+                <a:solidFill>
+                  <a:srgbClr val="16202C"/>
+                </a:solidFill>
+                <a:latin typeface="Arial"/>
+              </a:rPr>
+              <a:t> y </a:t>
+            </a:r>
+            <a:r>
+              <a:rPr sz="1350" b="1" dirty="0" err="1">
+                <a:solidFill>
+                  <a:srgbClr val="16202C"/>
+                </a:solidFill>
+                <a:latin typeface="Arial"/>
+              </a:rPr>
+              <a:t>por</a:t>
+            </a:r>
+            <a:r>
+              <a:rPr sz="1350" b="1" dirty="0">
+                <a:solidFill>
+                  <a:srgbClr val="16202C"/>
+                </a:solidFill>
+                <a:latin typeface="Arial"/>
+              </a:rPr>
+              <a:t> </a:t>
+            </a:r>
+            <a:r>
+              <a:rPr sz="1350" b="1" dirty="0" err="1">
+                <a:solidFill>
+                  <a:srgbClr val="16202C"/>
+                </a:solidFill>
+                <a:latin typeface="Arial"/>
+              </a:rPr>
+              <a:t>qué</a:t>
+            </a:r>
+            <a:r>
+              <a:rPr sz="1350" b="1" dirty="0">
+                <a:solidFill>
+                  <a:srgbClr val="16202C"/>
+                </a:solidFill>
+                <a:latin typeface="Arial"/>
+              </a:rPr>
+              <a:t>.</a:t>
+            </a:r>
+            <a:r>
+              <a:rPr sz="1350" b="0" dirty="0">
+                <a:solidFill>
+                  <a:srgbClr val="16202C"/>
+                </a:solidFill>
+                <a:latin typeface="Arial"/>
+              </a:rPr>
+              <a:t> El </a:t>
+            </a:r>
+            <a:r>
+              <a:rPr sz="1350" b="0" dirty="0" err="1">
+                <a:solidFill>
+                  <a:srgbClr val="16202C"/>
+                </a:solidFill>
+                <a:latin typeface="Arial"/>
+              </a:rPr>
+              <a:t>puntaje</a:t>
+            </a:r>
+            <a:r>
+              <a:rPr sz="1350" b="0" dirty="0">
+                <a:solidFill>
+                  <a:srgbClr val="16202C"/>
+                </a:solidFill>
+                <a:latin typeface="Arial"/>
+              </a:rPr>
+              <a:t>, </a:t>
+            </a:r>
+            <a:r>
+              <a:rPr sz="1350" b="0" dirty="0" err="1">
+                <a:solidFill>
+                  <a:srgbClr val="16202C"/>
+                </a:solidFill>
+                <a:latin typeface="Arial"/>
+              </a:rPr>
+              <a:t>porque</a:t>
+            </a:r>
+            <a:r>
+              <a:rPr sz="1350" b="0" dirty="0">
+                <a:solidFill>
+                  <a:srgbClr val="16202C"/>
+                </a:solidFill>
+                <a:latin typeface="Arial"/>
+              </a:rPr>
+              <a:t> </a:t>
+            </a:r>
+            <a:r>
+              <a:rPr sz="1350" b="0" dirty="0" err="1">
+                <a:solidFill>
+                  <a:srgbClr val="16202C"/>
+                </a:solidFill>
+                <a:latin typeface="Arial"/>
+              </a:rPr>
+              <a:t>el</a:t>
+            </a:r>
+            <a:r>
+              <a:rPr sz="1350" b="0" dirty="0">
+                <a:solidFill>
+                  <a:srgbClr val="16202C"/>
+                </a:solidFill>
+                <a:latin typeface="Arial"/>
+              </a:rPr>
+              <a:t> target </a:t>
+            </a:r>
+            <a:r>
+              <a:rPr sz="1350" b="0" dirty="0" err="1">
+                <a:solidFill>
+                  <a:srgbClr val="16202C"/>
+                </a:solidFill>
+                <a:latin typeface="Arial"/>
+              </a:rPr>
+              <a:t>deriva</a:t>
+            </a:r>
+            <a:r>
+              <a:rPr sz="1350" b="0" dirty="0">
+                <a:solidFill>
+                  <a:srgbClr val="16202C"/>
+                </a:solidFill>
+                <a:latin typeface="Arial"/>
+              </a:rPr>
+              <a:t> de </a:t>
+            </a:r>
+            <a:r>
+              <a:rPr sz="1350" b="0" dirty="0" err="1">
+                <a:solidFill>
+                  <a:srgbClr val="16202C"/>
+                </a:solidFill>
+                <a:latin typeface="Arial"/>
+              </a:rPr>
+              <a:t>él</a:t>
+            </a:r>
+            <a:r>
+              <a:rPr sz="1350" b="0" dirty="0">
+                <a:solidFill>
+                  <a:srgbClr val="16202C"/>
+                </a:solidFill>
+                <a:latin typeface="Arial"/>
+              </a:rPr>
+              <a:t>; </a:t>
+            </a:r>
+            <a:r>
+              <a:rPr sz="1350" b="0" dirty="0" err="1">
+                <a:solidFill>
+                  <a:srgbClr val="16202C"/>
+                </a:solidFill>
+                <a:latin typeface="Arial"/>
+              </a:rPr>
+              <a:t>el</a:t>
+            </a:r>
+            <a:r>
+              <a:rPr sz="1350" b="0" dirty="0">
+                <a:solidFill>
+                  <a:srgbClr val="16202C"/>
+                </a:solidFill>
+                <a:latin typeface="Arial"/>
+              </a:rPr>
+              <a:t> GSE, </a:t>
+            </a:r>
+            <a:r>
+              <a:rPr sz="1350" b="0" dirty="0" err="1">
+                <a:solidFill>
+                  <a:srgbClr val="16202C"/>
+                </a:solidFill>
+                <a:latin typeface="Arial"/>
+              </a:rPr>
+              <a:t>redundante</a:t>
+            </a:r>
+            <a:r>
+              <a:rPr sz="1350" b="0" dirty="0">
+                <a:solidFill>
+                  <a:srgbClr val="16202C"/>
+                </a:solidFill>
+                <a:latin typeface="Arial"/>
+              </a:rPr>
+              <a:t> con </a:t>
+            </a:r>
+            <a:r>
+              <a:rPr sz="1350" b="0" dirty="0" err="1">
+                <a:solidFill>
+                  <a:srgbClr val="16202C"/>
+                </a:solidFill>
+                <a:latin typeface="Arial"/>
+              </a:rPr>
+              <a:t>el</a:t>
+            </a:r>
+            <a:r>
+              <a:rPr sz="1350" b="0" dirty="0">
+                <a:solidFill>
+                  <a:srgbClr val="16202C"/>
+                </a:solidFill>
+                <a:latin typeface="Arial"/>
+              </a:rPr>
+              <a:t> IVE; la zona </a:t>
+            </a:r>
+            <a:r>
+              <a:rPr sz="1350" b="0" dirty="0" err="1">
+                <a:solidFill>
+                  <a:srgbClr val="16202C"/>
+                </a:solidFill>
+                <a:latin typeface="Arial"/>
+              </a:rPr>
+              <a:t>urbano</a:t>
+            </a:r>
+            <a:r>
+              <a:rPr sz="1350" b="0" dirty="0">
+                <a:solidFill>
+                  <a:srgbClr val="16202C"/>
+                </a:solidFill>
+                <a:latin typeface="Arial"/>
+              </a:rPr>
+              <a:t>/rural, sin </a:t>
+            </a:r>
+            <a:r>
+              <a:rPr sz="1350" b="0" dirty="0" err="1">
+                <a:solidFill>
+                  <a:srgbClr val="16202C"/>
+                </a:solidFill>
+                <a:latin typeface="Arial"/>
+              </a:rPr>
+              <a:t>señal</a:t>
+            </a:r>
+            <a:r>
+              <a:rPr sz="1350" b="0" dirty="0">
+                <a:solidFill>
+                  <a:srgbClr val="16202C"/>
+                </a:solidFill>
+                <a:latin typeface="Arial"/>
+              </a:rPr>
+              <a:t> (Cramér's V = 0,016).</a:t>
             </a:r>
           </a:p>
           <a:p>
@@ -4368,7 +5199,7 @@
               </a:spcBef>
             </a:pPr>
             <a:r>
-              <a:rPr sz="1350" b="0">
+              <a:rPr sz="1350" b="0" dirty="0">
                 <a:solidFill>
                   <a:srgbClr val="16202C"/>
                 </a:solidFill>
@@ -4377,22 +5208,103 @@
               <a:t>•  </a:t>
             </a:r>
             <a:r>
-              <a:rPr sz="1350" b="1">
-                <a:solidFill>
-                  <a:srgbClr val="16202C"/>
-                </a:solidFill>
-                <a:latin typeface="Arial"/>
-              </a:rPr>
-              <a:t>Partición.</a:t>
-            </a:r>
-            <a:r>
-              <a:rPr sz="1350" b="0">
-                <a:solidFill>
-                  <a:srgbClr val="16202C"/>
-                </a:solidFill>
-                <a:latin typeface="Arial"/>
-              </a:rPr>
-              <a:t> 75 / 25 estratificada, semilla 42: 1.071 entrenamiento y 358 prueba.</a:t>
+              <a:rPr sz="1350" b="1" dirty="0" err="1">
+                <a:solidFill>
+                  <a:srgbClr val="16202C"/>
+                </a:solidFill>
+                <a:latin typeface="Arial"/>
+              </a:rPr>
+              <a:t>Partición</a:t>
+            </a:r>
+            <a:r>
+              <a:rPr sz="1350" b="1" dirty="0">
+                <a:solidFill>
+                  <a:srgbClr val="16202C"/>
+                </a:solidFill>
+                <a:latin typeface="Arial"/>
+              </a:rPr>
+              <a:t>.</a:t>
+            </a:r>
+            <a:r>
+              <a:rPr sz="1350" b="0" dirty="0">
+                <a:solidFill>
+                  <a:srgbClr val="16202C"/>
+                </a:solidFill>
+                <a:latin typeface="Arial"/>
+              </a:rPr>
+              <a:t> 75 / 25 </a:t>
+            </a:r>
+            <a:r>
+              <a:rPr sz="1350" b="0" dirty="0" err="1">
+                <a:solidFill>
+                  <a:srgbClr val="16202C"/>
+                </a:solidFill>
+                <a:latin typeface="Arial"/>
+              </a:rPr>
+              <a:t>estratificada</a:t>
+            </a:r>
+            <a:r>
+              <a:rPr sz="1350" b="0" dirty="0">
+                <a:solidFill>
+                  <a:srgbClr val="16202C"/>
+                </a:solidFill>
+                <a:latin typeface="Arial"/>
+              </a:rPr>
+              <a:t>, </a:t>
+            </a:r>
+            <a:r>
+              <a:rPr sz="1350" b="0" dirty="0" err="1">
+                <a:solidFill>
+                  <a:srgbClr val="16202C"/>
+                </a:solidFill>
+                <a:latin typeface="Arial"/>
+              </a:rPr>
+              <a:t>semilla</a:t>
+            </a:r>
+            <a:r>
+              <a:rPr sz="1350" b="0" dirty="0">
+                <a:solidFill>
+                  <a:srgbClr val="16202C"/>
+                </a:solidFill>
+                <a:latin typeface="Arial"/>
+              </a:rPr>
+              <a:t> 42: 1.071 </a:t>
+            </a:r>
+            <a:r>
+              <a:rPr sz="1350" b="0" dirty="0" err="1">
+                <a:solidFill>
+                  <a:srgbClr val="16202C"/>
+                </a:solidFill>
+                <a:latin typeface="Arial"/>
+              </a:rPr>
+              <a:t>entrenamiento</a:t>
+            </a:r>
+            <a:r>
+              <a:rPr sz="1350" b="0" dirty="0">
+                <a:solidFill>
+                  <a:srgbClr val="16202C"/>
+                </a:solidFill>
+                <a:latin typeface="Arial"/>
+              </a:rPr>
+              <a:t> y 358 </a:t>
+            </a:r>
+            <a:r>
+              <a:rPr sz="1350" b="0" dirty="0" err="1">
+                <a:solidFill>
+                  <a:srgbClr val="16202C"/>
+                </a:solidFill>
+                <a:latin typeface="Arial"/>
+              </a:rPr>
+              <a:t>prueba</a:t>
+            </a:r>
+            <a:r>
+              <a:rPr sz="1350" b="0" dirty="0">
+                <a:solidFill>
+                  <a:srgbClr val="16202C"/>
+                </a:solidFill>
+                <a:latin typeface="Arial"/>
+              </a:rPr>
+              <a:t>.</a:t>
             </a:r>
           </a:p>
         </p:txBody>
@@ -4434,7 +5346,7 @@
           </a:fontRef>
         </p:style>
         <p:txBody>
-          <a:bodyPr rtlCol="0" anchor="ctr" wrap="square" lIns="164592" rIns="164592" tIns="109728"/>
+          <a:bodyPr wrap="square" lIns="164592" tIns="109728" rIns="164592" rtlCol="0" anchor="ctr"/>
           <a:lstStyle/>
           <a:p>
             <a:pPr algn="ctr">
@@ -4515,7 +5427,7 @@
           </a:fontRef>
         </p:style>
         <p:txBody>
-          <a:bodyPr rtlCol="0" anchor="ctr" wrap="square" lIns="164592" rIns="164592" tIns="109728"/>
+          <a:bodyPr wrap="square" lIns="164592" tIns="109728" rIns="164592" rtlCol="0" anchor="ctr"/>
           <a:lstStyle/>
           <a:p>
             <a:pPr algn="ctr">
@@ -4596,7 +5508,7 @@
           </a:fontRef>
         </p:style>
         <p:txBody>
-          <a:bodyPr rtlCol="0" anchor="ctr" wrap="square" lIns="164592" rIns="164592" tIns="109728"/>
+          <a:bodyPr wrap="square" lIns="164592" tIns="109728" rIns="164592" rtlCol="0" anchor="ctr"/>
           <a:lstStyle/>
           <a:p>
             <a:pPr algn="ctr">
@@ -4649,7 +5561,7 @@
 </file>
 
 <file path=ppt/slides/slide2.xml><?xml version="1.0" encoding="utf-8"?>
-<p:sld xmlns:a="http://schemas.openxmlformats.org/drawingml/2006/main" xmlns:p="http://schemas.openxmlformats.org/presentationml/2006/main" xmlns:r="http://schemas.openxmlformats.org/officeDocument/2006/relationships">
+<p:sld xmlns:a="http://schemas.openxmlformats.org/drawingml/2006/main" xmlns:r="http://schemas.openxmlformats.org/officeDocument/2006/relationships" xmlns:p="http://schemas.openxmlformats.org/presentationml/2006/main">
   <p:cSld>
     <p:spTree>
       <p:nvGrpSpPr>
@@ -4657,7 +5569,14 @@
         <p:cNvGrpSpPr/>
         <p:nvPr/>
       </p:nvGrpSpPr>
-      <p:grpSpPr/>
+      <p:grpSpPr>
+        <a:xfrm>
+          <a:off x="0" y="0"/>
+          <a:ext cx="0" cy="0"/>
+          <a:chOff x="0" y="0"/>
+          <a:chExt cx="0" cy="0"/>
+        </a:xfrm>
+      </p:grpSpPr>
       <p:sp>
         <p:nvSpPr>
           <p:cNvPr id="2" name="TextBox 1"/>
@@ -4675,7 +5594,7 @@
           <a:noFill/>
         </p:spPr>
         <p:txBody>
-          <a:bodyPr wrap="square" anchor="t" lIns="0" rIns="0" tIns="0" bIns="0">
+          <a:bodyPr wrap="square" lIns="0" tIns="0" rIns="0" bIns="0" anchor="t">
             <a:spAutoFit/>
           </a:bodyPr>
           <a:lstStyle/>
@@ -4717,7 +5636,7 @@
           <a:noFill/>
         </p:spPr>
         <p:txBody>
-          <a:bodyPr wrap="square" anchor="t" lIns="0" rIns="0" tIns="0" bIns="0">
+          <a:bodyPr wrap="square" lIns="0" tIns="0" rIns="0" bIns="0" anchor="t">
             <a:spAutoFit/>
           </a:bodyPr>
           <a:lstStyle/>
@@ -4783,6 +5702,7 @@
           <a:lstStyle/>
           <a:p>
             <a:pPr algn="ctr"/>
+            <a:endParaRPr/>
           </a:p>
         </p:txBody>
       </p:sp>
@@ -4803,7 +5723,7 @@
           <a:noFill/>
         </p:spPr>
         <p:txBody>
-          <a:bodyPr wrap="square" anchor="t" lIns="0" rIns="0" tIns="0" bIns="0">
+          <a:bodyPr wrap="square" lIns="0" tIns="0" rIns="0" bIns="0" anchor="t">
             <a:spAutoFit/>
           </a:bodyPr>
           <a:lstStyle/>
@@ -4817,7 +5737,7 @@
               </a:spcBef>
             </a:pPr>
             <a:r>
-              <a:rPr sz="1350" b="0">
+              <a:rPr sz="1350" b="0" dirty="0">
                 <a:solidFill>
                   <a:srgbClr val="16202C"/>
                 </a:solidFill>
@@ -4826,25 +5746,106 @@
               <a:t>•  </a:t>
             </a:r>
             <a:r>
-              <a:rPr sz="1350" b="1">
-                <a:solidFill>
-                  <a:srgbClr val="16202C"/>
-                </a:solidFill>
-                <a:latin typeface="Arial"/>
-              </a:rPr>
-              <a:t>Método.</a:t>
-            </a:r>
-            <a:r>
-              <a:rPr sz="1350" b="0">
-                <a:solidFill>
-                  <a:srgbClr val="16202C"/>
-                </a:solidFill>
-                <a:latin typeface="Arial"/>
-              </a:rPr>
-              <a:t> GridSearchCV exhaustivo con StratifiedKFold (k=5), optimizando </a:t>
-            </a:r>
-            <a:r>
-              <a:rPr sz="1350" b="1">
+              <a:rPr sz="1350" b="1" dirty="0" err="1">
+                <a:solidFill>
+                  <a:srgbClr val="16202C"/>
+                </a:solidFill>
+                <a:latin typeface="Arial"/>
+              </a:rPr>
+              <a:t>Método</a:t>
+            </a:r>
+            <a:r>
+              <a:rPr sz="1350" b="1" dirty="0">
+                <a:solidFill>
+                  <a:srgbClr val="16202C"/>
+                </a:solidFill>
+                <a:latin typeface="Arial"/>
+              </a:rPr>
+              <a:t>.</a:t>
+            </a:r>
+            <a:r>
+              <a:rPr sz="1350" b="0" dirty="0">
+                <a:solidFill>
+                  <a:srgbClr val="16202C"/>
+                </a:solidFill>
+                <a:latin typeface="Arial"/>
+              </a:rPr>
+              <a:t> </a:t>
+            </a:r>
+            <a:r>
+              <a:rPr sz="1350" b="0" dirty="0" err="1">
+                <a:solidFill>
+                  <a:srgbClr val="16202C"/>
+                </a:solidFill>
+                <a:latin typeface="Arial"/>
+              </a:rPr>
+              <a:t>GridSearchCV</a:t>
+            </a:r>
+            <a:r>
+              <a:rPr sz="1350" b="0" dirty="0">
+                <a:solidFill>
+                  <a:srgbClr val="16202C"/>
+                </a:solidFill>
+                <a:latin typeface="Arial"/>
+              </a:rPr>
+              <a:t> </a:t>
+            </a:r>
+            <a:r>
+              <a:rPr sz="1350" b="0" dirty="0" err="1">
+                <a:solidFill>
+                  <a:srgbClr val="16202C"/>
+                </a:solidFill>
+                <a:latin typeface="Arial"/>
+              </a:rPr>
+              <a:t>exhaustivo</a:t>
+            </a:r>
+            <a:r>
+              <a:rPr sz="1350" b="0" dirty="0">
+                <a:solidFill>
+                  <a:srgbClr val="16202C"/>
+                </a:solidFill>
+                <a:latin typeface="Arial"/>
+              </a:rPr>
+              <a:t> con </a:t>
+            </a:r>
+            <a:r>
+              <a:rPr sz="1350" b="0" dirty="0" err="1">
+                <a:solidFill>
+                  <a:srgbClr val="16202C"/>
+                </a:solidFill>
+                <a:latin typeface="Arial"/>
+              </a:rPr>
+              <a:t>StratifiedKFold</a:t>
+            </a:r>
+            <a:r>
+              <a:rPr sz="1350" b="0" dirty="0">
+                <a:solidFill>
+                  <a:srgbClr val="16202C"/>
+                </a:solidFill>
+                <a:latin typeface="Arial"/>
+              </a:rPr>
+              <a:t> (k=5), </a:t>
+            </a:r>
+            <a:r>
+              <a:rPr sz="1350" b="0" dirty="0" err="1">
+                <a:solidFill>
+                  <a:srgbClr val="16202C"/>
+                </a:solidFill>
+                <a:latin typeface="Arial"/>
+              </a:rPr>
+              <a:t>optimizando</a:t>
+            </a:r>
+            <a:r>
+              <a:rPr sz="1350" b="0" dirty="0">
+                <a:solidFill>
+                  <a:srgbClr val="16202C"/>
+                </a:solidFill>
+                <a:latin typeface="Arial"/>
+              </a:rPr>
+              <a:t> </a:t>
+            </a:r>
+            <a:r>
+              <a:rPr sz="1350" b="1" dirty="0">
                 <a:solidFill>
                   <a:srgbClr val="16202C"/>
                 </a:solidFill>
@@ -4853,13 +5854,157 @@
               <a:t>AUC-ROC</a:t>
             </a:r>
             <a:r>
-              <a:rPr sz="1350" b="0">
-                <a:solidFill>
-                  <a:srgbClr val="16202C"/>
-                </a:solidFill>
-                <a:latin typeface="Arial"/>
-              </a:rPr>
-              <a:t>. La estratificación mantiene el 24,8 % de clase positiva en cada pliegue.</a:t>
+              <a:rPr sz="1350" b="0" dirty="0">
+                <a:solidFill>
+                  <a:srgbClr val="16202C"/>
+                </a:solidFill>
+                <a:latin typeface="Arial"/>
+              </a:rPr>
+              <a:t>. La </a:t>
+            </a:r>
+            <a:r>
+              <a:rPr sz="1350" b="0" dirty="0" err="1">
+                <a:solidFill>
+                  <a:srgbClr val="16202C"/>
+                </a:solidFill>
+                <a:latin typeface="Arial"/>
+              </a:rPr>
+              <a:t>estratificación</a:t>
+            </a:r>
+            <a:r>
+              <a:rPr sz="1350" b="0" dirty="0">
+                <a:solidFill>
+                  <a:srgbClr val="16202C"/>
+                </a:solidFill>
+                <a:latin typeface="Arial"/>
+              </a:rPr>
+              <a:t> </a:t>
+            </a:r>
+            <a:r>
+              <a:rPr sz="1350" b="0" dirty="0" err="1">
+                <a:solidFill>
+                  <a:srgbClr val="16202C"/>
+                </a:solidFill>
+                <a:latin typeface="Arial"/>
+              </a:rPr>
+              <a:t>mantiene</a:t>
+            </a:r>
+            <a:r>
+              <a:rPr sz="1350" b="0" dirty="0">
+                <a:solidFill>
+                  <a:srgbClr val="16202C"/>
+                </a:solidFill>
+                <a:latin typeface="Arial"/>
+              </a:rPr>
+              <a:t> </a:t>
+            </a:r>
+            <a:r>
+              <a:rPr sz="1350" b="0" dirty="0" err="1">
+                <a:solidFill>
+                  <a:srgbClr val="16202C"/>
+                </a:solidFill>
+                <a:latin typeface="Arial"/>
+              </a:rPr>
+              <a:t>el</a:t>
+            </a:r>
+            <a:r>
+              <a:rPr sz="1350" b="0" dirty="0">
+                <a:solidFill>
+                  <a:srgbClr val="16202C"/>
+                </a:solidFill>
+                <a:latin typeface="Arial"/>
+              </a:rPr>
+              <a:t> 24,8 % de </a:t>
+            </a:r>
+            <a:r>
+              <a:rPr sz="1350" b="0" dirty="0" err="1">
+                <a:solidFill>
+                  <a:srgbClr val="16202C"/>
+                </a:solidFill>
+                <a:latin typeface="Arial"/>
+              </a:rPr>
+              <a:t>clase</a:t>
+            </a:r>
+            <a:r>
+              <a:rPr sz="1350" b="0" dirty="0">
+                <a:solidFill>
+                  <a:srgbClr val="16202C"/>
+                </a:solidFill>
+                <a:latin typeface="Arial"/>
+              </a:rPr>
+              <a:t> </a:t>
+            </a:r>
+            <a:r>
+              <a:rPr sz="1350" b="0" dirty="0" err="1">
+                <a:solidFill>
+                  <a:srgbClr val="16202C"/>
+                </a:solidFill>
+                <a:latin typeface="Arial"/>
+              </a:rPr>
+              <a:t>positiva</a:t>
+            </a:r>
+            <a:r>
+              <a:rPr sz="1350" b="0" dirty="0">
+                <a:solidFill>
+                  <a:srgbClr val="16202C"/>
+                </a:solidFill>
+                <a:latin typeface="Arial"/>
+              </a:rPr>
+              <a:t> </a:t>
+            </a:r>
+            <a:r>
+              <a:rPr sz="1350" b="0" dirty="0" err="1">
+                <a:solidFill>
+                  <a:srgbClr val="16202C"/>
+                </a:solidFill>
+                <a:latin typeface="Arial"/>
+              </a:rPr>
+              <a:t>en</a:t>
+            </a:r>
+            <a:r>
+              <a:rPr sz="1350" b="0" dirty="0">
+                <a:solidFill>
+                  <a:srgbClr val="16202C"/>
+                </a:solidFill>
+                <a:latin typeface="Arial"/>
+              </a:rPr>
+              <a:t> </a:t>
+            </a:r>
+            <a:r>
+              <a:rPr sz="1350" b="0" dirty="0" err="1">
+                <a:solidFill>
+                  <a:srgbClr val="16202C"/>
+                </a:solidFill>
+                <a:latin typeface="Arial"/>
+              </a:rPr>
+              <a:t>cada</a:t>
+            </a:r>
+            <a:r>
+              <a:rPr sz="1350" b="0" dirty="0">
+                <a:solidFill>
+                  <a:srgbClr val="16202C"/>
+                </a:solidFill>
+                <a:latin typeface="Arial"/>
+              </a:rPr>
+              <a:t> </a:t>
+            </a:r>
+            <a:r>
+              <a:rPr sz="1350" b="0" dirty="0" err="1">
+                <a:solidFill>
+                  <a:srgbClr val="16202C"/>
+                </a:solidFill>
+                <a:latin typeface="Arial"/>
+              </a:rPr>
+              <a:t>pliegue</a:t>
+            </a:r>
+            <a:r>
+              <a:rPr sz="1350" b="0" dirty="0">
+                <a:solidFill>
+                  <a:srgbClr val="16202C"/>
+                </a:solidFill>
+                <a:latin typeface="Arial"/>
+              </a:rPr>
+              <a:t>.</a:t>
             </a:r>
           </a:p>
           <a:p>
@@ -4872,7 +6017,7 @@
               </a:spcBef>
             </a:pPr>
             <a:r>
-              <a:rPr sz="1350" b="0">
+              <a:rPr sz="1350" b="0" dirty="0">
                 <a:solidFill>
                   <a:srgbClr val="16202C"/>
                 </a:solidFill>
@@ -4881,25 +6026,124 @@
               <a:t>•  </a:t>
             </a:r>
             <a:r>
-              <a:rPr sz="1350" b="1">
-                <a:solidFill>
-                  <a:srgbClr val="16202C"/>
-                </a:solidFill>
-                <a:latin typeface="Arial"/>
-              </a:rPr>
-              <a:t>Logística — C ∈ {0,01 · 0,1 · 1 · 10}.</a:t>
-            </a:r>
-            <a:r>
-              <a:rPr sz="1350" b="0">
-                <a:solidFill>
-                  <a:srgbClr val="16202C"/>
-                </a:solidFill>
-                <a:latin typeface="Arial"/>
-              </a:rPr>
-              <a:t> El AUC es plano en todo el rango (0,7762 a 0,7769). Se fija </a:t>
-            </a:r>
-            <a:r>
-              <a:rPr sz="1350" b="1">
+              <a:rPr sz="1350" b="1" dirty="0" err="1">
+                <a:solidFill>
+                  <a:srgbClr val="16202C"/>
+                </a:solidFill>
+                <a:latin typeface="Arial"/>
+              </a:rPr>
+              <a:t>Logística</a:t>
+            </a:r>
+            <a:r>
+              <a:rPr sz="1350" b="1" dirty="0">
+                <a:solidFill>
+                  <a:srgbClr val="16202C"/>
+                </a:solidFill>
+                <a:latin typeface="Arial"/>
+              </a:rPr>
+              <a:t> — C ∈ {0,01 · 0,1 · 1 · 10}.</a:t>
+            </a:r>
+            <a:r>
+              <a:rPr sz="1350" b="0" dirty="0">
+                <a:solidFill>
+                  <a:srgbClr val="16202C"/>
+                </a:solidFill>
+                <a:latin typeface="Arial"/>
+              </a:rPr>
+              <a:t> El AUC es plano </a:t>
+            </a:r>
+            <a:r>
+              <a:rPr sz="1350" b="0" dirty="0" err="1">
+                <a:solidFill>
+                  <a:srgbClr val="16202C"/>
+                </a:solidFill>
+                <a:latin typeface="Arial"/>
+              </a:rPr>
+              <a:t>en</a:t>
+            </a:r>
+            <a:r>
+              <a:rPr sz="1350" b="0" dirty="0">
+                <a:solidFill>
+                  <a:srgbClr val="16202C"/>
+                </a:solidFill>
+                <a:latin typeface="Arial"/>
+              </a:rPr>
+              <a:t> </a:t>
+            </a:r>
+            <a:r>
+              <a:rPr sz="1350" b="0" dirty="0" err="1">
+                <a:solidFill>
+                  <a:srgbClr val="16202C"/>
+                </a:solidFill>
+                <a:latin typeface="Arial"/>
+              </a:rPr>
+              <a:t>todo</a:t>
+            </a:r>
+            <a:r>
+              <a:rPr sz="1350" b="0" dirty="0">
+                <a:solidFill>
+                  <a:srgbClr val="16202C"/>
+                </a:solidFill>
+                <a:latin typeface="Arial"/>
+              </a:rPr>
+              <a:t> </a:t>
+            </a:r>
+            <a:r>
+              <a:rPr sz="1350" b="0" dirty="0" err="1">
+                <a:solidFill>
+                  <a:srgbClr val="16202C"/>
+                </a:solidFill>
+                <a:latin typeface="Arial"/>
+              </a:rPr>
+              <a:t>el</a:t>
+            </a:r>
+            <a:r>
+              <a:rPr sz="1350" b="0" dirty="0">
+                <a:solidFill>
+                  <a:srgbClr val="16202C"/>
+                </a:solidFill>
+                <a:latin typeface="Arial"/>
+              </a:rPr>
+              <a:t> </a:t>
+            </a:r>
+            <a:r>
+              <a:rPr sz="1350" b="0" dirty="0" err="1">
+                <a:solidFill>
+                  <a:srgbClr val="16202C"/>
+                </a:solidFill>
+                <a:latin typeface="Arial"/>
+              </a:rPr>
+              <a:t>rango</a:t>
+            </a:r>
+            <a:r>
+              <a:rPr sz="1350" b="0" dirty="0">
+                <a:solidFill>
+                  <a:srgbClr val="16202C"/>
+                </a:solidFill>
+                <a:latin typeface="Arial"/>
+              </a:rPr>
+              <a:t> (0,7762 a 0,7769). Se </a:t>
+            </a:r>
+            <a:r>
+              <a:rPr sz="1350" b="0" dirty="0" err="1">
+                <a:solidFill>
+                  <a:srgbClr val="16202C"/>
+                </a:solidFill>
+                <a:latin typeface="Arial"/>
+              </a:rPr>
+              <a:t>fija</a:t>
+            </a:r>
+            <a:r>
+              <a:rPr sz="1350" b="0" dirty="0">
+                <a:solidFill>
+                  <a:srgbClr val="16202C"/>
+                </a:solidFill>
+                <a:latin typeface="Arial"/>
+              </a:rPr>
+              <a:t> </a:t>
+            </a:r>
+            <a:r>
+              <a:rPr sz="1350" b="1" dirty="0">
                 <a:solidFill>
                   <a:srgbClr val="16202C"/>
                 </a:solidFill>
@@ -4908,13 +6152,139 @@
               <a:t>C = 0,1</a:t>
             </a:r>
             <a:r>
-              <a:rPr sz="1350" b="0">
-                <a:solidFill>
-                  <a:srgbClr val="16202C"/>
-                </a:solidFill>
-                <a:latin typeface="Arial"/>
-              </a:rPr>
-              <a:t>: con valores menores los coeficientes se encogen y dejan de ser interpretables.</a:t>
+              <a:rPr sz="1350" b="0" dirty="0">
+                <a:solidFill>
+                  <a:srgbClr val="16202C"/>
+                </a:solidFill>
+                <a:latin typeface="Arial"/>
+              </a:rPr>
+              <a:t>: con </a:t>
+            </a:r>
+            <a:r>
+              <a:rPr sz="1350" b="0" dirty="0" err="1">
+                <a:solidFill>
+                  <a:srgbClr val="16202C"/>
+                </a:solidFill>
+                <a:latin typeface="Arial"/>
+              </a:rPr>
+              <a:t>valores</a:t>
+            </a:r>
+            <a:r>
+              <a:rPr sz="1350" b="0" dirty="0">
+                <a:solidFill>
+                  <a:srgbClr val="16202C"/>
+                </a:solidFill>
+                <a:latin typeface="Arial"/>
+              </a:rPr>
+              <a:t> </a:t>
+            </a:r>
+            <a:r>
+              <a:rPr sz="1350" b="0" dirty="0" err="1">
+                <a:solidFill>
+                  <a:srgbClr val="16202C"/>
+                </a:solidFill>
+                <a:latin typeface="Arial"/>
+              </a:rPr>
+              <a:t>menores</a:t>
+            </a:r>
+            <a:r>
+              <a:rPr sz="1350" b="0" dirty="0">
+                <a:solidFill>
+                  <a:srgbClr val="16202C"/>
+                </a:solidFill>
+                <a:latin typeface="Arial"/>
+              </a:rPr>
+              <a:t> </a:t>
+            </a:r>
+            <a:r>
+              <a:rPr sz="1350" b="0" dirty="0" err="1">
+                <a:solidFill>
+                  <a:srgbClr val="16202C"/>
+                </a:solidFill>
+                <a:latin typeface="Arial"/>
+              </a:rPr>
+              <a:t>los</a:t>
+            </a:r>
+            <a:r>
+              <a:rPr sz="1350" b="0" dirty="0">
+                <a:solidFill>
+                  <a:srgbClr val="16202C"/>
+                </a:solidFill>
+                <a:latin typeface="Arial"/>
+              </a:rPr>
+              <a:t> </a:t>
+            </a:r>
+            <a:r>
+              <a:rPr sz="1350" b="0" dirty="0" err="1">
+                <a:solidFill>
+                  <a:srgbClr val="16202C"/>
+                </a:solidFill>
+                <a:latin typeface="Arial"/>
+              </a:rPr>
+              <a:t>coeficientes</a:t>
+            </a:r>
+            <a:r>
+              <a:rPr sz="1350" b="0" dirty="0">
+                <a:solidFill>
+                  <a:srgbClr val="16202C"/>
+                </a:solidFill>
+                <a:latin typeface="Arial"/>
+              </a:rPr>
+              <a:t> se </a:t>
+            </a:r>
+            <a:r>
+              <a:rPr sz="1350" b="0" dirty="0" err="1">
+                <a:solidFill>
+                  <a:srgbClr val="16202C"/>
+                </a:solidFill>
+                <a:latin typeface="Arial"/>
+              </a:rPr>
+              <a:t>encogen</a:t>
+            </a:r>
+            <a:r>
+              <a:rPr sz="1350" b="0" dirty="0">
+                <a:solidFill>
+                  <a:srgbClr val="16202C"/>
+                </a:solidFill>
+                <a:latin typeface="Arial"/>
+              </a:rPr>
+              <a:t> y </a:t>
+            </a:r>
+            <a:r>
+              <a:rPr sz="1350" b="0" dirty="0" err="1">
+                <a:solidFill>
+                  <a:srgbClr val="16202C"/>
+                </a:solidFill>
+                <a:latin typeface="Arial"/>
+              </a:rPr>
+              <a:t>dejan</a:t>
+            </a:r>
+            <a:r>
+              <a:rPr sz="1350" b="0" dirty="0">
+                <a:solidFill>
+                  <a:srgbClr val="16202C"/>
+                </a:solidFill>
+                <a:latin typeface="Arial"/>
+              </a:rPr>
+              <a:t> de ser </a:t>
+            </a:r>
+            <a:r>
+              <a:rPr sz="1350" b="0" dirty="0" err="1">
+                <a:solidFill>
+                  <a:srgbClr val="16202C"/>
+                </a:solidFill>
+                <a:latin typeface="Arial"/>
+              </a:rPr>
+              <a:t>interpretables</a:t>
+            </a:r>
+            <a:r>
+              <a:rPr sz="1350" b="0" dirty="0">
+                <a:solidFill>
+                  <a:srgbClr val="16202C"/>
+                </a:solidFill>
+                <a:latin typeface="Arial"/>
+              </a:rPr>
+              <a:t>.</a:t>
             </a:r>
           </a:p>
           <a:p>
@@ -4927,7 +6297,7 @@
               </a:spcBef>
             </a:pPr>
             <a:r>
-              <a:rPr sz="1350" b="0">
+              <a:rPr sz="1350" b="0" dirty="0">
                 <a:solidFill>
                   <a:srgbClr val="16202C"/>
                 </a:solidFill>
@@ -4936,22 +6306,85 @@
               <a:t>•  </a:t>
             </a:r>
             <a:r>
-              <a:rPr sz="1350" b="1">
-                <a:solidFill>
-                  <a:srgbClr val="16202C"/>
-                </a:solidFill>
-                <a:latin typeface="Arial"/>
-              </a:rPr>
-              <a:t>Random Forest — 9 combinaciones</a:t>
-            </a:r>
-            <a:r>
-              <a:rPr sz="1350" b="0">
-                <a:solidFill>
-                  <a:srgbClr val="16202C"/>
-                </a:solidFill>
-                <a:latin typeface="Arial"/>
-              </a:rPr>
-              <a:t> de max_depth × min_samples_leaf, con 300 árboles.</a:t>
+              <a:rPr sz="1350" b="1" dirty="0">
+                <a:solidFill>
+                  <a:srgbClr val="16202C"/>
+                </a:solidFill>
+                <a:latin typeface="Arial"/>
+              </a:rPr>
+              <a:t>Random Forest — 9 </a:t>
+            </a:r>
+            <a:r>
+              <a:rPr sz="1350" b="1" dirty="0" err="1">
+                <a:solidFill>
+                  <a:srgbClr val="16202C"/>
+                </a:solidFill>
+                <a:latin typeface="Arial"/>
+              </a:rPr>
+              <a:t>combinaciones</a:t>
+            </a:r>
+            <a:r>
+              <a:rPr sz="1350" b="0" dirty="0">
+                <a:solidFill>
+                  <a:srgbClr val="16202C"/>
+                </a:solidFill>
+                <a:latin typeface="Arial"/>
+              </a:rPr>
+              <a:t> de </a:t>
+            </a:r>
+            <a:r>
+              <a:rPr sz="1350" b="0" dirty="0" err="1">
+                <a:solidFill>
+                  <a:srgbClr val="16202C"/>
+                </a:solidFill>
+                <a:latin typeface="Arial"/>
+              </a:rPr>
+              <a:t>max_depth</a:t>
+            </a:r>
+            <a:r>
+              <a:rPr sz="1350" b="0" dirty="0">
+                <a:solidFill>
+                  <a:srgbClr val="16202C"/>
+                </a:solidFill>
+                <a:latin typeface="Arial"/>
+              </a:rPr>
+              <a:t> × </a:t>
+            </a:r>
+            <a:r>
+              <a:rPr sz="1350" b="0" dirty="0" err="1">
+                <a:solidFill>
+                  <a:srgbClr val="16202C"/>
+                </a:solidFill>
+                <a:latin typeface="Arial"/>
+              </a:rPr>
+              <a:t>min_samples_leaf</a:t>
+            </a:r>
+            <a:r>
+              <a:rPr sz="1350" b="0" dirty="0">
+                <a:solidFill>
+                  <a:srgbClr val="16202C"/>
+                </a:solidFill>
+                <a:latin typeface="Arial"/>
+              </a:rPr>
+              <a:t>, con 300 </a:t>
+            </a:r>
+            <a:r>
+              <a:rPr sz="1350" b="0" dirty="0" err="1">
+                <a:solidFill>
+                  <a:srgbClr val="16202C"/>
+                </a:solidFill>
+                <a:latin typeface="Arial"/>
+              </a:rPr>
+              <a:t>árboles</a:t>
+            </a:r>
+            <a:r>
+              <a:rPr sz="1350" b="0" dirty="0">
+                <a:solidFill>
+                  <a:srgbClr val="16202C"/>
+                </a:solidFill>
+                <a:latin typeface="Arial"/>
+              </a:rPr>
+              <a:t>.</a:t>
             </a:r>
           </a:p>
           <a:p>
@@ -4964,13 +6397,67 @@
               </a:spcBef>
             </a:pPr>
             <a:r>
-              <a:rPr sz="1200" b="0">
+              <a:rPr sz="1200" b="0" dirty="0">
                 <a:solidFill>
                   <a:srgbClr val="556378"/>
                 </a:solidFill>
                 <a:latin typeface="Arial"/>
               </a:rPr>
-              <a:t>     –  Gana max_depth=None con min_samples_leaf=15 → AUC 0,7838.</a:t>
+              <a:t>     –  </a:t>
+            </a:r>
+            <a:r>
+              <a:rPr sz="1200" b="0" dirty="0" err="1">
+                <a:solidFill>
+                  <a:srgbClr val="556378"/>
+                </a:solidFill>
+                <a:latin typeface="Arial"/>
+              </a:rPr>
+              <a:t>Gana</a:t>
+            </a:r>
+            <a:r>
+              <a:rPr sz="1200" b="0" dirty="0">
+                <a:solidFill>
+                  <a:srgbClr val="556378"/>
+                </a:solidFill>
+                <a:latin typeface="Arial"/>
+              </a:rPr>
+              <a:t> </a:t>
+            </a:r>
+            <a:r>
+              <a:rPr sz="1200" b="0" dirty="0" err="1">
+                <a:solidFill>
+                  <a:srgbClr val="556378"/>
+                </a:solidFill>
+                <a:latin typeface="Arial"/>
+              </a:rPr>
+              <a:t>max_depth</a:t>
+            </a:r>
+            <a:r>
+              <a:rPr sz="1200" b="0" dirty="0">
+                <a:solidFill>
+                  <a:srgbClr val="556378"/>
+                </a:solidFill>
+                <a:latin typeface="Arial"/>
+              </a:rPr>
+              <a:t>=None con </a:t>
+            </a:r>
+            <a:r>
+              <a:rPr sz="1200" b="0" dirty="0" err="1">
+                <a:solidFill>
+                  <a:srgbClr val="556378"/>
+                </a:solidFill>
+                <a:latin typeface="Arial"/>
+              </a:rPr>
+              <a:t>min_samples_leaf</a:t>
+            </a:r>
+            <a:r>
+              <a:rPr sz="1200" b="0" dirty="0">
+                <a:solidFill>
+                  <a:srgbClr val="556378"/>
+                </a:solidFill>
+                <a:latin typeface="Arial"/>
+              </a:rPr>
+              <a:t>=15 → AUC 0,7838.</a:t>
             </a:r>
           </a:p>
           <a:p>
@@ -4983,13 +6470,121 @@
               </a:spcBef>
             </a:pPr>
             <a:r>
-              <a:rPr sz="1200" b="0">
+              <a:rPr sz="1200" b="0" dirty="0">
                 <a:solidFill>
                   <a:srgbClr val="556378"/>
                 </a:solidFill>
                 <a:latin typeface="Arial"/>
               </a:rPr>
-              <a:t>     –  Importa el tamaño de hoja, no la profundidad: con hoja = 1 el AUC cae a 0,7672.</a:t>
+              <a:t>     –  </a:t>
+            </a:r>
+            <a:r>
+              <a:rPr sz="1200" b="0" dirty="0" err="1">
+                <a:solidFill>
+                  <a:srgbClr val="556378"/>
+                </a:solidFill>
+                <a:latin typeface="Arial"/>
+              </a:rPr>
+              <a:t>Importa</a:t>
+            </a:r>
+            <a:r>
+              <a:rPr sz="1200" b="0" dirty="0">
+                <a:solidFill>
+                  <a:srgbClr val="556378"/>
+                </a:solidFill>
+                <a:latin typeface="Arial"/>
+              </a:rPr>
+              <a:t> </a:t>
+            </a:r>
+            <a:r>
+              <a:rPr sz="1200" b="0" dirty="0" err="1">
+                <a:solidFill>
+                  <a:srgbClr val="556378"/>
+                </a:solidFill>
+                <a:latin typeface="Arial"/>
+              </a:rPr>
+              <a:t>el</a:t>
+            </a:r>
+            <a:r>
+              <a:rPr sz="1200" b="0" dirty="0">
+                <a:solidFill>
+                  <a:srgbClr val="556378"/>
+                </a:solidFill>
+                <a:latin typeface="Arial"/>
+              </a:rPr>
+              <a:t> </a:t>
+            </a:r>
+            <a:r>
+              <a:rPr sz="1200" b="0" dirty="0" err="1">
+                <a:solidFill>
+                  <a:srgbClr val="556378"/>
+                </a:solidFill>
+                <a:latin typeface="Arial"/>
+              </a:rPr>
+              <a:t>tamaño</a:t>
+            </a:r>
+            <a:r>
+              <a:rPr sz="1200" b="0" dirty="0">
+                <a:solidFill>
+                  <a:srgbClr val="556378"/>
+                </a:solidFill>
+                <a:latin typeface="Arial"/>
+              </a:rPr>
+              <a:t> de hoja, no la </a:t>
+            </a:r>
+            <a:r>
+              <a:rPr sz="1200" b="0" dirty="0" err="1">
+                <a:solidFill>
+                  <a:srgbClr val="556378"/>
+                </a:solidFill>
+                <a:latin typeface="Arial"/>
+              </a:rPr>
+              <a:t>profundidad</a:t>
+            </a:r>
+            <a:r>
+              <a:rPr sz="1200" b="0" dirty="0">
+                <a:solidFill>
+                  <a:srgbClr val="556378"/>
+                </a:solidFill>
+                <a:latin typeface="Arial"/>
+              </a:rPr>
+              <a:t>: con hoja = 1 </a:t>
+            </a:r>
+            <a:r>
+              <a:rPr sz="1200" b="0" dirty="0" err="1">
+                <a:solidFill>
+                  <a:srgbClr val="556378"/>
+                </a:solidFill>
+                <a:latin typeface="Arial"/>
+              </a:rPr>
+              <a:t>el</a:t>
+            </a:r>
+            <a:r>
+              <a:rPr sz="1200" b="0" dirty="0">
+                <a:solidFill>
+                  <a:srgbClr val="556378"/>
+                </a:solidFill>
+                <a:latin typeface="Arial"/>
+              </a:rPr>
+              <a:t> AUC </a:t>
+            </a:r>
+            <a:r>
+              <a:rPr sz="1200" b="0" dirty="0" err="1">
+                <a:solidFill>
+                  <a:srgbClr val="556378"/>
+                </a:solidFill>
+                <a:latin typeface="Arial"/>
+              </a:rPr>
+              <a:t>cae</a:t>
+            </a:r>
+            <a:r>
+              <a:rPr sz="1200" b="0" dirty="0">
+                <a:solidFill>
+                  <a:srgbClr val="556378"/>
+                </a:solidFill>
+                <a:latin typeface="Arial"/>
+              </a:rPr>
+              <a:t> a 0,7672.</a:t>
             </a:r>
           </a:p>
           <a:p>
@@ -5002,7 +6597,7 @@
               </a:spcBef>
             </a:pPr>
             <a:r>
-              <a:rPr sz="1350" b="0">
+              <a:rPr sz="1350" b="0" dirty="0">
                 <a:solidFill>
                   <a:srgbClr val="16202C"/>
                 </a:solidFill>
@@ -5011,22 +6606,229 @@
               <a:t>•  </a:t>
             </a:r>
             <a:r>
-              <a:rPr sz="1350" b="1">
-                <a:solidFill>
-                  <a:srgbClr val="16202C"/>
-                </a:solidFill>
-                <a:latin typeface="Arial"/>
-              </a:rPr>
-              <a:t>Desbalance: class_weight="balanced", sin remuestreo.</a:t>
-            </a:r>
-            <a:r>
-              <a:rPr sz="1350" b="0">
-                <a:solidFill>
-                  <a:srgbClr val="16202C"/>
-                </a:solidFill>
-                <a:latin typeface="Arial"/>
-              </a:rPr>
-              <a:t> No se usó SMOTE: con 1.071 casos y 7 variables, generar vecinos sintéticos agrega ruido sin información nueva.</a:t>
+              <a:rPr sz="1350" b="1" dirty="0" err="1">
+                <a:solidFill>
+                  <a:srgbClr val="16202C"/>
+                </a:solidFill>
+                <a:latin typeface="Arial"/>
+              </a:rPr>
+              <a:t>Desbalance</a:t>
+            </a:r>
+            <a:r>
+              <a:rPr sz="1350" b="1" dirty="0">
+                <a:solidFill>
+                  <a:srgbClr val="16202C"/>
+                </a:solidFill>
+                <a:latin typeface="Arial"/>
+              </a:rPr>
+              <a:t>: </a:t>
+            </a:r>
+            <a:r>
+              <a:rPr sz="1350" b="1" dirty="0" err="1">
+                <a:solidFill>
+                  <a:srgbClr val="16202C"/>
+                </a:solidFill>
+                <a:latin typeface="Arial"/>
+              </a:rPr>
+              <a:t>class_weight</a:t>
+            </a:r>
+            <a:r>
+              <a:rPr sz="1350" b="1" dirty="0">
+                <a:solidFill>
+                  <a:srgbClr val="16202C"/>
+                </a:solidFill>
+                <a:latin typeface="Arial"/>
+              </a:rPr>
+              <a:t>="balanced", sin </a:t>
+            </a:r>
+            <a:r>
+              <a:rPr sz="1350" b="1" dirty="0" err="1">
+                <a:solidFill>
+                  <a:srgbClr val="16202C"/>
+                </a:solidFill>
+                <a:latin typeface="Arial"/>
+              </a:rPr>
+              <a:t>remuestreo</a:t>
+            </a:r>
+            <a:r>
+              <a:rPr sz="1350" b="1" dirty="0">
+                <a:solidFill>
+                  <a:srgbClr val="16202C"/>
+                </a:solidFill>
+                <a:latin typeface="Arial"/>
+              </a:rPr>
+              <a:t>.</a:t>
+            </a:r>
+            <a:r>
+              <a:rPr sz="1350" b="0" dirty="0">
+                <a:solidFill>
+                  <a:srgbClr val="16202C"/>
+                </a:solidFill>
+                <a:latin typeface="Arial"/>
+              </a:rPr>
+              <a:t> No se </a:t>
+            </a:r>
+            <a:r>
+              <a:rPr sz="1350" b="0" dirty="0" err="1">
+                <a:solidFill>
+                  <a:srgbClr val="16202C"/>
+                </a:solidFill>
+                <a:latin typeface="Arial"/>
+              </a:rPr>
+              <a:t>usó</a:t>
+            </a:r>
+            <a:r>
+              <a:rPr sz="1350" b="0" dirty="0">
+                <a:solidFill>
+                  <a:srgbClr val="16202C"/>
+                </a:solidFill>
+                <a:latin typeface="Arial"/>
+              </a:rPr>
+              <a:t> SMOTE: con 1.071 </a:t>
+            </a:r>
+            <a:r>
+              <a:rPr sz="1350" b="0" dirty="0" err="1">
+                <a:solidFill>
+                  <a:srgbClr val="16202C"/>
+                </a:solidFill>
+                <a:latin typeface="Arial"/>
+              </a:rPr>
+              <a:t>casos</a:t>
+            </a:r>
+            <a:r>
+              <a:rPr sz="1350" b="0" dirty="0">
+                <a:solidFill>
+                  <a:srgbClr val="16202C"/>
+                </a:solidFill>
+                <a:latin typeface="Arial"/>
+              </a:rPr>
+              <a:t> y 7 variables, </a:t>
+            </a:r>
+            <a:r>
+              <a:rPr sz="1350" b="0" dirty="0" err="1">
+                <a:solidFill>
+                  <a:srgbClr val="16202C"/>
+                </a:solidFill>
+                <a:latin typeface="Arial"/>
+              </a:rPr>
+              <a:t>generar</a:t>
+            </a:r>
+            <a:r>
+              <a:rPr sz="1350" b="0" dirty="0">
+                <a:solidFill>
+                  <a:srgbClr val="16202C"/>
+                </a:solidFill>
+                <a:latin typeface="Arial"/>
+              </a:rPr>
+              <a:t> </a:t>
+            </a:r>
+            <a:r>
+              <a:rPr sz="1350" b="0" dirty="0" err="1">
+                <a:solidFill>
+                  <a:srgbClr val="16202C"/>
+                </a:solidFill>
+                <a:latin typeface="Arial"/>
+              </a:rPr>
+              <a:t>vecinos</a:t>
+            </a:r>
+            <a:r>
+              <a:rPr sz="1350" b="0" dirty="0">
+                <a:solidFill>
+                  <a:srgbClr val="16202C"/>
+                </a:solidFill>
+                <a:latin typeface="Arial"/>
+              </a:rPr>
+              <a:t> </a:t>
+            </a:r>
+            <a:r>
+              <a:rPr sz="1350" b="0" dirty="0" err="1">
+                <a:solidFill>
+                  <a:srgbClr val="16202C"/>
+                </a:solidFill>
+                <a:latin typeface="Arial"/>
+              </a:rPr>
+              <a:t>sintéticos</a:t>
+            </a:r>
+            <a:r>
+              <a:rPr sz="1350" b="0" dirty="0">
+                <a:solidFill>
+                  <a:srgbClr val="16202C"/>
+                </a:solidFill>
+                <a:latin typeface="Arial"/>
+              </a:rPr>
+              <a:t> </a:t>
+            </a:r>
+            <a:r>
+              <a:rPr sz="1350" b="0" dirty="0" err="1">
+                <a:solidFill>
+                  <a:srgbClr val="16202C"/>
+                </a:solidFill>
+                <a:latin typeface="Arial"/>
+              </a:rPr>
+              <a:t>agrega</a:t>
+            </a:r>
+            <a:r>
+              <a:rPr sz="1350" b="0" dirty="0">
+                <a:solidFill>
+                  <a:srgbClr val="16202C"/>
+                </a:solidFill>
+                <a:latin typeface="Arial"/>
+              </a:rPr>
+              <a:t> </a:t>
+            </a:r>
+            <a:r>
+              <a:rPr sz="1350" b="0" dirty="0" err="1">
+                <a:solidFill>
+                  <a:srgbClr val="16202C"/>
+                </a:solidFill>
+                <a:latin typeface="Arial"/>
+              </a:rPr>
+              <a:t>ruido</a:t>
+            </a:r>
+            <a:r>
+              <a:rPr sz="1350" b="0" dirty="0">
+                <a:solidFill>
+                  <a:srgbClr val="16202C"/>
+                </a:solidFill>
+                <a:latin typeface="Arial"/>
+              </a:rPr>
+              <a:t> sin </a:t>
+            </a:r>
+            <a:r>
+              <a:rPr sz="1350" b="0" dirty="0" err="1">
+                <a:solidFill>
+                  <a:srgbClr val="16202C"/>
+                </a:solidFill>
+                <a:latin typeface="Arial"/>
+              </a:rPr>
+              <a:t>información</a:t>
+            </a:r>
+            <a:r>
+              <a:rPr sz="1350" b="0" dirty="0">
+                <a:solidFill>
+                  <a:srgbClr val="16202C"/>
+                </a:solidFill>
+                <a:latin typeface="Arial"/>
+              </a:rPr>
+              <a:t> </a:t>
+            </a:r>
+            <a:r>
+              <a:rPr sz="1350" b="0" dirty="0" err="1">
+                <a:solidFill>
+                  <a:srgbClr val="16202C"/>
+                </a:solidFill>
+                <a:latin typeface="Arial"/>
+              </a:rPr>
+              <a:t>nueva</a:t>
+            </a:r>
+            <a:r>
+              <a:rPr sz="1350" b="0" dirty="0">
+                <a:solidFill>
+                  <a:srgbClr val="16202C"/>
+                </a:solidFill>
+                <a:latin typeface="Arial"/>
+              </a:rPr>
+              <a:t>.</a:t>
             </a:r>
           </a:p>
         </p:txBody>
@@ -5040,7 +6842,7 @@
           <p:nvPr/>
         </p:nvPicPr>
         <p:blipFill>
-          <a:blip r:embed="rId2"/>
+          <a:blip r:embed="rId3"/>
           <a:stretch>
             <a:fillRect/>
           </a:stretch>
@@ -5072,7 +6874,7 @@
           <a:noFill/>
         </p:spPr>
         <p:txBody>
-          <a:bodyPr wrap="square" anchor="t" lIns="0" rIns="0" tIns="0" bIns="0">
+          <a:bodyPr wrap="square" lIns="0" tIns="0" rIns="0" bIns="0" anchor="t">
             <a:spAutoFit/>
           </a:bodyPr>
           <a:lstStyle/>
@@ -5106,7 +6908,7 @@
 </file>
 
 <file path=ppt/slides/slide3.xml><?xml version="1.0" encoding="utf-8"?>
-<p:sld xmlns:a="http://schemas.openxmlformats.org/drawingml/2006/main" xmlns:p="http://schemas.openxmlformats.org/presentationml/2006/main" xmlns:r="http://schemas.openxmlformats.org/officeDocument/2006/relationships">
+<p:sld xmlns:a="http://schemas.openxmlformats.org/drawingml/2006/main" xmlns:r="http://schemas.openxmlformats.org/officeDocument/2006/relationships" xmlns:p="http://schemas.openxmlformats.org/presentationml/2006/main">
   <p:cSld>
     <p:spTree>
       <p:nvGrpSpPr>
@@ -5114,7 +6916,14 @@
         <p:cNvGrpSpPr/>
         <p:nvPr/>
       </p:nvGrpSpPr>
-      <p:grpSpPr/>
+      <p:grpSpPr>
+        <a:xfrm>
+          <a:off x="0" y="0"/>
+          <a:ext cx="0" cy="0"/>
+          <a:chOff x="0" y="0"/>
+          <a:chExt cx="0" cy="0"/>
+        </a:xfrm>
+      </p:grpSpPr>
       <p:sp>
         <p:nvSpPr>
           <p:cNvPr id="2" name="TextBox 1"/>
@@ -5132,7 +6941,7 @@
           <a:noFill/>
         </p:spPr>
         <p:txBody>
-          <a:bodyPr wrap="square" anchor="t" lIns="0" rIns="0" tIns="0" bIns="0">
+          <a:bodyPr wrap="square" lIns="0" tIns="0" rIns="0" bIns="0" anchor="t">
             <a:spAutoFit/>
           </a:bodyPr>
           <a:lstStyle/>
@@ -5174,7 +6983,7 @@
           <a:noFill/>
         </p:spPr>
         <p:txBody>
-          <a:bodyPr wrap="square" anchor="t" lIns="0" rIns="0" tIns="0" bIns="0">
+          <a:bodyPr wrap="square" lIns="0" tIns="0" rIns="0" bIns="0" anchor="t">
             <a:spAutoFit/>
           </a:bodyPr>
           <a:lstStyle/>
@@ -5240,6 +7049,7 @@
           <a:lstStyle/>
           <a:p>
             <a:pPr algn="ctr"/>
+            <a:endParaRPr/>
           </a:p>
         </p:txBody>
       </p:sp>
@@ -5253,7 +7063,7 @@
         </p:nvGraphicFramePr>
         <p:xfrm>
           <a:off x="566928" y="1600200"/>
-          <a:ext cx="6766560" cy="1133856"/>
+          <a:ext cx="6766560" cy="1551051"/>
         </p:xfrm>
         <a:graphic>
           <a:graphicData uri="http://schemas.openxmlformats.org/drawingml/2006/table">
@@ -5262,12 +7072,48 @@
                 <a:tableStyleId>{5C22544A-7EE6-4342-B048-85BDC9FD1C3A}</a:tableStyleId>
               </a:tblPr>
               <a:tblGrid>
-                <a:gridCol w="1127760"/>
-                <a:gridCol w="1127760"/>
-                <a:gridCol w="1127760"/>
-                <a:gridCol w="1127760"/>
-                <a:gridCol w="1127760"/>
-                <a:gridCol w="1127760"/>
+                <a:gridCol w="1127760">
+                  <a:extLst>
+                    <a:ext uri="{9D8B030D-6E8A-4147-A177-3AD203B41FA5}">
+                      <a16:colId xmlns:a16="http://schemas.microsoft.com/office/drawing/2014/main" val="20000"/>
+                    </a:ext>
+                  </a:extLst>
+                </a:gridCol>
+                <a:gridCol w="1127760">
+                  <a:extLst>
+                    <a:ext uri="{9D8B030D-6E8A-4147-A177-3AD203B41FA5}">
+                      <a16:colId xmlns:a16="http://schemas.microsoft.com/office/drawing/2014/main" val="20001"/>
+                    </a:ext>
+                  </a:extLst>
+                </a:gridCol>
+                <a:gridCol w="1127760">
+                  <a:extLst>
+                    <a:ext uri="{9D8B030D-6E8A-4147-A177-3AD203B41FA5}">
+                      <a16:colId xmlns:a16="http://schemas.microsoft.com/office/drawing/2014/main" val="20002"/>
+                    </a:ext>
+                  </a:extLst>
+                </a:gridCol>
+                <a:gridCol w="1127760">
+                  <a:extLst>
+                    <a:ext uri="{9D8B030D-6E8A-4147-A177-3AD203B41FA5}">
+                      <a16:colId xmlns:a16="http://schemas.microsoft.com/office/drawing/2014/main" val="20003"/>
+                    </a:ext>
+                  </a:extLst>
+                </a:gridCol>
+                <a:gridCol w="1127760">
+                  <a:extLst>
+                    <a:ext uri="{9D8B030D-6E8A-4147-A177-3AD203B41FA5}">
+                      <a16:colId xmlns:a16="http://schemas.microsoft.com/office/drawing/2014/main" val="20004"/>
+                    </a:ext>
+                  </a:extLst>
+                </a:gridCol>
+                <a:gridCol w="1127760">
+                  <a:extLst>
+                    <a:ext uri="{9D8B030D-6E8A-4147-A177-3AD203B41FA5}">
+                      <a16:colId xmlns:a16="http://schemas.microsoft.com/office/drawing/2014/main" val="20005"/>
+                    </a:ext>
+                  </a:extLst>
+                </a:gridCol>
               </a:tblGrid>
               <a:tr h="283464">
                 <a:tc>
@@ -5450,6 +7296,11 @@
                     </a:solidFill>
                   </a:tcPr>
                 </a:tc>
+                <a:extLst>
+                  <a:ext uri="{0D108BD9-81ED-4DB2-BD59-A6C34878D82A}">
+                    <a16:rowId xmlns:a16="http://schemas.microsoft.com/office/drawing/2014/main" val="10000"/>
+                  </a:ext>
+                </a:extLst>
               </a:tr>
               <a:tr h="283464">
                 <a:tc>
@@ -5616,7 +7467,7 @@
                         </a:spcBef>
                       </a:pPr>
                       <a:r>
-                        <a:rPr sz="1150" b="0">
+                        <a:rPr sz="1150" b="0" dirty="0">
                           <a:solidFill>
                             <a:srgbClr val="16202C"/>
                           </a:solidFill>
@@ -5632,6 +7483,11 @@
                     </a:solidFill>
                   </a:tcPr>
                 </a:tc>
+                <a:extLst>
+                  <a:ext uri="{0D108BD9-81ED-4DB2-BD59-A6C34878D82A}">
+                    <a16:rowId xmlns:a16="http://schemas.microsoft.com/office/drawing/2014/main" val="10001"/>
+                  </a:ext>
+                </a:extLst>
               </a:tr>
               <a:tr h="283464">
                 <a:tc>
@@ -5814,6 +7670,11 @@
                     </a:solidFill>
                   </a:tcPr>
                 </a:tc>
+                <a:extLst>
+                  <a:ext uri="{0D108BD9-81ED-4DB2-BD59-A6C34878D82A}">
+                    <a16:rowId xmlns:a16="http://schemas.microsoft.com/office/drawing/2014/main" val="10002"/>
+                  </a:ext>
+                </a:extLst>
               </a:tr>
               <a:tr h="283464">
                 <a:tc>
@@ -5980,7 +7841,7 @@
                         </a:spcBef>
                       </a:pPr>
                       <a:r>
-                        <a:rPr sz="1150" b="0">
+                        <a:rPr sz="1150" b="0" dirty="0">
                           <a:solidFill>
                             <a:srgbClr val="16202C"/>
                           </a:solidFill>
@@ -5996,6 +7857,11 @@
                     </a:solidFill>
                   </a:tcPr>
                 </a:tc>
+                <a:extLst>
+                  <a:ext uri="{0D108BD9-81ED-4DB2-BD59-A6C34878D82A}">
+                    <a16:rowId xmlns:a16="http://schemas.microsoft.com/office/drawing/2014/main" val="10003"/>
+                  </a:ext>
+                </a:extLst>
               </a:tr>
             </a:tbl>
           </a:graphicData>
@@ -6018,7 +7884,7 @@
           <a:noFill/>
         </p:spPr>
         <p:txBody>
-          <a:bodyPr wrap="square" anchor="t" lIns="0" rIns="0" tIns="0" bIns="0">
+          <a:bodyPr wrap="square" lIns="0" tIns="0" rIns="0" bIns="0" anchor="t">
             <a:spAutoFit/>
           </a:bodyPr>
           <a:lstStyle/>
@@ -6162,7 +8028,7 @@
           <p:nvPr/>
         </p:nvPicPr>
         <p:blipFill>
-          <a:blip r:embed="rId2"/>
+          <a:blip r:embed="rId3"/>
           <a:stretch>
             <a:fillRect/>
           </a:stretch>
@@ -6186,7 +8052,7 @@
 </file>
 
 <file path=ppt/slides/slide4.xml><?xml version="1.0" encoding="utf-8"?>
-<p:sld xmlns:a="http://schemas.openxmlformats.org/drawingml/2006/main" xmlns:p="http://schemas.openxmlformats.org/presentationml/2006/main" xmlns:r="http://schemas.openxmlformats.org/officeDocument/2006/relationships">
+<p:sld xmlns:a="http://schemas.openxmlformats.org/drawingml/2006/main" xmlns:r="http://schemas.openxmlformats.org/officeDocument/2006/relationships" xmlns:p="http://schemas.openxmlformats.org/presentationml/2006/main">
   <p:cSld>
     <p:spTree>
       <p:nvGrpSpPr>
@@ -6194,7 +8060,14 @@
         <p:cNvGrpSpPr/>
         <p:nvPr/>
       </p:nvGrpSpPr>
-      <p:grpSpPr/>
+      <p:grpSpPr>
+        <a:xfrm>
+          <a:off x="0" y="0"/>
+          <a:ext cx="0" cy="0"/>
+          <a:chOff x="0" y="0"/>
+          <a:chExt cx="0" cy="0"/>
+        </a:xfrm>
+      </p:grpSpPr>
       <p:sp>
         <p:nvSpPr>
           <p:cNvPr id="2" name="TextBox 1"/>
@@ -6212,7 +8085,7 @@
           <a:noFill/>
         </p:spPr>
         <p:txBody>
-          <a:bodyPr wrap="square" anchor="t" lIns="0" rIns="0" tIns="0" bIns="0">
+          <a:bodyPr wrap="square" lIns="0" tIns="0" rIns="0" bIns="0" anchor="t">
             <a:spAutoFit/>
           </a:bodyPr>
           <a:lstStyle/>
@@ -6254,7 +8127,7 @@
           <a:noFill/>
         </p:spPr>
         <p:txBody>
-          <a:bodyPr wrap="square" anchor="t" lIns="0" rIns="0" tIns="0" bIns="0">
+          <a:bodyPr wrap="square" lIns="0" tIns="0" rIns="0" bIns="0" anchor="t">
             <a:spAutoFit/>
           </a:bodyPr>
           <a:lstStyle/>
@@ -6320,6 +8193,7 @@
           <a:lstStyle/>
           <a:p>
             <a:pPr algn="ctr"/>
+            <a:endParaRPr/>
           </a:p>
         </p:txBody>
       </p:sp>
@@ -6332,7 +8206,7 @@
           <p:nvPr/>
         </p:nvPicPr>
         <p:blipFill>
-          <a:blip r:embed="rId2"/>
+          <a:blip r:embed="rId3"/>
           <a:stretch>
             <a:fillRect/>
           </a:stretch>
@@ -6366,11 +8240,41 @@
                 <a:tableStyleId>{5C22544A-7EE6-4342-B048-85BDC9FD1C3A}</a:tableStyleId>
               </a:tblPr>
               <a:tblGrid>
-                <a:gridCol w="1078992"/>
-                <a:gridCol w="1078992"/>
-                <a:gridCol w="1078992"/>
-                <a:gridCol w="1078992"/>
-                <a:gridCol w="1078992"/>
+                <a:gridCol w="1078992">
+                  <a:extLst>
+                    <a:ext uri="{9D8B030D-6E8A-4147-A177-3AD203B41FA5}">
+                      <a16:colId xmlns:a16="http://schemas.microsoft.com/office/drawing/2014/main" val="20000"/>
+                    </a:ext>
+                  </a:extLst>
+                </a:gridCol>
+                <a:gridCol w="1078992">
+                  <a:extLst>
+                    <a:ext uri="{9D8B030D-6E8A-4147-A177-3AD203B41FA5}">
+                      <a16:colId xmlns:a16="http://schemas.microsoft.com/office/drawing/2014/main" val="20001"/>
+                    </a:ext>
+                  </a:extLst>
+                </a:gridCol>
+                <a:gridCol w="1078992">
+                  <a:extLst>
+                    <a:ext uri="{9D8B030D-6E8A-4147-A177-3AD203B41FA5}">
+                      <a16:colId xmlns:a16="http://schemas.microsoft.com/office/drawing/2014/main" val="20002"/>
+                    </a:ext>
+                  </a:extLst>
+                </a:gridCol>
+                <a:gridCol w="1078992">
+                  <a:extLst>
+                    <a:ext uri="{9D8B030D-6E8A-4147-A177-3AD203B41FA5}">
+                      <a16:colId xmlns:a16="http://schemas.microsoft.com/office/drawing/2014/main" val="20003"/>
+                    </a:ext>
+                  </a:extLst>
+                </a:gridCol>
+                <a:gridCol w="1078992">
+                  <a:extLst>
+                    <a:ext uri="{9D8B030D-6E8A-4147-A177-3AD203B41FA5}">
+                      <a16:colId xmlns:a16="http://schemas.microsoft.com/office/drawing/2014/main" val="20004"/>
+                    </a:ext>
+                  </a:extLst>
+                </a:gridCol>
               </a:tblGrid>
               <a:tr h="283464">
                 <a:tc>
@@ -6523,6 +8427,11 @@
                     </a:solidFill>
                   </a:tcPr>
                 </a:tc>
+                <a:extLst>
+                  <a:ext uri="{0D108BD9-81ED-4DB2-BD59-A6C34878D82A}">
+                    <a16:rowId xmlns:a16="http://schemas.microsoft.com/office/drawing/2014/main" val="10000"/>
+                  </a:ext>
+                </a:extLst>
               </a:tr>
               <a:tr h="283464">
                 <a:tc>
@@ -6539,7 +8448,7 @@
                         </a:spcBef>
                       </a:pPr>
                       <a:r>
-                        <a:rPr sz="1100" b="0">
+                        <a:rPr sz="1100" b="0" dirty="0">
                           <a:solidFill>
                             <a:srgbClr val="16202C"/>
                           </a:solidFill>
@@ -6675,6 +8584,11 @@
                     </a:solidFill>
                   </a:tcPr>
                 </a:tc>
+                <a:extLst>
+                  <a:ext uri="{0D108BD9-81ED-4DB2-BD59-A6C34878D82A}">
+                    <a16:rowId xmlns:a16="http://schemas.microsoft.com/office/drawing/2014/main" val="10001"/>
+                  </a:ext>
+                </a:extLst>
               </a:tr>
               <a:tr h="283464">
                 <a:tc>
@@ -6691,7 +8605,7 @@
                         </a:spcBef>
                       </a:pPr>
                       <a:r>
-                        <a:rPr sz="1100" b="0">
+                        <a:rPr sz="1100" b="0" dirty="0">
                           <a:solidFill>
                             <a:srgbClr val="16202C"/>
                           </a:solidFill>
@@ -6827,6 +8741,11 @@
                     </a:solidFill>
                   </a:tcPr>
                 </a:tc>
+                <a:extLst>
+                  <a:ext uri="{0D108BD9-81ED-4DB2-BD59-A6C34878D82A}">
+                    <a16:rowId xmlns:a16="http://schemas.microsoft.com/office/drawing/2014/main" val="10002"/>
+                  </a:ext>
+                </a:extLst>
               </a:tr>
               <a:tr h="283464">
                 <a:tc>
@@ -6843,7 +8762,7 @@
                         </a:spcBef>
                       </a:pPr>
                       <a:r>
-                        <a:rPr sz="1100" b="1">
+                        <a:rPr sz="1100" b="1" dirty="0">
                           <a:solidFill>
                             <a:srgbClr val="16202C"/>
                           </a:solidFill>
@@ -6873,7 +8792,7 @@
                         </a:spcBef>
                       </a:pPr>
                       <a:r>
-                        <a:rPr sz="1100" b="1">
+                        <a:rPr sz="1100" b="1" dirty="0">
                           <a:solidFill>
                             <a:srgbClr val="16202C"/>
                           </a:solidFill>
@@ -6903,7 +8822,7 @@
                         </a:spcBef>
                       </a:pPr>
                       <a:r>
-                        <a:rPr sz="1100" b="1">
+                        <a:rPr sz="1100" b="1" dirty="0">
                           <a:solidFill>
                             <a:srgbClr val="16202C"/>
                           </a:solidFill>
@@ -6933,7 +8852,7 @@
                         </a:spcBef>
                       </a:pPr>
                       <a:r>
-                        <a:rPr sz="1100" b="1">
+                        <a:rPr sz="1100" b="1" dirty="0">
                           <a:solidFill>
                             <a:srgbClr val="16202C"/>
                           </a:solidFill>
@@ -6963,7 +8882,7 @@
                         </a:spcBef>
                       </a:pPr>
                       <a:r>
-                        <a:rPr sz="1100" b="1">
+                        <a:rPr sz="1100" b="1" dirty="0">
                           <a:solidFill>
                             <a:srgbClr val="16202C"/>
                           </a:solidFill>
@@ -6979,6 +8898,11 @@
                     </a:solidFill>
                   </a:tcPr>
                 </a:tc>
+                <a:extLst>
+                  <a:ext uri="{0D108BD9-81ED-4DB2-BD59-A6C34878D82A}">
+                    <a16:rowId xmlns:a16="http://schemas.microsoft.com/office/drawing/2014/main" val="10003"/>
+                  </a:ext>
+                </a:extLst>
               </a:tr>
               <a:tr h="283464">
                 <a:tc>
@@ -6995,7 +8919,7 @@
                         </a:spcBef>
                       </a:pPr>
                       <a:r>
-                        <a:rPr sz="1100" b="0">
+                        <a:rPr sz="1100" b="0" dirty="0">
                           <a:solidFill>
                             <a:srgbClr val="16202C"/>
                           </a:solidFill>
@@ -7131,6 +9055,11 @@
                     </a:solidFill>
                   </a:tcPr>
                 </a:tc>
+                <a:extLst>
+                  <a:ext uri="{0D108BD9-81ED-4DB2-BD59-A6C34878D82A}">
+                    <a16:rowId xmlns:a16="http://schemas.microsoft.com/office/drawing/2014/main" val="10004"/>
+                  </a:ext>
+                </a:extLst>
               </a:tr>
               <a:tr h="283464">
                 <a:tc>
@@ -7267,7 +9196,7 @@
                         </a:spcBef>
                       </a:pPr>
                       <a:r>
-                        <a:rPr sz="1100" b="0">
+                        <a:rPr sz="1100" b="0" dirty="0">
                           <a:solidFill>
                             <a:srgbClr val="16202C"/>
                           </a:solidFill>
@@ -7283,6 +9212,11 @@
                     </a:solidFill>
                   </a:tcPr>
                 </a:tc>
+                <a:extLst>
+                  <a:ext uri="{0D108BD9-81ED-4DB2-BD59-A6C34878D82A}">
+                    <a16:rowId xmlns:a16="http://schemas.microsoft.com/office/drawing/2014/main" val="10005"/>
+                  </a:ext>
+                </a:extLst>
               </a:tr>
             </a:tbl>
           </a:graphicData>
@@ -7305,7 +9239,7 @@
           <a:noFill/>
         </p:spPr>
         <p:txBody>
-          <a:bodyPr wrap="square" anchor="t" lIns="0" rIns="0" tIns="0" bIns="0">
+          <a:bodyPr wrap="square" lIns="0" tIns="0" rIns="0" bIns="0" anchor="t">
             <a:spAutoFit/>
           </a:bodyPr>
           <a:lstStyle/>
@@ -7449,7 +9383,7 @@
 </file>
 
 <file path=ppt/slides/slide5.xml><?xml version="1.0" encoding="utf-8"?>
-<p:sld xmlns:a="http://schemas.openxmlformats.org/drawingml/2006/main" xmlns:p="http://schemas.openxmlformats.org/presentationml/2006/main" xmlns:r="http://schemas.openxmlformats.org/officeDocument/2006/relationships">
+<p:sld xmlns:a="http://schemas.openxmlformats.org/drawingml/2006/main" xmlns:r="http://schemas.openxmlformats.org/officeDocument/2006/relationships" xmlns:p="http://schemas.openxmlformats.org/presentationml/2006/main">
   <p:cSld>
     <p:spTree>
       <p:nvGrpSpPr>
@@ -7457,7 +9391,14 @@
         <p:cNvGrpSpPr/>
         <p:nvPr/>
       </p:nvGrpSpPr>
-      <p:grpSpPr/>
+      <p:grpSpPr>
+        <a:xfrm>
+          <a:off x="0" y="0"/>
+          <a:ext cx="0" cy="0"/>
+          <a:chOff x="0" y="0"/>
+          <a:chExt cx="0" cy="0"/>
+        </a:xfrm>
+      </p:grpSpPr>
       <p:sp>
         <p:nvSpPr>
           <p:cNvPr id="2" name="TextBox 1"/>
@@ -7475,7 +9416,7 @@
           <a:noFill/>
         </p:spPr>
         <p:txBody>
-          <a:bodyPr wrap="square" anchor="t" lIns="0" rIns="0" tIns="0" bIns="0">
+          <a:bodyPr wrap="square" lIns="0" tIns="0" rIns="0" bIns="0" anchor="t">
             <a:spAutoFit/>
           </a:bodyPr>
           <a:lstStyle/>
@@ -7517,7 +9458,7 @@
           <a:noFill/>
         </p:spPr>
         <p:txBody>
-          <a:bodyPr wrap="square" anchor="t" lIns="0" rIns="0" tIns="0" bIns="0">
+          <a:bodyPr wrap="square" lIns="0" tIns="0" rIns="0" bIns="0" anchor="t">
             <a:spAutoFit/>
           </a:bodyPr>
           <a:lstStyle/>
@@ -7583,6 +9524,7 @@
           <a:lstStyle/>
           <a:p>
             <a:pPr algn="ctr"/>
+            <a:endParaRPr/>
           </a:p>
         </p:txBody>
       </p:sp>
@@ -7595,7 +9537,7 @@
           <p:nvPr/>
         </p:nvPicPr>
         <p:blipFill>
-          <a:blip r:embed="rId2"/>
+          <a:blip r:embed="rId3"/>
           <a:stretch>
             <a:fillRect/>
           </a:stretch>
@@ -7620,7 +9562,7 @@
         </p:nvGraphicFramePr>
         <p:xfrm>
           <a:off x="749808" y="5029200"/>
-          <a:ext cx="4480560" cy="1133856"/>
+          <a:ext cx="4480560" cy="1378458"/>
         </p:xfrm>
         <a:graphic>
           <a:graphicData uri="http://schemas.openxmlformats.org/drawingml/2006/table">
@@ -7629,11 +9571,41 @@
                 <a:tableStyleId>{5C22544A-7EE6-4342-B048-85BDC9FD1C3A}</a:tableStyleId>
               </a:tblPr>
               <a:tblGrid>
-                <a:gridCol w="896112"/>
-                <a:gridCol w="896112"/>
-                <a:gridCol w="896112"/>
-                <a:gridCol w="896112"/>
-                <a:gridCol w="896112"/>
+                <a:gridCol w="896112">
+                  <a:extLst>
+                    <a:ext uri="{9D8B030D-6E8A-4147-A177-3AD203B41FA5}">
+                      <a16:colId xmlns:a16="http://schemas.microsoft.com/office/drawing/2014/main" val="20000"/>
+                    </a:ext>
+                  </a:extLst>
+                </a:gridCol>
+                <a:gridCol w="896112">
+                  <a:extLst>
+                    <a:ext uri="{9D8B030D-6E8A-4147-A177-3AD203B41FA5}">
+                      <a16:colId xmlns:a16="http://schemas.microsoft.com/office/drawing/2014/main" val="20001"/>
+                    </a:ext>
+                  </a:extLst>
+                </a:gridCol>
+                <a:gridCol w="896112">
+                  <a:extLst>
+                    <a:ext uri="{9D8B030D-6E8A-4147-A177-3AD203B41FA5}">
+                      <a16:colId xmlns:a16="http://schemas.microsoft.com/office/drawing/2014/main" val="20002"/>
+                    </a:ext>
+                  </a:extLst>
+                </a:gridCol>
+                <a:gridCol w="896112">
+                  <a:extLst>
+                    <a:ext uri="{9D8B030D-6E8A-4147-A177-3AD203B41FA5}">
+                      <a16:colId xmlns:a16="http://schemas.microsoft.com/office/drawing/2014/main" val="20003"/>
+                    </a:ext>
+                  </a:extLst>
+                </a:gridCol>
+                <a:gridCol w="896112">
+                  <a:extLst>
+                    <a:ext uri="{9D8B030D-6E8A-4147-A177-3AD203B41FA5}">
+                      <a16:colId xmlns:a16="http://schemas.microsoft.com/office/drawing/2014/main" val="20004"/>
+                    </a:ext>
+                  </a:extLst>
+                </a:gridCol>
               </a:tblGrid>
               <a:tr h="283464">
                 <a:tc>
@@ -7786,6 +9758,11 @@
                     </a:solidFill>
                   </a:tcPr>
                 </a:tc>
+                <a:extLst>
+                  <a:ext uri="{0D108BD9-81ED-4DB2-BD59-A6C34878D82A}">
+                    <a16:rowId xmlns:a16="http://schemas.microsoft.com/office/drawing/2014/main" val="10000"/>
+                  </a:ext>
+                </a:extLst>
               </a:tr>
               <a:tr h="283464">
                 <a:tc>
@@ -7938,6 +9915,11 @@
                     </a:solidFill>
                   </a:tcPr>
                 </a:tc>
+                <a:extLst>
+                  <a:ext uri="{0D108BD9-81ED-4DB2-BD59-A6C34878D82A}">
+                    <a16:rowId xmlns:a16="http://schemas.microsoft.com/office/drawing/2014/main" val="10001"/>
+                  </a:ext>
+                </a:extLst>
               </a:tr>
               <a:tr h="283464">
                 <a:tc>
@@ -8090,6 +10072,11 @@
                     </a:solidFill>
                   </a:tcPr>
                 </a:tc>
+                <a:extLst>
+                  <a:ext uri="{0D108BD9-81ED-4DB2-BD59-A6C34878D82A}">
+                    <a16:rowId xmlns:a16="http://schemas.microsoft.com/office/drawing/2014/main" val="10002"/>
+                  </a:ext>
+                </a:extLst>
               </a:tr>
               <a:tr h="283464">
                 <a:tc>
@@ -8242,6 +10229,11 @@
                     </a:solidFill>
                   </a:tcPr>
                 </a:tc>
+                <a:extLst>
+                  <a:ext uri="{0D108BD9-81ED-4DB2-BD59-A6C34878D82A}">
+                    <a16:rowId xmlns:a16="http://schemas.microsoft.com/office/drawing/2014/main" val="10003"/>
+                  </a:ext>
+                </a:extLst>
               </a:tr>
             </a:tbl>
           </a:graphicData>
@@ -8264,7 +10256,7 @@
           <a:noFill/>
         </p:spPr>
         <p:txBody>
-          <a:bodyPr wrap="square" anchor="t" lIns="0" rIns="0" tIns="0" bIns="0">
+          <a:bodyPr wrap="square" lIns="0" tIns="0" rIns="0" bIns="0" anchor="t">
             <a:spAutoFit/>
           </a:bodyPr>
           <a:lstStyle/>
@@ -8408,7 +10400,7 @@
 </file>
 
 <file path=ppt/slides/slide6.xml><?xml version="1.0" encoding="utf-8"?>
-<p:sld xmlns:a="http://schemas.openxmlformats.org/drawingml/2006/main" xmlns:p="http://schemas.openxmlformats.org/presentationml/2006/main" xmlns:r="http://schemas.openxmlformats.org/officeDocument/2006/relationships">
+<p:sld xmlns:a="http://schemas.openxmlformats.org/drawingml/2006/main" xmlns:r="http://schemas.openxmlformats.org/officeDocument/2006/relationships" xmlns:p="http://schemas.openxmlformats.org/presentationml/2006/main">
   <p:cSld>
     <p:spTree>
       <p:nvGrpSpPr>
@@ -8416,7 +10408,14 @@
         <p:cNvGrpSpPr/>
         <p:nvPr/>
       </p:nvGrpSpPr>
-      <p:grpSpPr/>
+      <p:grpSpPr>
+        <a:xfrm>
+          <a:off x="0" y="0"/>
+          <a:ext cx="0" cy="0"/>
+          <a:chOff x="0" y="0"/>
+          <a:chExt cx="0" cy="0"/>
+        </a:xfrm>
+      </p:grpSpPr>
       <p:sp>
         <p:nvSpPr>
           <p:cNvPr id="2" name="TextBox 1"/>
@@ -8434,7 +10433,7 @@
           <a:noFill/>
         </p:spPr>
         <p:txBody>
-          <a:bodyPr wrap="square" anchor="t" lIns="0" rIns="0" tIns="0" bIns="0">
+          <a:bodyPr wrap="square" lIns="0" tIns="0" rIns="0" bIns="0" anchor="t">
             <a:spAutoFit/>
           </a:bodyPr>
           <a:lstStyle/>
@@ -8476,7 +10475,7 @@
           <a:noFill/>
         </p:spPr>
         <p:txBody>
-          <a:bodyPr wrap="square" anchor="t" lIns="0" rIns="0" tIns="0" bIns="0">
+          <a:bodyPr wrap="square" lIns="0" tIns="0" rIns="0" bIns="0" anchor="t">
             <a:spAutoFit/>
           </a:bodyPr>
           <a:lstStyle/>
@@ -8542,6 +10541,7 @@
           <a:lstStyle/>
           <a:p>
             <a:pPr algn="ctr"/>
+            <a:endParaRPr/>
           </a:p>
         </p:txBody>
       </p:sp>
@@ -8562,7 +10562,7 @@
           <a:noFill/>
         </p:spPr>
         <p:txBody>
-          <a:bodyPr wrap="square" anchor="t" lIns="0" rIns="0" tIns="0" bIns="0">
+          <a:bodyPr wrap="square" lIns="0" tIns="0" rIns="0" bIns="0" anchor="t">
             <a:spAutoFit/>
           </a:bodyPr>
           <a:lstStyle/>
@@ -8762,7 +10762,7 @@
           <p:nvPr/>
         </p:nvPicPr>
         <p:blipFill>
-          <a:blip r:embed="rId2"/>
+          <a:blip r:embed="rId3"/>
           <a:stretch>
             <a:fillRect/>
           </a:stretch>
@@ -8786,7 +10786,7 @@
           <p:nvPr/>
         </p:nvPicPr>
         <p:blipFill>
-          <a:blip r:embed="rId3"/>
+          <a:blip r:embed="rId4"/>
           <a:stretch>
             <a:fillRect/>
           </a:stretch>
@@ -8810,7 +10810,7 @@
 </file>
 
 <file path=ppt/slides/slide7.xml><?xml version="1.0" encoding="utf-8"?>
-<p:sld xmlns:a="http://schemas.openxmlformats.org/drawingml/2006/main" xmlns:p="http://schemas.openxmlformats.org/presentationml/2006/main" xmlns:r="http://schemas.openxmlformats.org/officeDocument/2006/relationships">
+<p:sld xmlns:a="http://schemas.openxmlformats.org/drawingml/2006/main" xmlns:r="http://schemas.openxmlformats.org/officeDocument/2006/relationships" xmlns:p="http://schemas.openxmlformats.org/presentationml/2006/main">
   <p:cSld>
     <p:spTree>
       <p:nvGrpSpPr>
@@ -8818,7 +10818,14 @@
         <p:cNvGrpSpPr/>
         <p:nvPr/>
       </p:nvGrpSpPr>
-      <p:grpSpPr/>
+      <p:grpSpPr>
+        <a:xfrm>
+          <a:off x="0" y="0"/>
+          <a:ext cx="0" cy="0"/>
+          <a:chOff x="0" y="0"/>
+          <a:chExt cx="0" cy="0"/>
+        </a:xfrm>
+      </p:grpSpPr>
       <p:sp>
         <p:nvSpPr>
           <p:cNvPr id="2" name="TextBox 1"/>
@@ -8836,7 +10843,7 @@
           <a:noFill/>
         </p:spPr>
         <p:txBody>
-          <a:bodyPr wrap="square" anchor="t" lIns="0" rIns="0" tIns="0" bIns="0">
+          <a:bodyPr wrap="square" lIns="0" tIns="0" rIns="0" bIns="0" anchor="t">
             <a:spAutoFit/>
           </a:bodyPr>
           <a:lstStyle/>
@@ -8878,7 +10885,7 @@
           <a:noFill/>
         </p:spPr>
         <p:txBody>
-          <a:bodyPr wrap="square" anchor="t" lIns="0" rIns="0" tIns="0" bIns="0">
+          <a:bodyPr wrap="square" lIns="0" tIns="0" rIns="0" bIns="0" anchor="t">
             <a:spAutoFit/>
           </a:bodyPr>
           <a:lstStyle/>
@@ -8944,6 +10951,7 @@
           <a:lstStyle/>
           <a:p>
             <a:pPr algn="ctr"/>
+            <a:endParaRPr/>
           </a:p>
         </p:txBody>
       </p:sp>
@@ -8957,7 +10965,7 @@
         </p:nvGraphicFramePr>
         <p:xfrm>
           <a:off x="566928" y="1572768"/>
-          <a:ext cx="6035040" cy="1417320"/>
+          <a:ext cx="6035040" cy="2099310"/>
         </p:xfrm>
         <a:graphic>
           <a:graphicData uri="http://schemas.openxmlformats.org/drawingml/2006/table">
@@ -8966,13 +10974,55 @@
                 <a:tableStyleId>{5C22544A-7EE6-4342-B048-85BDC9FD1C3A}</a:tableStyleId>
               </a:tblPr>
               <a:tblGrid>
-                <a:gridCol w="862148"/>
-                <a:gridCol w="862148"/>
-                <a:gridCol w="862148"/>
-                <a:gridCol w="862148"/>
-                <a:gridCol w="862148"/>
-                <a:gridCol w="862148"/>
-                <a:gridCol w="862152"/>
+                <a:gridCol w="862148">
+                  <a:extLst>
+                    <a:ext uri="{9D8B030D-6E8A-4147-A177-3AD203B41FA5}">
+                      <a16:colId xmlns:a16="http://schemas.microsoft.com/office/drawing/2014/main" val="20000"/>
+                    </a:ext>
+                  </a:extLst>
+                </a:gridCol>
+                <a:gridCol w="862148">
+                  <a:extLst>
+                    <a:ext uri="{9D8B030D-6E8A-4147-A177-3AD203B41FA5}">
+                      <a16:colId xmlns:a16="http://schemas.microsoft.com/office/drawing/2014/main" val="20001"/>
+                    </a:ext>
+                  </a:extLst>
+                </a:gridCol>
+                <a:gridCol w="862148">
+                  <a:extLst>
+                    <a:ext uri="{9D8B030D-6E8A-4147-A177-3AD203B41FA5}">
+                      <a16:colId xmlns:a16="http://schemas.microsoft.com/office/drawing/2014/main" val="20002"/>
+                    </a:ext>
+                  </a:extLst>
+                </a:gridCol>
+                <a:gridCol w="862148">
+                  <a:extLst>
+                    <a:ext uri="{9D8B030D-6E8A-4147-A177-3AD203B41FA5}">
+                      <a16:colId xmlns:a16="http://schemas.microsoft.com/office/drawing/2014/main" val="20003"/>
+                    </a:ext>
+                  </a:extLst>
+                </a:gridCol>
+                <a:gridCol w="862148">
+                  <a:extLst>
+                    <a:ext uri="{9D8B030D-6E8A-4147-A177-3AD203B41FA5}">
+                      <a16:colId xmlns:a16="http://schemas.microsoft.com/office/drawing/2014/main" val="20004"/>
+                    </a:ext>
+                  </a:extLst>
+                </a:gridCol>
+                <a:gridCol w="862148">
+                  <a:extLst>
+                    <a:ext uri="{9D8B030D-6E8A-4147-A177-3AD203B41FA5}">
+                      <a16:colId xmlns:a16="http://schemas.microsoft.com/office/drawing/2014/main" val="20005"/>
+                    </a:ext>
+                  </a:extLst>
+                </a:gridCol>
+                <a:gridCol w="862152">
+                  <a:extLst>
+                    <a:ext uri="{9D8B030D-6E8A-4147-A177-3AD203B41FA5}">
+                      <a16:colId xmlns:a16="http://schemas.microsoft.com/office/drawing/2014/main" val="20006"/>
+                    </a:ext>
+                  </a:extLst>
+                </a:gridCol>
               </a:tblGrid>
               <a:tr h="283464">
                 <a:tc>
@@ -9185,6 +11235,11 @@
                     </a:solidFill>
                   </a:tcPr>
                 </a:tc>
+                <a:extLst>
+                  <a:ext uri="{0D108BD9-81ED-4DB2-BD59-A6C34878D82A}">
+                    <a16:rowId xmlns:a16="http://schemas.microsoft.com/office/drawing/2014/main" val="10000"/>
+                  </a:ext>
+                </a:extLst>
               </a:tr>
               <a:tr h="283464">
                 <a:tc>
@@ -9397,6 +11452,11 @@
                     </a:solidFill>
                   </a:tcPr>
                 </a:tc>
+                <a:extLst>
+                  <a:ext uri="{0D108BD9-81ED-4DB2-BD59-A6C34878D82A}">
+                    <a16:rowId xmlns:a16="http://schemas.microsoft.com/office/drawing/2014/main" val="10001"/>
+                  </a:ext>
+                </a:extLst>
               </a:tr>
               <a:tr h="283464">
                 <a:tc>
@@ -9609,6 +11669,11 @@
                     </a:solidFill>
                   </a:tcPr>
                 </a:tc>
+                <a:extLst>
+                  <a:ext uri="{0D108BD9-81ED-4DB2-BD59-A6C34878D82A}">
+                    <a16:rowId xmlns:a16="http://schemas.microsoft.com/office/drawing/2014/main" val="10002"/>
+                  </a:ext>
+                </a:extLst>
               </a:tr>
               <a:tr h="283464">
                 <a:tc>
@@ -9821,6 +11886,11 @@
                     </a:solidFill>
                   </a:tcPr>
                 </a:tc>
+                <a:extLst>
+                  <a:ext uri="{0D108BD9-81ED-4DB2-BD59-A6C34878D82A}">
+                    <a16:rowId xmlns:a16="http://schemas.microsoft.com/office/drawing/2014/main" val="10003"/>
+                  </a:ext>
+                </a:extLst>
               </a:tr>
               <a:tr h="283464">
                 <a:tc>
@@ -10033,6 +12103,11 @@
                     </a:solidFill>
                   </a:tcPr>
                 </a:tc>
+                <a:extLst>
+                  <a:ext uri="{0D108BD9-81ED-4DB2-BD59-A6C34878D82A}">
+                    <a16:rowId xmlns:a16="http://schemas.microsoft.com/office/drawing/2014/main" val="10004"/>
+                  </a:ext>
+                </a:extLst>
               </a:tr>
             </a:tbl>
           </a:graphicData>
@@ -10046,7 +12121,7 @@
         </p:nvSpPr>
         <p:spPr>
           <a:xfrm>
-            <a:off x="566928" y="3063240"/>
+            <a:off x="566928" y="3672078"/>
             <a:ext cx="6035040" cy="2011680"/>
           </a:xfrm>
           <a:prstGeom prst="rect">
@@ -10055,7 +12130,7 @@
           <a:noFill/>
         </p:spPr>
         <p:txBody>
-          <a:bodyPr wrap="square" anchor="t" lIns="0" rIns="0" tIns="0" bIns="0">
+          <a:bodyPr wrap="square" lIns="0" tIns="0" rIns="0" bIns="0" anchor="t">
             <a:spAutoFit/>
           </a:bodyPr>
           <a:lstStyle/>
@@ -10069,7 +12144,7 @@
               </a:spcBef>
             </a:pPr>
             <a:r>
-              <a:rPr sz="1300" b="0">
+              <a:rPr sz="1300" b="0" dirty="0">
                 <a:solidFill>
                   <a:srgbClr val="16202C"/>
                 </a:solidFill>
@@ -10078,22 +12153,220 @@
               <a:t>•  </a:t>
             </a:r>
             <a:r>
-              <a:rPr sz="1300" b="1">
-                <a:solidFill>
-                  <a:srgbClr val="16202C"/>
-                </a:solidFill>
-                <a:latin typeface="Arial"/>
-              </a:rPr>
-              <a:t>Los 21 falsos negativos son el corazón de la pregunta de investigación.</a:t>
-            </a:r>
-            <a:r>
-              <a:rPr sz="1300" b="0">
-                <a:solidFill>
-                  <a:srgbClr val="16202C"/>
-                </a:solidFill>
-                <a:latin typeface="Arial"/>
-              </a:rPr>
-              <a:t> Promedian 267 puntos con condiciones de contexto que predicen fracaso.</a:t>
+              <a:rPr sz="1300" b="1" dirty="0">
+                <a:solidFill>
+                  <a:srgbClr val="16202C"/>
+                </a:solidFill>
+                <a:latin typeface="Arial"/>
+              </a:rPr>
+              <a:t>Los 21 </a:t>
+            </a:r>
+            <a:r>
+              <a:rPr sz="1300" b="1" dirty="0" err="1">
+                <a:solidFill>
+                  <a:srgbClr val="16202C"/>
+                </a:solidFill>
+                <a:latin typeface="Arial"/>
+              </a:rPr>
+              <a:t>falsos</a:t>
+            </a:r>
+            <a:r>
+              <a:rPr sz="1300" b="1" dirty="0">
+                <a:solidFill>
+                  <a:srgbClr val="16202C"/>
+                </a:solidFill>
+                <a:latin typeface="Arial"/>
+              </a:rPr>
+              <a:t> </a:t>
+            </a:r>
+            <a:r>
+              <a:rPr sz="1300" b="1" dirty="0" err="1">
+                <a:solidFill>
+                  <a:srgbClr val="16202C"/>
+                </a:solidFill>
+                <a:latin typeface="Arial"/>
+              </a:rPr>
+              <a:t>negativos</a:t>
+            </a:r>
+            <a:r>
+              <a:rPr sz="1300" b="1" dirty="0">
+                <a:solidFill>
+                  <a:srgbClr val="16202C"/>
+                </a:solidFill>
+                <a:latin typeface="Arial"/>
+              </a:rPr>
+              <a:t> son </a:t>
+            </a:r>
+            <a:r>
+              <a:rPr sz="1300" b="1" dirty="0" err="1">
+                <a:solidFill>
+                  <a:srgbClr val="16202C"/>
+                </a:solidFill>
+                <a:latin typeface="Arial"/>
+              </a:rPr>
+              <a:t>el</a:t>
+            </a:r>
+            <a:r>
+              <a:rPr sz="1300" b="1" dirty="0">
+                <a:solidFill>
+                  <a:srgbClr val="16202C"/>
+                </a:solidFill>
+                <a:latin typeface="Arial"/>
+              </a:rPr>
+              <a:t> </a:t>
+            </a:r>
+            <a:r>
+              <a:rPr sz="1300" b="1" dirty="0" err="1">
+                <a:solidFill>
+                  <a:srgbClr val="16202C"/>
+                </a:solidFill>
+                <a:latin typeface="Arial"/>
+              </a:rPr>
+              <a:t>corazón</a:t>
+            </a:r>
+            <a:r>
+              <a:rPr sz="1300" b="1" dirty="0">
+                <a:solidFill>
+                  <a:srgbClr val="16202C"/>
+                </a:solidFill>
+                <a:latin typeface="Arial"/>
+              </a:rPr>
+              <a:t> de la </a:t>
+            </a:r>
+            <a:r>
+              <a:rPr sz="1300" b="1" dirty="0" err="1">
+                <a:solidFill>
+                  <a:srgbClr val="16202C"/>
+                </a:solidFill>
+                <a:latin typeface="Arial"/>
+              </a:rPr>
+              <a:t>pregunta</a:t>
+            </a:r>
+            <a:r>
+              <a:rPr sz="1300" b="1" dirty="0">
+                <a:solidFill>
+                  <a:srgbClr val="16202C"/>
+                </a:solidFill>
+                <a:latin typeface="Arial"/>
+              </a:rPr>
+              <a:t> de </a:t>
+            </a:r>
+            <a:r>
+              <a:rPr sz="1300" b="1" dirty="0" err="1">
+                <a:solidFill>
+                  <a:srgbClr val="16202C"/>
+                </a:solidFill>
+                <a:latin typeface="Arial"/>
+              </a:rPr>
+              <a:t>investigación</a:t>
+            </a:r>
+            <a:r>
+              <a:rPr sz="1300" b="1" dirty="0">
+                <a:solidFill>
+                  <a:srgbClr val="16202C"/>
+                </a:solidFill>
+                <a:latin typeface="Arial"/>
+              </a:rPr>
+              <a:t>.</a:t>
+            </a:r>
+            <a:r>
+              <a:rPr sz="1300" b="0" dirty="0">
+                <a:solidFill>
+                  <a:srgbClr val="16202C"/>
+                </a:solidFill>
+                <a:latin typeface="Arial"/>
+              </a:rPr>
+              <a:t> </a:t>
+            </a:r>
+            <a:r>
+              <a:rPr sz="1300" b="0" dirty="0" err="1">
+                <a:solidFill>
+                  <a:srgbClr val="16202C"/>
+                </a:solidFill>
+                <a:latin typeface="Arial"/>
+              </a:rPr>
+              <a:t>Promedian</a:t>
+            </a:r>
+            <a:r>
+              <a:rPr sz="1300" b="0" dirty="0">
+                <a:solidFill>
+                  <a:srgbClr val="16202C"/>
+                </a:solidFill>
+                <a:latin typeface="Arial"/>
+              </a:rPr>
+              <a:t> 267 puntos con </a:t>
+            </a:r>
+            <a:r>
+              <a:rPr sz="1300" b="0" dirty="0" err="1">
+                <a:solidFill>
+                  <a:srgbClr val="16202C"/>
+                </a:solidFill>
+                <a:latin typeface="Arial"/>
+              </a:rPr>
+              <a:t>condiciones</a:t>
+            </a:r>
+            <a:r>
+              <a:rPr sz="1300" b="0" dirty="0">
+                <a:solidFill>
+                  <a:srgbClr val="16202C"/>
+                </a:solidFill>
+                <a:latin typeface="Arial"/>
+              </a:rPr>
+              <a:t> de </a:t>
+            </a:r>
+            <a:r>
+              <a:rPr sz="1300" b="0" dirty="0" err="1">
+                <a:solidFill>
+                  <a:srgbClr val="16202C"/>
+                </a:solidFill>
+                <a:latin typeface="Arial"/>
+              </a:rPr>
+              <a:t>contexto</a:t>
+            </a:r>
+            <a:r>
+              <a:rPr sz="1300" b="0" dirty="0">
+                <a:solidFill>
+                  <a:srgbClr val="16202C"/>
+                </a:solidFill>
+                <a:latin typeface="Arial"/>
+              </a:rPr>
+              <a:t> que </a:t>
+            </a:r>
+            <a:r>
+              <a:rPr sz="1300" b="0" dirty="0" err="1">
+                <a:solidFill>
+                  <a:srgbClr val="16202C"/>
+                </a:solidFill>
+                <a:latin typeface="Arial"/>
+              </a:rPr>
+              <a:t>predicen</a:t>
+            </a:r>
+            <a:r>
+              <a:rPr sz="1300" b="0" dirty="0">
+                <a:solidFill>
+                  <a:srgbClr val="16202C"/>
+                </a:solidFill>
+                <a:latin typeface="Arial"/>
+              </a:rPr>
+              <a:t> </a:t>
+            </a:r>
+            <a:r>
+              <a:rPr sz="1300" b="0" dirty="0" err="1">
+                <a:solidFill>
+                  <a:srgbClr val="16202C"/>
+                </a:solidFill>
+                <a:latin typeface="Arial"/>
+              </a:rPr>
+              <a:t>fracaso</a:t>
+            </a:r>
+            <a:r>
+              <a:rPr sz="1300" b="0" dirty="0">
+                <a:solidFill>
+                  <a:srgbClr val="16202C"/>
+                </a:solidFill>
+                <a:latin typeface="Arial"/>
+              </a:rPr>
+              <a:t>.</a:t>
             </a:r>
           </a:p>
           <a:p>
@@ -10106,7 +12379,7 @@
               </a:spcBef>
             </a:pPr>
             <a:r>
-              <a:rPr sz="1300" b="0">
+              <a:rPr sz="1300" b="0" dirty="0">
                 <a:solidFill>
                   <a:srgbClr val="16202C"/>
                 </a:solidFill>
@@ -10115,22 +12388,202 @@
               <a:t>•  </a:t>
             </a:r>
             <a:r>
-              <a:rPr sz="1300" b="1">
-                <a:solidFill>
-                  <a:srgbClr val="16202C"/>
-                </a:solidFill>
-                <a:latin typeface="Arial"/>
-              </a:rPr>
-              <a:t>Los 74 falsos positivos son el patrón inverso:</a:t>
-            </a:r>
-            <a:r>
-              <a:rPr sz="1300" b="0">
-                <a:solidFill>
-                  <a:srgbClr val="16202C"/>
-                </a:solidFill>
-                <a:latin typeface="Arial"/>
-              </a:rPr>
-              <a:t> buena convivencia (77,5) y buena asistencia (0,89), pero 232 puntos.</a:t>
+              <a:rPr sz="1300" b="1" dirty="0">
+                <a:solidFill>
+                  <a:srgbClr val="16202C"/>
+                </a:solidFill>
+                <a:latin typeface="Arial"/>
+              </a:rPr>
+              <a:t>Los 74 </a:t>
+            </a:r>
+            <a:r>
+              <a:rPr sz="1300" b="1" dirty="0" err="1">
+                <a:solidFill>
+                  <a:srgbClr val="16202C"/>
+                </a:solidFill>
+                <a:latin typeface="Arial"/>
+              </a:rPr>
+              <a:t>falsos</a:t>
+            </a:r>
+            <a:r>
+              <a:rPr sz="1300" b="1" dirty="0">
+                <a:solidFill>
+                  <a:srgbClr val="16202C"/>
+                </a:solidFill>
+                <a:latin typeface="Arial"/>
+              </a:rPr>
+              <a:t> </a:t>
+            </a:r>
+            <a:r>
+              <a:rPr sz="1300" b="1" dirty="0" err="1">
+                <a:solidFill>
+                  <a:srgbClr val="16202C"/>
+                </a:solidFill>
+                <a:latin typeface="Arial"/>
+              </a:rPr>
+              <a:t>positivos</a:t>
+            </a:r>
+            <a:r>
+              <a:rPr sz="1300" b="1" dirty="0">
+                <a:solidFill>
+                  <a:srgbClr val="16202C"/>
+                </a:solidFill>
+                <a:latin typeface="Arial"/>
+              </a:rPr>
+              <a:t> son </a:t>
+            </a:r>
+            <a:r>
+              <a:rPr sz="1300" b="1" dirty="0" err="1">
+                <a:solidFill>
+                  <a:srgbClr val="16202C"/>
+                </a:solidFill>
+                <a:latin typeface="Arial"/>
+              </a:rPr>
+              <a:t>el</a:t>
+            </a:r>
+            <a:r>
+              <a:rPr sz="1300" b="1" dirty="0">
+                <a:solidFill>
+                  <a:srgbClr val="16202C"/>
+                </a:solidFill>
+                <a:latin typeface="Arial"/>
+              </a:rPr>
+              <a:t> </a:t>
+            </a:r>
+            <a:r>
+              <a:rPr sz="1300" b="1" dirty="0" err="1">
+                <a:solidFill>
+                  <a:srgbClr val="16202C"/>
+                </a:solidFill>
+                <a:latin typeface="Arial"/>
+              </a:rPr>
+              <a:t>patrón</a:t>
+            </a:r>
+            <a:r>
+              <a:rPr sz="1300" b="1" dirty="0">
+                <a:solidFill>
+                  <a:srgbClr val="16202C"/>
+                </a:solidFill>
+                <a:latin typeface="Arial"/>
+              </a:rPr>
+              <a:t> </a:t>
+            </a:r>
+            <a:r>
+              <a:rPr sz="1300" b="1" dirty="0" err="1">
+                <a:solidFill>
+                  <a:srgbClr val="16202C"/>
+                </a:solidFill>
+                <a:latin typeface="Arial"/>
+              </a:rPr>
+              <a:t>inverso</a:t>
+            </a:r>
+            <a:r>
+              <a:rPr sz="1300" b="1" dirty="0">
+                <a:solidFill>
+                  <a:srgbClr val="16202C"/>
+                </a:solidFill>
+                <a:latin typeface="Arial"/>
+              </a:rPr>
+              <a:t>:</a:t>
+            </a:r>
+            <a:r>
+              <a:rPr sz="1300" b="0" dirty="0">
+                <a:solidFill>
+                  <a:srgbClr val="16202C"/>
+                </a:solidFill>
+                <a:latin typeface="Arial"/>
+              </a:rPr>
+              <a:t> </a:t>
+            </a:r>
+            <a:r>
+              <a:rPr sz="1300" b="0" dirty="0" err="1">
+                <a:solidFill>
+                  <a:srgbClr val="16202C"/>
+                </a:solidFill>
+                <a:latin typeface="Arial"/>
+              </a:rPr>
+              <a:t>buena</a:t>
+            </a:r>
+            <a:r>
+              <a:rPr sz="1300" b="0" dirty="0">
+                <a:solidFill>
+                  <a:srgbClr val="16202C"/>
+                </a:solidFill>
+                <a:latin typeface="Arial"/>
+              </a:rPr>
+              <a:t> </a:t>
+            </a:r>
+            <a:r>
+              <a:rPr sz="1300" b="0" dirty="0" err="1">
+                <a:solidFill>
+                  <a:srgbClr val="16202C"/>
+                </a:solidFill>
+                <a:latin typeface="Arial"/>
+              </a:rPr>
+              <a:t>convivencia</a:t>
+            </a:r>
+            <a:r>
+              <a:rPr sz="1300" b="0" dirty="0">
+                <a:solidFill>
+                  <a:srgbClr val="16202C"/>
+                </a:solidFill>
+                <a:latin typeface="Arial"/>
+              </a:rPr>
+              <a:t> (77,5) y </a:t>
+            </a:r>
+            <a:r>
+              <a:rPr sz="1300" b="0" dirty="0" err="1">
+                <a:solidFill>
+                  <a:srgbClr val="16202C"/>
+                </a:solidFill>
+                <a:latin typeface="Arial"/>
+              </a:rPr>
+              <a:t>buena</a:t>
+            </a:r>
+            <a:r>
+              <a:rPr sz="1300" b="0" dirty="0">
+                <a:solidFill>
+                  <a:srgbClr val="16202C"/>
+                </a:solidFill>
+                <a:latin typeface="Arial"/>
+              </a:rPr>
+              <a:t> </a:t>
+            </a:r>
+            <a:r>
+              <a:rPr sz="1300" b="0" dirty="0" err="1">
+                <a:solidFill>
+                  <a:srgbClr val="16202C"/>
+                </a:solidFill>
+                <a:latin typeface="Arial"/>
+              </a:rPr>
+              <a:t>asistencia</a:t>
+            </a:r>
+            <a:r>
+              <a:rPr sz="1300" b="0" dirty="0">
+                <a:solidFill>
+                  <a:srgbClr val="16202C"/>
+                </a:solidFill>
+                <a:latin typeface="Arial"/>
+              </a:rPr>
+              <a:t> (0,89), </a:t>
+            </a:r>
+            <a:r>
+              <a:rPr sz="1300" b="0" dirty="0" err="1">
+                <a:solidFill>
+                  <a:srgbClr val="16202C"/>
+                </a:solidFill>
+                <a:latin typeface="Arial"/>
+              </a:rPr>
+              <a:t>pero</a:t>
+            </a:r>
+            <a:r>
+              <a:rPr sz="1300" b="0" dirty="0">
+                <a:solidFill>
+                  <a:srgbClr val="16202C"/>
+                </a:solidFill>
+                <a:latin typeface="Arial"/>
+              </a:rPr>
+              <a:t> 232 puntos.</a:t>
             </a:r>
           </a:p>
         </p:txBody>
@@ -10145,7 +12598,7 @@
         </p:nvGraphicFramePr>
         <p:xfrm>
           <a:off x="566928" y="5029200"/>
-          <a:ext cx="6035040" cy="1133856"/>
+          <a:ext cx="6035040" cy="1761363"/>
         </p:xfrm>
         <a:graphic>
           <a:graphicData uri="http://schemas.openxmlformats.org/drawingml/2006/table">
@@ -10154,11 +12607,41 @@
                 <a:tableStyleId>{5C22544A-7EE6-4342-B048-85BDC9FD1C3A}</a:tableStyleId>
               </a:tblPr>
               <a:tblGrid>
-                <a:gridCol w="1207008"/>
-                <a:gridCol w="1207008"/>
-                <a:gridCol w="1207008"/>
-                <a:gridCol w="1207008"/>
-                <a:gridCol w="1207008"/>
+                <a:gridCol w="1207008">
+                  <a:extLst>
+                    <a:ext uri="{9D8B030D-6E8A-4147-A177-3AD203B41FA5}">
+                      <a16:colId xmlns:a16="http://schemas.microsoft.com/office/drawing/2014/main" val="20000"/>
+                    </a:ext>
+                  </a:extLst>
+                </a:gridCol>
+                <a:gridCol w="1207008">
+                  <a:extLst>
+                    <a:ext uri="{9D8B030D-6E8A-4147-A177-3AD203B41FA5}">
+                      <a16:colId xmlns:a16="http://schemas.microsoft.com/office/drawing/2014/main" val="20001"/>
+                    </a:ext>
+                  </a:extLst>
+                </a:gridCol>
+                <a:gridCol w="1207008">
+                  <a:extLst>
+                    <a:ext uri="{9D8B030D-6E8A-4147-A177-3AD203B41FA5}">
+                      <a16:colId xmlns:a16="http://schemas.microsoft.com/office/drawing/2014/main" val="20002"/>
+                    </a:ext>
+                  </a:extLst>
+                </a:gridCol>
+                <a:gridCol w="1207008">
+                  <a:extLst>
+                    <a:ext uri="{9D8B030D-6E8A-4147-A177-3AD203B41FA5}">
+                      <a16:colId xmlns:a16="http://schemas.microsoft.com/office/drawing/2014/main" val="20003"/>
+                    </a:ext>
+                  </a:extLst>
+                </a:gridCol>
+                <a:gridCol w="1207008">
+                  <a:extLst>
+                    <a:ext uri="{9D8B030D-6E8A-4147-A177-3AD203B41FA5}">
+                      <a16:colId xmlns:a16="http://schemas.microsoft.com/office/drawing/2014/main" val="20004"/>
+                    </a:ext>
+                  </a:extLst>
+                </a:gridCol>
               </a:tblGrid>
               <a:tr h="283464">
                 <a:tc>
@@ -10175,14 +12658,56 @@
                         </a:spcBef>
                       </a:pPr>
                       <a:r>
-                        <a:rPr sz="950" b="1">
+                        <a:rPr sz="950" b="1" dirty="0" err="1">
                           <a:solidFill>
                             <a:srgbClr val="FFFFFF"/>
                           </a:solidFill>
                           <a:latin typeface="Arial"/>
                         </a:rPr>
-                        <a:t>Falsos negativos extremos</a:t>
+                        <a:t>Falsos</a:t>
                       </a:r>
+                      <a:r>
+                        <a:rPr sz="950" b="1" dirty="0">
+                          <a:solidFill>
+                            <a:srgbClr val="FFFFFF"/>
+                          </a:solidFill>
+                          <a:latin typeface="Arial"/>
+                        </a:rPr>
+                        <a:t> </a:t>
+                      </a:r>
+                      <a:r>
+                        <a:rPr sz="950" b="1" dirty="0" err="1">
+                          <a:solidFill>
+                            <a:srgbClr val="FFFFFF"/>
+                          </a:solidFill>
+                          <a:latin typeface="Arial"/>
+                        </a:rPr>
+                        <a:t>negativos</a:t>
+                      </a:r>
+                      <a:r>
+                        <a:rPr sz="950" b="1" dirty="0">
+                          <a:solidFill>
+                            <a:srgbClr val="FFFFFF"/>
+                          </a:solidFill>
+                          <a:latin typeface="Arial"/>
+                        </a:rPr>
+                        <a:t> </a:t>
+                      </a:r>
+                      <a:r>
+                        <a:rPr sz="950" b="1" dirty="0" err="1">
+                          <a:solidFill>
+                            <a:srgbClr val="FFFFFF"/>
+                          </a:solidFill>
+                          <a:latin typeface="Arial"/>
+                        </a:rPr>
+                        <a:t>extremos</a:t>
+                      </a:r>
+                      <a:endParaRPr sz="950" b="1" dirty="0">
+                        <a:solidFill>
+                          <a:srgbClr val="FFFFFF"/>
+                        </a:solidFill>
+                        <a:latin typeface="Arial"/>
+                      </a:endParaRPr>
                     </a:p>
                   </a:txBody>
                   <a:tcPr marL="64008" marR="64008">
@@ -10311,6 +12836,11 @@
                     </a:solidFill>
                   </a:tcPr>
                 </a:tc>
+                <a:extLst>
+                  <a:ext uri="{0D108BD9-81ED-4DB2-BD59-A6C34878D82A}">
+                    <a16:rowId xmlns:a16="http://schemas.microsoft.com/office/drawing/2014/main" val="10000"/>
+                  </a:ext>
+                </a:extLst>
               </a:tr>
               <a:tr h="283464">
                 <a:tc>
@@ -10327,13 +12857,58 @@
                         </a:spcBef>
                       </a:pPr>
                       <a:r>
-                        <a:rPr sz="1050" b="0">
+                        <a:rPr sz="1050" b="0" dirty="0" err="1">
                           <a:solidFill>
                             <a:srgbClr val="16202C"/>
                           </a:solidFill>
                           <a:latin typeface="Arial"/>
                         </a:rPr>
-                        <a:t>Liceo Bicent. de Excelencia Técnica</a:t>
+                        <a:t>Liceo</a:t>
+                      </a:r>
+                      <a:r>
+                        <a:rPr sz="1050" b="0" dirty="0">
+                          <a:solidFill>
+                            <a:srgbClr val="16202C"/>
+                          </a:solidFill>
+                          <a:latin typeface="Arial"/>
+                        </a:rPr>
+                        <a:t> </a:t>
+                      </a:r>
+                      <a:r>
+                        <a:rPr sz="1050" b="0" dirty="0" err="1">
+                          <a:solidFill>
+                            <a:srgbClr val="16202C"/>
+                          </a:solidFill>
+                          <a:latin typeface="Arial"/>
+                        </a:rPr>
+                        <a:t>Bicent</a:t>
+                      </a:r>
+                      <a:r>
+                        <a:rPr sz="1050" b="0" dirty="0">
+                          <a:solidFill>
+                            <a:srgbClr val="16202C"/>
+                          </a:solidFill>
+                          <a:latin typeface="Arial"/>
+                        </a:rPr>
+                        <a:t>. de </a:t>
+                      </a:r>
+                      <a:r>
+                        <a:rPr sz="1050" b="0" dirty="0" err="1">
+                          <a:solidFill>
+                            <a:srgbClr val="16202C"/>
+                          </a:solidFill>
+                          <a:latin typeface="Arial"/>
+                        </a:rPr>
+                        <a:t>Excelencia</a:t>
+                      </a:r>
+                      <a:r>
+                        <a:rPr sz="1050" b="0" dirty="0">
+                          <a:solidFill>
+                            <a:srgbClr val="16202C"/>
+                          </a:solidFill>
+                          <a:latin typeface="Arial"/>
+                        </a:rPr>
+                        <a:t> Técnica</a:t>
                       </a:r>
                     </a:p>
                   </a:txBody>
@@ -10447,7 +13022,7 @@
                         </a:spcBef>
                       </a:pPr>
                       <a:r>
-                        <a:rPr sz="1050" b="0">
+                        <a:rPr sz="1050" b="0" dirty="0">
                           <a:solidFill>
                             <a:srgbClr val="16202C"/>
                           </a:solidFill>
@@ -10463,6 +13038,11 @@
                     </a:solidFill>
                   </a:tcPr>
                 </a:tc>
+                <a:extLst>
+                  <a:ext uri="{0D108BD9-81ED-4DB2-BD59-A6C34878D82A}">
+                    <a16:rowId xmlns:a16="http://schemas.microsoft.com/office/drawing/2014/main" val="10001"/>
+                  </a:ext>
+                </a:extLst>
               </a:tr>
               <a:tr h="283464">
                 <a:tc>
@@ -10479,14 +13059,38 @@
                         </a:spcBef>
                       </a:pPr>
                       <a:r>
-                        <a:rPr sz="1050" b="0">
+                        <a:rPr sz="1050" b="0" dirty="0" err="1">
                           <a:solidFill>
                             <a:srgbClr val="16202C"/>
                           </a:solidFill>
                           <a:latin typeface="Arial"/>
                         </a:rPr>
-                        <a:t>Liceo Industrial J. T. de Urmeneta</a:t>
+                        <a:t>Liceo</a:t>
                       </a:r>
+                      <a:r>
+                        <a:rPr sz="1050" b="0" dirty="0">
+                          <a:solidFill>
+                            <a:srgbClr val="16202C"/>
+                          </a:solidFill>
+                          <a:latin typeface="Arial"/>
+                        </a:rPr>
+                        <a:t> Industrial J. T. de </a:t>
+                      </a:r>
+                      <a:r>
+                        <a:rPr sz="1050" b="0" dirty="0" err="1">
+                          <a:solidFill>
+                            <a:srgbClr val="16202C"/>
+                          </a:solidFill>
+                          <a:latin typeface="Arial"/>
+                        </a:rPr>
+                        <a:t>Urmeneta</a:t>
+                      </a:r>
+                      <a:endParaRPr sz="1050" b="0" dirty="0">
+                        <a:solidFill>
+                          <a:srgbClr val="16202C"/>
+                        </a:solidFill>
+                        <a:latin typeface="Arial"/>
+                      </a:endParaRPr>
                     </a:p>
                   </a:txBody>
                   <a:tcPr marL="64008" marR="64008" marT="18288" marB="18288">
@@ -10599,7 +13203,7 @@
                         </a:spcBef>
                       </a:pPr>
                       <a:r>
-                        <a:rPr sz="1050" b="0">
+                        <a:rPr sz="1050" b="0" dirty="0">
                           <a:solidFill>
                             <a:srgbClr val="16202C"/>
                           </a:solidFill>
@@ -10615,6 +13219,11 @@
                     </a:solidFill>
                   </a:tcPr>
                 </a:tc>
+                <a:extLst>
+                  <a:ext uri="{0D108BD9-81ED-4DB2-BD59-A6C34878D82A}">
+                    <a16:rowId xmlns:a16="http://schemas.microsoft.com/office/drawing/2014/main" val="10002"/>
+                  </a:ext>
+                </a:extLst>
               </a:tr>
               <a:tr h="283464">
                 <a:tc>
@@ -10631,14 +13240,29 @@
                         </a:spcBef>
                       </a:pPr>
                       <a:r>
-                        <a:rPr sz="1050" b="0">
+                        <a:rPr sz="1050" b="0" dirty="0">
                           <a:solidFill>
                             <a:srgbClr val="16202C"/>
                           </a:solidFill>
                           <a:latin typeface="Arial"/>
                         </a:rPr>
-                        <a:t>Colegio Robinson Cabrera Beltrán</a:t>
+                        <a:t>Colegio Robinson Cabrera </a:t>
                       </a:r>
+                      <a:r>
+                        <a:rPr sz="1050" b="0" dirty="0" err="1">
+                          <a:solidFill>
+                            <a:srgbClr val="16202C"/>
+                          </a:solidFill>
+                          <a:latin typeface="Arial"/>
+                        </a:rPr>
+                        <a:t>Beltrán</a:t>
+                      </a:r>
+                      <a:endParaRPr sz="1050" b="0" dirty="0">
+                        <a:solidFill>
+                          <a:srgbClr val="16202C"/>
+                        </a:solidFill>
+                        <a:latin typeface="Arial"/>
+                      </a:endParaRPr>
                     </a:p>
                   </a:txBody>
                   <a:tcPr marL="64008" marR="64008" marT="18288" marB="18288">
@@ -10751,7 +13375,7 @@
                         </a:spcBef>
                       </a:pPr>
                       <a:r>
-                        <a:rPr sz="1050" b="0">
+                        <a:rPr sz="1050" b="0" dirty="0">
                           <a:solidFill>
                             <a:srgbClr val="16202C"/>
                           </a:solidFill>
@@ -10767,6 +13391,11 @@
                     </a:solidFill>
                   </a:tcPr>
                 </a:tc>
+                <a:extLst>
+                  <a:ext uri="{0D108BD9-81ED-4DB2-BD59-A6C34878D82A}">
+                    <a16:rowId xmlns:a16="http://schemas.microsoft.com/office/drawing/2014/main" val="10003"/>
+                  </a:ext>
+                </a:extLst>
               </a:tr>
             </a:tbl>
           </a:graphicData>
@@ -10781,7 +13410,7 @@
           <p:nvPr/>
         </p:nvPicPr>
         <p:blipFill>
-          <a:blip r:embed="rId2"/>
+          <a:blip r:embed="rId3"/>
           <a:stretch>
             <a:fillRect/>
           </a:stretch>
@@ -10805,7 +13434,7 @@
           <p:nvPr/>
         </p:nvPicPr>
         <p:blipFill>
-          <a:blip r:embed="rId3"/>
+          <a:blip r:embed="rId4"/>
           <a:stretch>
             <a:fillRect/>
           </a:stretch>
@@ -10829,7 +13458,7 @@
 </file>
 
 <file path=ppt/slides/slide8.xml><?xml version="1.0" encoding="utf-8"?>
-<p:sld xmlns:a="http://schemas.openxmlformats.org/drawingml/2006/main" xmlns:p="http://schemas.openxmlformats.org/presentationml/2006/main" xmlns:r="http://schemas.openxmlformats.org/officeDocument/2006/relationships">
+<p:sld xmlns:a="http://schemas.openxmlformats.org/drawingml/2006/main" xmlns:r="http://schemas.openxmlformats.org/officeDocument/2006/relationships" xmlns:p="http://schemas.openxmlformats.org/presentationml/2006/main">
   <p:cSld>
     <p:spTree>
       <p:nvGrpSpPr>
@@ -10837,7 +13466,14 @@
         <p:cNvGrpSpPr/>
         <p:nvPr/>
       </p:nvGrpSpPr>
-      <p:grpSpPr/>
+      <p:grpSpPr>
+        <a:xfrm>
+          <a:off x="0" y="0"/>
+          <a:ext cx="0" cy="0"/>
+          <a:chOff x="0" y="0"/>
+          <a:chExt cx="0" cy="0"/>
+        </a:xfrm>
+      </p:grpSpPr>
       <p:sp>
         <p:nvSpPr>
           <p:cNvPr id="2" name="TextBox 1"/>
@@ -10855,7 +13491,7 @@
           <a:noFill/>
         </p:spPr>
         <p:txBody>
-          <a:bodyPr wrap="square" anchor="t" lIns="0" rIns="0" tIns="0" bIns="0">
+          <a:bodyPr wrap="square" lIns="0" tIns="0" rIns="0" bIns="0" anchor="t">
             <a:spAutoFit/>
           </a:bodyPr>
           <a:lstStyle/>
@@ -10869,7 +13505,7 @@
               </a:spcBef>
             </a:pPr>
             <a:r>
-              <a:rPr sz="1100" b="1">
+              <a:rPr sz="1100" b="1" dirty="0">
                 <a:solidFill>
                   <a:srgbClr val="2A78D6"/>
                 </a:solidFill>
@@ -10897,7 +13533,7 @@
           <a:noFill/>
         </p:spPr>
         <p:txBody>
-          <a:bodyPr wrap="square" anchor="t" lIns="0" rIns="0" tIns="0" bIns="0">
+          <a:bodyPr wrap="square" lIns="0" tIns="0" rIns="0" bIns="0" anchor="t">
             <a:spAutoFit/>
           </a:bodyPr>
           <a:lstStyle/>
@@ -10911,13 +13547,103 @@
               </a:spcBef>
             </a:pPr>
             <a:r>
-              <a:rPr sz="2700" b="1">
+              <a:rPr sz="2700" b="1" dirty="0">
                 <a:solidFill>
                   <a:srgbClr val="1F3A5F"/>
                 </a:solidFill>
                 <a:latin typeface="Arial"/>
               </a:rPr>
-              <a:t>Para qué sirve: focalizar apoyos por score</a:t>
+              <a:t>Para </a:t>
+            </a:r>
+            <a:r>
+              <a:rPr sz="2700" b="1" dirty="0" err="1">
+                <a:solidFill>
+                  <a:srgbClr val="1F3A5F"/>
+                </a:solidFill>
+                <a:latin typeface="Arial"/>
+              </a:rPr>
+              <a:t>qué</a:t>
+            </a:r>
+            <a:r>
+              <a:rPr sz="2700" b="1" dirty="0">
+                <a:solidFill>
+                  <a:srgbClr val="1F3A5F"/>
+                </a:solidFill>
+                <a:latin typeface="Arial"/>
+              </a:rPr>
+              <a:t> </a:t>
+            </a:r>
+            <a:r>
+              <a:rPr sz="2700" b="1" dirty="0" err="1">
+                <a:solidFill>
+                  <a:srgbClr val="1F3A5F"/>
+                </a:solidFill>
+                <a:latin typeface="Arial"/>
+              </a:rPr>
+              <a:t>sirve</a:t>
+            </a:r>
+            <a:r>
+              <a:rPr sz="2700" b="1" dirty="0">
+                <a:solidFill>
+                  <a:srgbClr val="1F3A5F"/>
+                </a:solidFill>
+                <a:latin typeface="Arial"/>
+              </a:rPr>
+              <a:t>: </a:t>
+            </a:r>
+            <a:r>
+              <a:rPr sz="2700" b="1" dirty="0" err="1">
+                <a:solidFill>
+                  <a:srgbClr val="1F3A5F"/>
+                </a:solidFill>
+                <a:latin typeface="Arial"/>
+              </a:rPr>
+              <a:t>focalizar</a:t>
+            </a:r>
+            <a:r>
+              <a:rPr sz="2700" b="1" dirty="0">
+                <a:solidFill>
+                  <a:srgbClr val="1F3A5F"/>
+                </a:solidFill>
+                <a:latin typeface="Arial"/>
+              </a:rPr>
+              <a:t> </a:t>
+            </a:r>
+            <a:r>
+              <a:rPr sz="2700" b="1" dirty="0" err="1">
+                <a:solidFill>
+                  <a:srgbClr val="1F3A5F"/>
+                </a:solidFill>
+                <a:latin typeface="Arial"/>
+              </a:rPr>
+              <a:t>apoyos</a:t>
+            </a:r>
+            <a:r>
+              <a:rPr sz="2700" b="1" dirty="0">
+                <a:solidFill>
+                  <a:srgbClr val="1F3A5F"/>
+                </a:solidFill>
+                <a:latin typeface="Arial"/>
+              </a:rPr>
+              <a:t> </a:t>
+            </a:r>
+            <a:r>
+              <a:rPr sz="2700" b="1" dirty="0" err="1">
+                <a:solidFill>
+                  <a:srgbClr val="1F3A5F"/>
+                </a:solidFill>
+                <a:latin typeface="Arial"/>
+              </a:rPr>
+              <a:t>por</a:t>
+            </a:r>
+            <a:r>
+              <a:rPr sz="2700" b="1" dirty="0">
+                <a:solidFill>
+                  <a:srgbClr val="1F3A5F"/>
+                </a:solidFill>
+                <a:latin typeface="Arial"/>
+              </a:rPr>
+              <a:t> score</a:t>
             </a:r>
           </a:p>
         </p:txBody>
@@ -10963,6 +13689,7 @@
           <a:lstStyle/>
           <a:p>
             <a:pPr algn="ctr"/>
+            <a:endParaRPr/>
           </a:p>
         </p:txBody>
       </p:sp>
@@ -10975,7 +13702,7 @@
           <p:nvPr/>
         </p:nvPicPr>
         <p:blipFill>
-          <a:blip r:embed="rId2"/>
+          <a:blip r:embed="rId3"/>
           <a:stretch>
             <a:fillRect/>
           </a:stretch>
@@ -11007,7 +13734,7 @@
           <a:noFill/>
         </p:spPr>
         <p:txBody>
-          <a:bodyPr wrap="square" anchor="t" lIns="0" rIns="0" tIns="0" bIns="0">
+          <a:bodyPr wrap="square" lIns="0" tIns="0" rIns="0" bIns="0" anchor="t">
             <a:spAutoFit/>
           </a:bodyPr>
           <a:lstStyle/>
@@ -11021,7 +13748,7 @@
               </a:spcBef>
             </a:pPr>
             <a:r>
-              <a:rPr sz="1350" b="0">
+              <a:rPr sz="1350" b="0" dirty="0">
                 <a:solidFill>
                   <a:srgbClr val="16202C"/>
                 </a:solidFill>
@@ -11030,22 +13757,238 @@
               <a:t>•  </a:t>
             </a:r>
             <a:r>
-              <a:rPr sz="1350" b="1">
-                <a:solidFill>
-                  <a:srgbClr val="16202C"/>
-                </a:solidFill>
-                <a:latin typeface="Arial"/>
-              </a:rPr>
-              <a:t>El uso del modelo no es clasificar, es ordenar.</a:t>
-            </a:r>
-            <a:r>
-              <a:rPr sz="1350" b="0">
-                <a:solidFill>
-                  <a:srgbClr val="16202C"/>
-                </a:solidFill>
-                <a:latin typeface="Arial"/>
-              </a:rPr>
-              <a:t> Ordenando por score ascendente se obtiene una lista de prioridad de intervención.</a:t>
+              <a:rPr sz="1350" b="1" dirty="0">
+                <a:solidFill>
+                  <a:srgbClr val="16202C"/>
+                </a:solidFill>
+                <a:latin typeface="Arial"/>
+              </a:rPr>
+              <a:t>El </a:t>
+            </a:r>
+            <a:r>
+              <a:rPr sz="1350" b="1" dirty="0" err="1">
+                <a:solidFill>
+                  <a:srgbClr val="16202C"/>
+                </a:solidFill>
+                <a:latin typeface="Arial"/>
+              </a:rPr>
+              <a:t>uso</a:t>
+            </a:r>
+            <a:r>
+              <a:rPr sz="1350" b="1" dirty="0">
+                <a:solidFill>
+                  <a:srgbClr val="16202C"/>
+                </a:solidFill>
+                <a:latin typeface="Arial"/>
+              </a:rPr>
+              <a:t> del </a:t>
+            </a:r>
+            <a:r>
+              <a:rPr sz="1350" b="1" dirty="0" err="1">
+                <a:solidFill>
+                  <a:srgbClr val="16202C"/>
+                </a:solidFill>
+                <a:latin typeface="Arial"/>
+              </a:rPr>
+              <a:t>modelo</a:t>
+            </a:r>
+            <a:r>
+              <a:rPr sz="1350" b="1" dirty="0">
+                <a:solidFill>
+                  <a:srgbClr val="16202C"/>
+                </a:solidFill>
+                <a:latin typeface="Arial"/>
+              </a:rPr>
+              <a:t> no es </a:t>
+            </a:r>
+            <a:r>
+              <a:rPr sz="1350" b="1" dirty="0" err="1">
+                <a:solidFill>
+                  <a:srgbClr val="16202C"/>
+                </a:solidFill>
+                <a:latin typeface="Arial"/>
+              </a:rPr>
+              <a:t>clasificar</a:t>
+            </a:r>
+            <a:r>
+              <a:rPr sz="1350" b="1" dirty="0">
+                <a:solidFill>
+                  <a:srgbClr val="16202C"/>
+                </a:solidFill>
+                <a:latin typeface="Arial"/>
+              </a:rPr>
+              <a:t>, es </a:t>
+            </a:r>
+            <a:r>
+              <a:rPr sz="1350" b="1" dirty="0" err="1">
+                <a:solidFill>
+                  <a:srgbClr val="16202C"/>
+                </a:solidFill>
+                <a:latin typeface="Arial"/>
+              </a:rPr>
+              <a:t>ordenar</a:t>
+            </a:r>
+            <a:r>
+              <a:rPr sz="1350" b="1" dirty="0">
+                <a:solidFill>
+                  <a:srgbClr val="16202C"/>
+                </a:solidFill>
+                <a:latin typeface="Arial"/>
+              </a:rPr>
+              <a:t>.</a:t>
+            </a:r>
+            <a:r>
+              <a:rPr sz="1350" b="0" dirty="0">
+                <a:solidFill>
+                  <a:srgbClr val="16202C"/>
+                </a:solidFill>
+                <a:latin typeface="Arial"/>
+              </a:rPr>
+              <a:t> </a:t>
+            </a:r>
+            <a:r>
+              <a:rPr sz="1350" b="0" dirty="0" err="1">
+                <a:solidFill>
+                  <a:srgbClr val="16202C"/>
+                </a:solidFill>
+                <a:latin typeface="Arial"/>
+              </a:rPr>
+              <a:t>Ordenando</a:t>
+            </a:r>
+            <a:r>
+              <a:rPr sz="1350" b="0" dirty="0">
+                <a:solidFill>
+                  <a:srgbClr val="16202C"/>
+                </a:solidFill>
+                <a:latin typeface="Arial"/>
+              </a:rPr>
+              <a:t> </a:t>
+            </a:r>
+            <a:r>
+              <a:rPr sz="1350" b="0" dirty="0" err="1">
+                <a:solidFill>
+                  <a:srgbClr val="16202C"/>
+                </a:solidFill>
+                <a:latin typeface="Arial"/>
+              </a:rPr>
+              <a:t>por</a:t>
+            </a:r>
+            <a:r>
+              <a:rPr sz="1350" b="0" dirty="0">
+                <a:solidFill>
+                  <a:srgbClr val="16202C"/>
+                </a:solidFill>
+                <a:latin typeface="Arial"/>
+              </a:rPr>
+              <a:t> score </a:t>
+            </a:r>
+            <a:r>
+              <a:rPr sz="1350" b="0" dirty="0" err="1">
+                <a:solidFill>
+                  <a:srgbClr val="16202C"/>
+                </a:solidFill>
+                <a:latin typeface="Arial"/>
+              </a:rPr>
+              <a:t>ascendente</a:t>
+            </a:r>
+            <a:r>
+              <a:rPr sz="1350" b="0" dirty="0">
+                <a:solidFill>
+                  <a:srgbClr val="16202C"/>
+                </a:solidFill>
+                <a:latin typeface="Arial"/>
+              </a:rPr>
+              <a:t> se </a:t>
+            </a:r>
+            <a:r>
+              <a:rPr sz="1350" b="0" dirty="0" err="1">
+                <a:solidFill>
+                  <a:srgbClr val="16202C"/>
+                </a:solidFill>
+                <a:latin typeface="Arial"/>
+              </a:rPr>
+              <a:t>obtiene</a:t>
+            </a:r>
+            <a:r>
+              <a:rPr sz="1350" b="0" dirty="0">
+                <a:solidFill>
+                  <a:srgbClr val="16202C"/>
+                </a:solidFill>
+                <a:latin typeface="Arial"/>
+              </a:rPr>
+              <a:t> </a:t>
+            </a:r>
+            <a:r>
+              <a:rPr sz="1350" b="0" dirty="0" err="1">
+                <a:solidFill>
+                  <a:srgbClr val="16202C"/>
+                </a:solidFill>
+                <a:latin typeface="Arial"/>
+              </a:rPr>
+              <a:t>una</a:t>
+            </a:r>
+            <a:r>
+              <a:rPr sz="1350" b="0" dirty="0">
+                <a:solidFill>
+                  <a:srgbClr val="16202C"/>
+                </a:solidFill>
+                <a:latin typeface="Arial"/>
+              </a:rPr>
+              <a:t> </a:t>
+            </a:r>
+            <a:r>
+              <a:rPr sz="1350" b="0" dirty="0" err="1">
+                <a:solidFill>
+                  <a:srgbClr val="16202C"/>
+                </a:solidFill>
+                <a:latin typeface="Arial"/>
+              </a:rPr>
+              <a:t>lista</a:t>
+            </a:r>
+            <a:r>
+              <a:rPr sz="1350" b="0" dirty="0">
+                <a:solidFill>
+                  <a:srgbClr val="16202C"/>
+                </a:solidFill>
+                <a:latin typeface="Arial"/>
+              </a:rPr>
+              <a:t> de </a:t>
+            </a:r>
+            <a:r>
+              <a:rPr sz="1350" b="0" dirty="0" err="1">
+                <a:solidFill>
+                  <a:srgbClr val="16202C"/>
+                </a:solidFill>
+                <a:latin typeface="Arial"/>
+              </a:rPr>
+              <a:t>prioridad</a:t>
+            </a:r>
+            <a:r>
+              <a:rPr sz="1350" b="0" dirty="0">
+                <a:solidFill>
+                  <a:srgbClr val="16202C"/>
+                </a:solidFill>
+                <a:latin typeface="Arial"/>
+              </a:rPr>
+              <a:t> de </a:t>
+            </a:r>
+            <a:r>
+              <a:rPr sz="1350" b="0" dirty="0" err="1">
+                <a:solidFill>
+                  <a:srgbClr val="16202C"/>
+                </a:solidFill>
+                <a:latin typeface="Arial"/>
+              </a:rPr>
+              <a:t>intervención</a:t>
+            </a:r>
+            <a:r>
+              <a:rPr sz="1350" b="0" dirty="0">
+                <a:solidFill>
+                  <a:srgbClr val="16202C"/>
+                </a:solidFill>
+                <a:latin typeface="Arial"/>
+              </a:rPr>
+              <a:t>.</a:t>
             </a:r>
           </a:p>
           <a:p>
@@ -11058,7 +14001,7 @@
               </a:spcBef>
             </a:pPr>
             <a:r>
-              <a:rPr sz="1350" b="0">
+              <a:rPr sz="1350" b="0" dirty="0">
                 <a:solidFill>
                   <a:srgbClr val="16202C"/>
                 </a:solidFill>
@@ -11067,22 +14010,247 @@
               <a:t>•  </a:t>
             </a:r>
             <a:r>
-              <a:rPr sz="1350" b="1">
-                <a:solidFill>
-                  <a:srgbClr val="16202C"/>
-                </a:solidFill>
-                <a:latin typeface="Arial"/>
-              </a:rPr>
-              <a:t>Los 50 de menor score son todos realmente Insuficientes</a:t>
-            </a:r>
-            <a:r>
-              <a:rPr sz="1350" b="0">
-                <a:solidFill>
-                  <a:srgbClr val="16202C"/>
-                </a:solidFill>
-                <a:latin typeface="Arial"/>
-              </a:rPr>
-              <a:t> (100 %), contra una tasa base de 75,1 % si se eligieran al azar. En los primeros 100 la precisión es 97 %; en los 150, 95 %.</a:t>
+              <a:rPr sz="1350" b="1" dirty="0">
+                <a:solidFill>
+                  <a:srgbClr val="16202C"/>
+                </a:solidFill>
+                <a:latin typeface="Arial"/>
+              </a:rPr>
+              <a:t>Los 50 de </a:t>
+            </a:r>
+            <a:r>
+              <a:rPr sz="1350" b="1" dirty="0" err="1">
+                <a:solidFill>
+                  <a:srgbClr val="16202C"/>
+                </a:solidFill>
+                <a:latin typeface="Arial"/>
+              </a:rPr>
+              <a:t>menor</a:t>
+            </a:r>
+            <a:r>
+              <a:rPr sz="1350" b="1" dirty="0">
+                <a:solidFill>
+                  <a:srgbClr val="16202C"/>
+                </a:solidFill>
+                <a:latin typeface="Arial"/>
+              </a:rPr>
+              <a:t> score son </a:t>
+            </a:r>
+            <a:r>
+              <a:rPr sz="1350" b="1" dirty="0" err="1">
+                <a:solidFill>
+                  <a:srgbClr val="16202C"/>
+                </a:solidFill>
+                <a:latin typeface="Arial"/>
+              </a:rPr>
+              <a:t>todos</a:t>
+            </a:r>
+            <a:r>
+              <a:rPr sz="1350" b="1" dirty="0">
+                <a:solidFill>
+                  <a:srgbClr val="16202C"/>
+                </a:solidFill>
+                <a:latin typeface="Arial"/>
+              </a:rPr>
+              <a:t> </a:t>
+            </a:r>
+            <a:r>
+              <a:rPr sz="1350" b="1" dirty="0" err="1">
+                <a:solidFill>
+                  <a:srgbClr val="16202C"/>
+                </a:solidFill>
+                <a:latin typeface="Arial"/>
+              </a:rPr>
+              <a:t>realmente</a:t>
+            </a:r>
+            <a:r>
+              <a:rPr sz="1350" b="1" dirty="0">
+                <a:solidFill>
+                  <a:srgbClr val="16202C"/>
+                </a:solidFill>
+                <a:latin typeface="Arial"/>
+              </a:rPr>
+              <a:t> </a:t>
+            </a:r>
+            <a:r>
+              <a:rPr sz="1350" b="1" dirty="0" err="1">
+                <a:solidFill>
+                  <a:srgbClr val="16202C"/>
+                </a:solidFill>
+                <a:latin typeface="Arial"/>
+              </a:rPr>
+              <a:t>Insuficientes</a:t>
+            </a:r>
+            <a:r>
+              <a:rPr sz="1350" b="0" dirty="0">
+                <a:solidFill>
+                  <a:srgbClr val="16202C"/>
+                </a:solidFill>
+                <a:latin typeface="Arial"/>
+              </a:rPr>
+              <a:t> (100 %), contra </a:t>
+            </a:r>
+            <a:r>
+              <a:rPr sz="1350" b="0" dirty="0" err="1">
+                <a:solidFill>
+                  <a:srgbClr val="16202C"/>
+                </a:solidFill>
+                <a:latin typeface="Arial"/>
+              </a:rPr>
+              <a:t>una</a:t>
+            </a:r>
+            <a:r>
+              <a:rPr sz="1350" b="0" dirty="0">
+                <a:solidFill>
+                  <a:srgbClr val="16202C"/>
+                </a:solidFill>
+                <a:latin typeface="Arial"/>
+              </a:rPr>
+              <a:t> </a:t>
+            </a:r>
+            <a:r>
+              <a:rPr sz="1350" b="0" dirty="0" err="1">
+                <a:solidFill>
+                  <a:srgbClr val="16202C"/>
+                </a:solidFill>
+                <a:latin typeface="Arial"/>
+              </a:rPr>
+              <a:t>tasa</a:t>
+            </a:r>
+            <a:r>
+              <a:rPr sz="1350" b="0" dirty="0">
+                <a:solidFill>
+                  <a:srgbClr val="16202C"/>
+                </a:solidFill>
+                <a:latin typeface="Arial"/>
+              </a:rPr>
+              <a:t> base de 75,1 % </a:t>
+            </a:r>
+            <a:r>
+              <a:rPr sz="1350" b="0" dirty="0" err="1">
+                <a:solidFill>
+                  <a:srgbClr val="16202C"/>
+                </a:solidFill>
+                <a:latin typeface="Arial"/>
+              </a:rPr>
+              <a:t>si</a:t>
+            </a:r>
+            <a:r>
+              <a:rPr sz="1350" b="0" dirty="0">
+                <a:solidFill>
+                  <a:srgbClr val="16202C"/>
+                </a:solidFill>
+                <a:latin typeface="Arial"/>
+              </a:rPr>
+              <a:t> se </a:t>
+            </a:r>
+            <a:r>
+              <a:rPr sz="1350" b="0" dirty="0" err="1">
+                <a:solidFill>
+                  <a:srgbClr val="16202C"/>
+                </a:solidFill>
+                <a:latin typeface="Arial"/>
+              </a:rPr>
+              <a:t>eligieran</a:t>
+            </a:r>
+            <a:r>
+              <a:rPr sz="1350" b="0" dirty="0">
+                <a:solidFill>
+                  <a:srgbClr val="16202C"/>
+                </a:solidFill>
+                <a:latin typeface="Arial"/>
+              </a:rPr>
+              <a:t> al azar. En </a:t>
+            </a:r>
+            <a:r>
+              <a:rPr sz="1350" b="0" dirty="0" err="1">
+                <a:solidFill>
+                  <a:srgbClr val="16202C"/>
+                </a:solidFill>
+                <a:latin typeface="Arial"/>
+              </a:rPr>
+              <a:t>los</a:t>
+            </a:r>
+            <a:r>
+              <a:rPr sz="1350" b="0" dirty="0">
+                <a:solidFill>
+                  <a:srgbClr val="16202C"/>
+                </a:solidFill>
+                <a:latin typeface="Arial"/>
+              </a:rPr>
+              <a:t> </a:t>
+            </a:r>
+            <a:r>
+              <a:rPr sz="1350" b="0" dirty="0" err="1">
+                <a:solidFill>
+                  <a:srgbClr val="16202C"/>
+                </a:solidFill>
+                <a:latin typeface="Arial"/>
+              </a:rPr>
+              <a:t>primeros</a:t>
+            </a:r>
+            <a:r>
+              <a:rPr sz="1350" b="0" dirty="0">
+                <a:solidFill>
+                  <a:srgbClr val="16202C"/>
+                </a:solidFill>
+                <a:latin typeface="Arial"/>
+              </a:rPr>
+              <a:t> 100 la </a:t>
+            </a:r>
+            <a:r>
+              <a:rPr sz="1350" b="0" dirty="0" err="1">
+                <a:solidFill>
+                  <a:srgbClr val="16202C"/>
+                </a:solidFill>
+                <a:latin typeface="Arial"/>
+              </a:rPr>
+              <a:t>precisión</a:t>
+            </a:r>
+            <a:r>
+              <a:rPr sz="1350" b="0" dirty="0">
+                <a:solidFill>
+                  <a:srgbClr val="16202C"/>
+                </a:solidFill>
+                <a:latin typeface="Arial"/>
+              </a:rPr>
+              <a:t> es 97 %; </a:t>
+            </a:r>
+            <a:r>
+              <a:rPr sz="1350" b="0" dirty="0" err="1">
+                <a:solidFill>
+                  <a:srgbClr val="16202C"/>
+                </a:solidFill>
+                <a:latin typeface="Arial"/>
+              </a:rPr>
+              <a:t>en</a:t>
+            </a:r>
+            <a:r>
+              <a:rPr sz="1350" b="0" dirty="0">
+                <a:solidFill>
+                  <a:srgbClr val="16202C"/>
+                </a:solidFill>
+                <a:latin typeface="Arial"/>
+              </a:rPr>
+              <a:t> </a:t>
+            </a:r>
+            <a:r>
+              <a:rPr sz="1350" b="0" dirty="0" err="1">
+                <a:solidFill>
+                  <a:srgbClr val="16202C"/>
+                </a:solidFill>
+                <a:latin typeface="Arial"/>
+              </a:rPr>
+              <a:t>los</a:t>
+            </a:r>
+            <a:r>
+              <a:rPr sz="1350" b="0" dirty="0">
+                <a:solidFill>
+                  <a:srgbClr val="16202C"/>
+                </a:solidFill>
+                <a:latin typeface="Arial"/>
+              </a:rPr>
+              <a:t> 150, 95 %.</a:t>
             </a:r>
           </a:p>
           <a:p>
@@ -11095,7 +14263,7 @@
               </a:spcBef>
             </a:pPr>
             <a:r>
-              <a:rPr sz="1350" b="0">
+              <a:rPr sz="1350" b="0" dirty="0">
                 <a:solidFill>
                   <a:srgbClr val="16202C"/>
                 </a:solidFill>
@@ -11104,22 +14272,247 @@
               <a:t>•  </a:t>
             </a:r>
             <a:r>
-              <a:rPr sz="1350" b="1">
-                <a:solidFill>
-                  <a:srgbClr val="16202C"/>
-                </a:solidFill>
-                <a:latin typeface="Arial"/>
-              </a:rPr>
-              <a:t>Traducción a gestión:</a:t>
-            </a:r>
-            <a:r>
-              <a:rPr sz="1350" b="0">
-                <a:solidFill>
-                  <a:srgbClr val="16202C"/>
-                </a:solidFill>
-                <a:latin typeface="Arial"/>
-              </a:rPr>
-              <a:t> con presupuesto para 100 escuelas, focalizar por score evita destinar recursos a unos 22 establecimientos que no los necesitaban.</a:t>
+              <a:rPr sz="1350" b="1" dirty="0" err="1">
+                <a:solidFill>
+                  <a:srgbClr val="16202C"/>
+                </a:solidFill>
+                <a:latin typeface="Arial"/>
+              </a:rPr>
+              <a:t>Traducción</a:t>
+            </a:r>
+            <a:r>
+              <a:rPr sz="1350" b="1" dirty="0">
+                <a:solidFill>
+                  <a:srgbClr val="16202C"/>
+                </a:solidFill>
+                <a:latin typeface="Arial"/>
+              </a:rPr>
+              <a:t> a </a:t>
+            </a:r>
+            <a:r>
+              <a:rPr sz="1350" b="1" dirty="0" err="1">
+                <a:solidFill>
+                  <a:srgbClr val="16202C"/>
+                </a:solidFill>
+                <a:latin typeface="Arial"/>
+              </a:rPr>
+              <a:t>gestión</a:t>
+            </a:r>
+            <a:r>
+              <a:rPr sz="1350" b="1" dirty="0">
+                <a:solidFill>
+                  <a:srgbClr val="16202C"/>
+                </a:solidFill>
+                <a:latin typeface="Arial"/>
+              </a:rPr>
+              <a:t>:</a:t>
+            </a:r>
+            <a:r>
+              <a:rPr sz="1350" b="0" dirty="0">
+                <a:solidFill>
+                  <a:srgbClr val="16202C"/>
+                </a:solidFill>
+                <a:latin typeface="Arial"/>
+              </a:rPr>
+              <a:t> con </a:t>
+            </a:r>
+            <a:r>
+              <a:rPr sz="1350" b="0" dirty="0" err="1">
+                <a:solidFill>
+                  <a:srgbClr val="16202C"/>
+                </a:solidFill>
+                <a:latin typeface="Arial"/>
+              </a:rPr>
+              <a:t>presupuesto</a:t>
+            </a:r>
+            <a:r>
+              <a:rPr sz="1350" b="0" dirty="0">
+                <a:solidFill>
+                  <a:srgbClr val="16202C"/>
+                </a:solidFill>
+                <a:latin typeface="Arial"/>
+              </a:rPr>
+              <a:t> para 100 </a:t>
+            </a:r>
+            <a:r>
+              <a:rPr sz="1350" b="0" dirty="0" err="1">
+                <a:solidFill>
+                  <a:srgbClr val="16202C"/>
+                </a:solidFill>
+                <a:latin typeface="Arial"/>
+              </a:rPr>
+              <a:t>escuelas</a:t>
+            </a:r>
+            <a:r>
+              <a:rPr sz="1350" b="0" dirty="0">
+                <a:solidFill>
+                  <a:srgbClr val="16202C"/>
+                </a:solidFill>
+                <a:latin typeface="Arial"/>
+              </a:rPr>
+              <a:t>, </a:t>
+            </a:r>
+            <a:r>
+              <a:rPr sz="1350" b="0" dirty="0" err="1">
+                <a:solidFill>
+                  <a:srgbClr val="16202C"/>
+                </a:solidFill>
+                <a:latin typeface="Arial"/>
+              </a:rPr>
+              <a:t>focalizar</a:t>
+            </a:r>
+            <a:r>
+              <a:rPr sz="1350" b="0" dirty="0">
+                <a:solidFill>
+                  <a:srgbClr val="16202C"/>
+                </a:solidFill>
+                <a:latin typeface="Arial"/>
+              </a:rPr>
+              <a:t> </a:t>
+            </a:r>
+            <a:r>
+              <a:rPr sz="1350" b="0" dirty="0" err="1">
+                <a:solidFill>
+                  <a:srgbClr val="16202C"/>
+                </a:solidFill>
+                <a:latin typeface="Arial"/>
+              </a:rPr>
+              <a:t>por</a:t>
+            </a:r>
+            <a:r>
+              <a:rPr sz="1350" b="0" dirty="0">
+                <a:solidFill>
+                  <a:srgbClr val="16202C"/>
+                </a:solidFill>
+                <a:latin typeface="Arial"/>
+              </a:rPr>
+              <a:t> score </a:t>
+            </a:r>
+            <a:r>
+              <a:rPr sz="1350" b="0" dirty="0" err="1">
+                <a:solidFill>
+                  <a:srgbClr val="16202C"/>
+                </a:solidFill>
+                <a:latin typeface="Arial"/>
+              </a:rPr>
+              <a:t>evita</a:t>
+            </a:r>
+            <a:r>
+              <a:rPr sz="1350" b="0" dirty="0">
+                <a:solidFill>
+                  <a:srgbClr val="16202C"/>
+                </a:solidFill>
+                <a:latin typeface="Arial"/>
+              </a:rPr>
+              <a:t> </a:t>
+            </a:r>
+            <a:r>
+              <a:rPr sz="1350" b="0" dirty="0" err="1">
+                <a:solidFill>
+                  <a:srgbClr val="16202C"/>
+                </a:solidFill>
+                <a:latin typeface="Arial"/>
+              </a:rPr>
+              <a:t>destinar</a:t>
+            </a:r>
+            <a:r>
+              <a:rPr sz="1350" b="0" dirty="0">
+                <a:solidFill>
+                  <a:srgbClr val="16202C"/>
+                </a:solidFill>
+                <a:latin typeface="Arial"/>
+              </a:rPr>
+              <a:t> </a:t>
+            </a:r>
+            <a:r>
+              <a:rPr sz="1350" b="0" dirty="0" err="1">
+                <a:solidFill>
+                  <a:srgbClr val="16202C"/>
+                </a:solidFill>
+                <a:latin typeface="Arial"/>
+              </a:rPr>
+              <a:t>recursos</a:t>
+            </a:r>
+            <a:r>
+              <a:rPr sz="1350" b="0" dirty="0">
+                <a:solidFill>
+                  <a:srgbClr val="16202C"/>
+                </a:solidFill>
+                <a:latin typeface="Arial"/>
+              </a:rPr>
+              <a:t> a </a:t>
+            </a:r>
+            <a:r>
+              <a:rPr sz="1350" b="0" dirty="0" err="1">
+                <a:solidFill>
+                  <a:srgbClr val="16202C"/>
+                </a:solidFill>
+                <a:latin typeface="Arial"/>
+              </a:rPr>
+              <a:t>unos</a:t>
+            </a:r>
+            <a:r>
+              <a:rPr sz="1350" b="0" dirty="0">
+                <a:solidFill>
+                  <a:srgbClr val="16202C"/>
+                </a:solidFill>
+                <a:latin typeface="Arial"/>
+              </a:rPr>
+              <a:t> 22 </a:t>
+            </a:r>
+            <a:r>
+              <a:rPr sz="1350" b="0" dirty="0" err="1">
+                <a:solidFill>
+                  <a:srgbClr val="16202C"/>
+                </a:solidFill>
+                <a:latin typeface="Arial"/>
+              </a:rPr>
+              <a:t>establecimientos</a:t>
+            </a:r>
+            <a:r>
+              <a:rPr sz="1350" b="0" dirty="0">
+                <a:solidFill>
+                  <a:srgbClr val="16202C"/>
+                </a:solidFill>
+                <a:latin typeface="Arial"/>
+              </a:rPr>
+              <a:t> que no </a:t>
+            </a:r>
+            <a:r>
+              <a:rPr sz="1350" b="0" dirty="0" err="1">
+                <a:solidFill>
+                  <a:srgbClr val="16202C"/>
+                </a:solidFill>
+                <a:latin typeface="Arial"/>
+              </a:rPr>
+              <a:t>los</a:t>
+            </a:r>
+            <a:r>
+              <a:rPr sz="1350" b="0" dirty="0">
+                <a:solidFill>
+                  <a:srgbClr val="16202C"/>
+                </a:solidFill>
+                <a:latin typeface="Arial"/>
+              </a:rPr>
+              <a:t> </a:t>
+            </a:r>
+            <a:r>
+              <a:rPr sz="1350" b="0" dirty="0" err="1">
+                <a:solidFill>
+                  <a:srgbClr val="16202C"/>
+                </a:solidFill>
+                <a:latin typeface="Arial"/>
+              </a:rPr>
+              <a:t>necesitaban</a:t>
+            </a:r>
+            <a:r>
+              <a:rPr sz="1350" b="0" dirty="0">
+                <a:solidFill>
+                  <a:srgbClr val="16202C"/>
+                </a:solidFill>
+                <a:latin typeface="Arial"/>
+              </a:rPr>
+              <a:t>.</a:t>
             </a:r>
           </a:p>
           <a:p>
@@ -11132,7 +14525,7 @@
               </a:spcBef>
             </a:pPr>
             <a:r>
-              <a:rPr sz="1350" b="0">
+              <a:rPr sz="1350" b="0" dirty="0">
                 <a:solidFill>
                   <a:srgbClr val="16202C"/>
                 </a:solidFill>
@@ -11141,22 +14534,265 @@
               <a:t>•  </a:t>
             </a:r>
             <a:r>
-              <a:rPr sz="1350" b="1">
-                <a:solidFill>
-                  <a:srgbClr val="16202C"/>
-                </a:solidFill>
-                <a:latin typeface="Arial"/>
-              </a:rPr>
-              <a:t>Las dos palancas accionables son clima escolar y asistencia</a:t>
-            </a:r>
-            <a:r>
-              <a:rPr sz="1350" b="0">
-                <a:solidFill>
-                  <a:srgbClr val="16202C"/>
-                </a:solidFill>
-                <a:latin typeface="Arial"/>
-              </a:rPr>
-              <a:t>, las únicas que la gestión escolar puede mover en el corto plazo. El IVE y la dependencia son contexto, no palanca.</a:t>
+              <a:rPr sz="1350" b="1" dirty="0">
+                <a:solidFill>
+                  <a:srgbClr val="16202C"/>
+                </a:solidFill>
+                <a:latin typeface="Arial"/>
+              </a:rPr>
+              <a:t>Las dos </a:t>
+            </a:r>
+            <a:r>
+              <a:rPr sz="1350" b="1" dirty="0" err="1">
+                <a:solidFill>
+                  <a:srgbClr val="16202C"/>
+                </a:solidFill>
+                <a:latin typeface="Arial"/>
+              </a:rPr>
+              <a:t>palancas</a:t>
+            </a:r>
+            <a:r>
+              <a:rPr sz="1350" b="1" dirty="0">
+                <a:solidFill>
+                  <a:srgbClr val="16202C"/>
+                </a:solidFill>
+                <a:latin typeface="Arial"/>
+              </a:rPr>
+              <a:t> </a:t>
+            </a:r>
+            <a:r>
+              <a:rPr sz="1350" b="1" dirty="0" err="1">
+                <a:solidFill>
+                  <a:srgbClr val="16202C"/>
+                </a:solidFill>
+                <a:latin typeface="Arial"/>
+              </a:rPr>
+              <a:t>accionables</a:t>
+            </a:r>
+            <a:r>
+              <a:rPr sz="1350" b="1" dirty="0">
+                <a:solidFill>
+                  <a:srgbClr val="16202C"/>
+                </a:solidFill>
+                <a:latin typeface="Arial"/>
+              </a:rPr>
+              <a:t> son </a:t>
+            </a:r>
+            <a:r>
+              <a:rPr sz="1350" b="1" dirty="0" err="1">
+                <a:solidFill>
+                  <a:srgbClr val="16202C"/>
+                </a:solidFill>
+                <a:latin typeface="Arial"/>
+              </a:rPr>
+              <a:t>clima</a:t>
+            </a:r>
+            <a:r>
+              <a:rPr sz="1350" b="1" dirty="0">
+                <a:solidFill>
+                  <a:srgbClr val="16202C"/>
+                </a:solidFill>
+                <a:latin typeface="Arial"/>
+              </a:rPr>
+              <a:t> escolar y </a:t>
+            </a:r>
+            <a:r>
+              <a:rPr sz="1350" b="1" dirty="0" err="1">
+                <a:solidFill>
+                  <a:srgbClr val="16202C"/>
+                </a:solidFill>
+                <a:latin typeface="Arial"/>
+              </a:rPr>
+              <a:t>asistencia</a:t>
+            </a:r>
+            <a:r>
+              <a:rPr sz="1350" b="0" dirty="0">
+                <a:solidFill>
+                  <a:srgbClr val="16202C"/>
+                </a:solidFill>
+                <a:latin typeface="Arial"/>
+              </a:rPr>
+              <a:t>, las </a:t>
+            </a:r>
+            <a:r>
+              <a:rPr sz="1350" b="0" dirty="0" err="1">
+                <a:solidFill>
+                  <a:srgbClr val="16202C"/>
+                </a:solidFill>
+                <a:latin typeface="Arial"/>
+              </a:rPr>
+              <a:t>únicas</a:t>
+            </a:r>
+            <a:r>
+              <a:rPr sz="1350" b="0" dirty="0">
+                <a:solidFill>
+                  <a:srgbClr val="16202C"/>
+                </a:solidFill>
+                <a:latin typeface="Arial"/>
+              </a:rPr>
+              <a:t> que la </a:t>
+            </a:r>
+            <a:r>
+              <a:rPr sz="1350" b="0" dirty="0" err="1">
+                <a:solidFill>
+                  <a:srgbClr val="16202C"/>
+                </a:solidFill>
+                <a:latin typeface="Arial"/>
+              </a:rPr>
+              <a:t>gestión</a:t>
+            </a:r>
+            <a:r>
+              <a:rPr sz="1350" b="0" dirty="0">
+                <a:solidFill>
+                  <a:srgbClr val="16202C"/>
+                </a:solidFill>
+                <a:latin typeface="Arial"/>
+              </a:rPr>
+              <a:t> escolar </a:t>
+            </a:r>
+            <a:r>
+              <a:rPr sz="1350" b="0" dirty="0" err="1">
+                <a:solidFill>
+                  <a:srgbClr val="16202C"/>
+                </a:solidFill>
+                <a:latin typeface="Arial"/>
+              </a:rPr>
+              <a:t>puede</a:t>
+            </a:r>
+            <a:r>
+              <a:rPr sz="1350" b="0" dirty="0">
+                <a:solidFill>
+                  <a:srgbClr val="16202C"/>
+                </a:solidFill>
+                <a:latin typeface="Arial"/>
+              </a:rPr>
+              <a:t> mover </a:t>
+            </a:r>
+            <a:r>
+              <a:rPr sz="1350" b="0" dirty="0" err="1">
+                <a:solidFill>
+                  <a:srgbClr val="16202C"/>
+                </a:solidFill>
+                <a:latin typeface="Arial"/>
+              </a:rPr>
+              <a:t>en</a:t>
+            </a:r>
+            <a:r>
+              <a:rPr sz="1350" b="0" dirty="0">
+                <a:solidFill>
+                  <a:srgbClr val="16202C"/>
+                </a:solidFill>
+                <a:latin typeface="Arial"/>
+              </a:rPr>
+              <a:t> </a:t>
+            </a:r>
+            <a:r>
+              <a:rPr sz="1350" b="0" dirty="0" err="1">
+                <a:solidFill>
+                  <a:srgbClr val="16202C"/>
+                </a:solidFill>
+                <a:latin typeface="Arial"/>
+              </a:rPr>
+              <a:t>el</a:t>
+            </a:r>
+            <a:r>
+              <a:rPr sz="1350" b="0" dirty="0">
+                <a:solidFill>
+                  <a:srgbClr val="16202C"/>
+                </a:solidFill>
+                <a:latin typeface="Arial"/>
+              </a:rPr>
+              <a:t> </a:t>
+            </a:r>
+            <a:r>
+              <a:rPr sz="1350" b="0" dirty="0" err="1">
+                <a:solidFill>
+                  <a:srgbClr val="16202C"/>
+                </a:solidFill>
+                <a:latin typeface="Arial"/>
+              </a:rPr>
+              <a:t>corto</a:t>
+            </a:r>
+            <a:r>
+              <a:rPr sz="1350" b="0" dirty="0">
+                <a:solidFill>
+                  <a:srgbClr val="16202C"/>
+                </a:solidFill>
+                <a:latin typeface="Arial"/>
+              </a:rPr>
+              <a:t> </a:t>
+            </a:r>
+            <a:r>
+              <a:rPr sz="1350" b="0" dirty="0" err="1">
+                <a:solidFill>
+                  <a:srgbClr val="16202C"/>
+                </a:solidFill>
+                <a:latin typeface="Arial"/>
+              </a:rPr>
+              <a:t>plazo</a:t>
+            </a:r>
+            <a:r>
+              <a:rPr sz="1350" b="0" dirty="0">
+                <a:solidFill>
+                  <a:srgbClr val="16202C"/>
+                </a:solidFill>
+                <a:latin typeface="Arial"/>
+              </a:rPr>
+              <a:t>. El IVE y la </a:t>
+            </a:r>
+            <a:r>
+              <a:rPr sz="1350" b="0" dirty="0" err="1">
+                <a:solidFill>
+                  <a:srgbClr val="16202C"/>
+                </a:solidFill>
+                <a:latin typeface="Arial"/>
+              </a:rPr>
+              <a:t>dependencia</a:t>
+            </a:r>
+            <a:r>
+              <a:rPr sz="1350" b="0" dirty="0">
+                <a:solidFill>
+                  <a:srgbClr val="16202C"/>
+                </a:solidFill>
+                <a:latin typeface="Arial"/>
+              </a:rPr>
+              <a:t> son </a:t>
+            </a:r>
+            <a:r>
+              <a:rPr sz="1350" b="0" dirty="0" err="1">
+                <a:solidFill>
+                  <a:srgbClr val="16202C"/>
+                </a:solidFill>
+                <a:latin typeface="Arial"/>
+              </a:rPr>
+              <a:t>contexto</a:t>
+            </a:r>
+            <a:r>
+              <a:rPr sz="1350" b="0" dirty="0">
+                <a:solidFill>
+                  <a:srgbClr val="16202C"/>
+                </a:solidFill>
+                <a:latin typeface="Arial"/>
+              </a:rPr>
+              <a:t>, no </a:t>
+            </a:r>
+            <a:r>
+              <a:rPr sz="1350" b="0" dirty="0" err="1">
+                <a:solidFill>
+                  <a:srgbClr val="16202C"/>
+                </a:solidFill>
+                <a:latin typeface="Arial"/>
+              </a:rPr>
+              <a:t>palanca</a:t>
+            </a:r>
+            <a:r>
+              <a:rPr sz="1350" b="0" dirty="0">
+                <a:solidFill>
+                  <a:srgbClr val="16202C"/>
+                </a:solidFill>
+                <a:latin typeface="Arial"/>
+              </a:rPr>
+              <a:t>.</a:t>
             </a:r>
           </a:p>
         </p:txBody>
@@ -11500,44 +15136,44 @@
         <a:sysClr val="window" lastClr="FFFFFF"/>
       </a:lt1>
       <a:dk2>
-        <a:srgbClr val="1F497D"/>
+        <a:srgbClr val="0E2841"/>
       </a:dk2>
       <a:lt2>
-        <a:srgbClr val="EEECE1"/>
+        <a:srgbClr val="E8E8E8"/>
       </a:lt2>
       <a:accent1>
-        <a:srgbClr val="4F81BD"/>
+        <a:srgbClr val="156082"/>
       </a:accent1>
       <a:accent2>
-        <a:srgbClr val="C0504D"/>
+        <a:srgbClr val="E97132"/>
       </a:accent2>
       <a:accent3>
-        <a:srgbClr val="9BBB59"/>
+        <a:srgbClr val="196B24"/>
       </a:accent3>
       <a:accent4>
-        <a:srgbClr val="8064A2"/>
+        <a:srgbClr val="0F9ED5"/>
       </a:accent4>
       <a:accent5>
-        <a:srgbClr val="4BACC6"/>
+        <a:srgbClr val="A02B93"/>
       </a:accent5>
       <a:accent6>
-        <a:srgbClr val="F79646"/>
+        <a:srgbClr val="4EA72E"/>
       </a:accent6>
       <a:hlink>
-        <a:srgbClr val="0000FF"/>
+        <a:srgbClr val="467886"/>
       </a:hlink>
       <a:folHlink>
-        <a:srgbClr val="800080"/>
+        <a:srgbClr val="96607D"/>
       </a:folHlink>
     </a:clrScheme>
     <a:fontScheme name="Office">
       <a:majorFont>
-        <a:latin typeface="Calibri"/>
+        <a:latin typeface="Aptos Display" panose="02110004020202020204"/>
         <a:ea typeface=""/>
         <a:cs typeface=""/>
-        <a:font script="Jpan" typeface="ＭＳ Ｐゴシック"/>
+        <a:font script="Jpan" typeface="游ゴシック Light"/>
         <a:font script="Hang" typeface="맑은 고딕"/>
-        <a:font script="Hans" typeface="宋体"/>
+        <a:font script="Hans" typeface="等线 Light"/>
         <a:font script="Hant" typeface="新細明體"/>
         <a:font script="Arab" typeface="Times New Roman"/>
         <a:font script="Hebr" typeface="Times New Roman"/>
@@ -11565,14 +15201,31 @@
         <a:font script="Viet" typeface="Times New Roman"/>
         <a:font script="Uigh" typeface="Microsoft Uighur"/>
         <a:font script="Geor" typeface="Sylfaen"/>
+        <a:font script="Armn" typeface="Arial"/>
+        <a:font script="Bugi" typeface="Leelawadee UI"/>
+        <a:font script="Bopo" typeface="Microsoft JhengHei"/>
+        <a:font script="Java" typeface="Javanese Text"/>
+        <a:font script="Lisu" typeface="Segoe UI"/>
+        <a:font script="Mymr" typeface="Myanmar Text"/>
+        <a:font script="Nkoo" typeface="Ebrima"/>
+        <a:font script="Olck" typeface="Nirmala UI"/>
+        <a:font script="Osma" typeface="Ebrima"/>
+        <a:font script="Phag" typeface="Phagspa"/>
+        <a:font script="Syrn" typeface="Estrangelo Edessa"/>
+        <a:font script="Syrj" typeface="Estrangelo Edessa"/>
+        <a:font script="Syre" typeface="Estrangelo Edessa"/>
+        <a:font script="Sora" typeface="Nirmala UI"/>
+        <a:font script="Tale" typeface="Microsoft Tai Le"/>
+        <a:font script="Talu" typeface="Microsoft New Tai Lue"/>
+        <a:font script="Tfng" typeface="Ebrima"/>
       </a:majorFont>
       <a:minorFont>
-        <a:latin typeface="Calibri"/>
+        <a:latin typeface="Aptos" panose="02110004020202020204"/>
         <a:ea typeface=""/>
         <a:cs typeface=""/>
-        <a:font script="Jpan" typeface="ＭＳ Ｐゴシック"/>
+        <a:font script="Jpan" typeface="游ゴシック"/>
         <a:font script="Hang" typeface="맑은 고딕"/>
-        <a:font script="Hans" typeface="宋体"/>
+        <a:font script="Hans" typeface="等线"/>
         <a:font script="Hant" typeface="新細明體"/>
         <a:font script="Arab" typeface="Arial"/>
         <a:font script="Hebr" typeface="Arial"/>
@@ -11600,6 +15253,23 @@
         <a:font script="Viet" typeface="Arial"/>
         <a:font script="Uigh" typeface="Microsoft Uighur"/>
         <a:font script="Geor" typeface="Sylfaen"/>
+        <a:font script="Armn" typeface="Arial"/>
+        <a:font script="Bugi" typeface="Leelawadee UI"/>
+        <a:font script="Bopo" typeface="Microsoft JhengHei"/>
+        <a:font script="Java" typeface="Javanese Text"/>
+        <a:font script="Lisu" typeface="Segoe UI"/>
+        <a:font script="Mymr" typeface="Myanmar Text"/>
+        <a:font script="Nkoo" typeface="Ebrima"/>
+        <a:font script="Olck" typeface="Nirmala UI"/>
+        <a:font script="Osma" typeface="Ebrima"/>
+        <a:font script="Phag" typeface="Phagspa"/>
+        <a:font script="Syrn" typeface="Estrangelo Edessa"/>
+        <a:font script="Syrj" typeface="Estrangelo Edessa"/>
+        <a:font script="Syre" typeface="Estrangelo Edessa"/>
+        <a:font script="Sora" typeface="Nirmala UI"/>
+        <a:font script="Tale" typeface="Microsoft Tai Le"/>
+        <a:font script="Talu" typeface="Microsoft New Tai Lue"/>
+        <a:font script="Tfng" typeface="Ebrima"/>
       </a:minorFont>
     </a:fontScheme>
     <a:fmtScheme name="Office">
@@ -11611,180 +15281,136 @@
           <a:gsLst>
             <a:gs pos="0">
               <a:schemeClr val="phClr">
-                <a:tint val="50000"/>
-                <a:satMod val="300000"/>
+                <a:lumMod val="110000"/>
+                <a:satMod val="105000"/>
+                <a:tint val="67000"/>
               </a:schemeClr>
             </a:gs>
-            <a:gs pos="35000">
+            <a:gs pos="50000">
               <a:schemeClr val="phClr">
-                <a:tint val="37000"/>
-                <a:satMod val="300000"/>
+                <a:lumMod val="105000"/>
+                <a:satMod val="103000"/>
+                <a:tint val="73000"/>
               </a:schemeClr>
             </a:gs>
             <a:gs pos="100000">
               <a:schemeClr val="phClr">
-                <a:tint val="15000"/>
-                <a:satMod val="350000"/>
+                <a:lumMod val="105000"/>
+                <a:satMod val="109000"/>
+                <a:tint val="81000"/>
               </a:schemeClr>
             </a:gs>
           </a:gsLst>
-          <a:lin ang="16200000" scaled="1"/>
+          <a:lin ang="5400000" scaled="0"/>
         </a:gradFill>
         <a:gradFill rotWithShape="1">
           <a:gsLst>
             <a:gs pos="0">
               <a:schemeClr val="phClr">
-                <a:tint val="100000"/>
+                <a:satMod val="103000"/>
+                <a:lumMod val="102000"/>
+                <a:tint val="94000"/>
+              </a:schemeClr>
+            </a:gs>
+            <a:gs pos="50000">
+              <a:schemeClr val="phClr">
+                <a:satMod val="110000"/>
+                <a:lumMod val="100000"/>
                 <a:shade val="100000"/>
-                <a:satMod val="130000"/>
               </a:schemeClr>
             </a:gs>
             <a:gs pos="100000">
               <a:schemeClr val="phClr">
-                <a:tint val="50000"/>
-                <a:shade val="100000"/>
-                <a:satMod val="350000"/>
+                <a:lumMod val="99000"/>
+                <a:satMod val="120000"/>
+                <a:shade val="78000"/>
               </a:schemeClr>
             </a:gs>
           </a:gsLst>
-          <a:lin ang="16200000" scaled="0"/>
+          <a:lin ang="5400000" scaled="0"/>
         </a:gradFill>
       </a:fillStyleLst>
       <a:lnStyleLst>
-        <a:ln w="9525" cap="flat" cmpd="sng" algn="ctr">
+        <a:ln w="12700" cap="flat" cmpd="sng" algn="ctr">
           <a:solidFill>
-            <a:schemeClr val="phClr">
-              <a:shade val="95000"/>
-              <a:satMod val="105000"/>
-            </a:schemeClr>
+            <a:schemeClr val="phClr"/>
           </a:solidFill>
           <a:prstDash val="solid"/>
+          <a:miter lim="800000"/>
+        </a:ln>
+        <a:ln w="19050" cap="flat" cmpd="sng" algn="ctr">
+          <a:solidFill>
+            <a:schemeClr val="phClr"/>
+          </a:solidFill>
+          <a:prstDash val="solid"/>
+          <a:miter lim="800000"/>
         </a:ln>
         <a:ln w="25400" cap="flat" cmpd="sng" algn="ctr">
           <a:solidFill>
             <a:schemeClr val="phClr"/>
           </a:solidFill>
           <a:prstDash val="solid"/>
-        </a:ln>
-        <a:ln w="38100" cap="flat" cmpd="sng" algn="ctr">
-          <a:solidFill>
-            <a:schemeClr val="phClr"/>
-          </a:solidFill>
-          <a:prstDash val="solid"/>
+          <a:miter lim="800000"/>
         </a:ln>
       </a:lnStyleLst>
       <a:effectStyleLst>
         <a:effectStyle>
+          <a:effectLst/>
+        </a:effectStyle>
+        <a:effectStyle>
+          <a:effectLst/>
+        </a:effectStyle>
+        <a:effectStyle>
           <a:effectLst>
-            <a:outerShdw blurRad="40000" dist="20000" dir="5400000" rotWithShape="0">
+            <a:outerShdw blurRad="57150" dist="19050" dir="5400000" algn="ctr" rotWithShape="0">
               <a:srgbClr val="000000">
-                <a:alpha val="38000"/>
+                <a:alpha val="63000"/>
               </a:srgbClr>
             </a:outerShdw>
           </a:effectLst>
-        </a:effectStyle>
-        <a:effectStyle>
-          <a:effectLst>
-            <a:outerShdw blurRad="40000" dist="23000" dir="5400000" rotWithShape="0">
-              <a:srgbClr val="000000">
-                <a:alpha val="35000"/>
-              </a:srgbClr>
-            </a:outerShdw>
-          </a:effectLst>
-        </a:effectStyle>
-        <a:effectStyle>
-          <a:effectLst>
-            <a:outerShdw blurRad="40000" dist="23000" dir="5400000" rotWithShape="0">
-              <a:srgbClr val="000000">
-                <a:alpha val="35000"/>
-              </a:srgbClr>
-            </a:outerShdw>
-          </a:effectLst>
-          <a:scene3d>
-            <a:camera prst="orthographicFront">
-              <a:rot lat="0" lon="0" rev="0"/>
-            </a:camera>
-            <a:lightRig rig="threePt" dir="t">
-              <a:rot lat="0" lon="0" rev="1200000"/>
-            </a:lightRig>
-          </a:scene3d>
-          <a:sp3d>
-            <a:bevelT w="63500" h="25400"/>
-          </a:sp3d>
         </a:effectStyle>
       </a:effectStyleLst>
       <a:bgFillStyleLst>
         <a:solidFill>
           <a:schemeClr val="phClr"/>
         </a:solidFill>
+        <a:solidFill>
+          <a:schemeClr val="phClr">
+            <a:tint val="95000"/>
+            <a:satMod val="170000"/>
+          </a:schemeClr>
+        </a:solidFill>
         <a:gradFill rotWithShape="1">
           <a:gsLst>
             <a:gs pos="0">
               <a:schemeClr val="phClr">
-                <a:tint val="40000"/>
-                <a:satMod val="350000"/>
+                <a:tint val="93000"/>
+                <a:satMod val="150000"/>
+                <a:shade val="98000"/>
+                <a:lumMod val="102000"/>
               </a:schemeClr>
             </a:gs>
-            <a:gs pos="40000">
+            <a:gs pos="50000">
               <a:schemeClr val="phClr">
-                <a:tint val="45000"/>
-                <a:shade val="99000"/>
-                <a:satMod val="350000"/>
+                <a:tint val="98000"/>
+                <a:satMod val="130000"/>
+                <a:shade val="90000"/>
+                <a:lumMod val="103000"/>
               </a:schemeClr>
             </a:gs>
             <a:gs pos="100000">
               <a:schemeClr val="phClr">
-                <a:shade val="20000"/>
-                <a:satMod val="255000"/>
+                <a:shade val="63000"/>
+                <a:satMod val="120000"/>
               </a:schemeClr>
             </a:gs>
           </a:gsLst>
-          <a:path path="circle">
-            <a:fillToRect l="50000" t="-80000" r="50000" b="180000"/>
-          </a:path>
-        </a:gradFill>
-        <a:gradFill rotWithShape="1">
-          <a:gsLst>
-            <a:gs pos="0">
-              <a:schemeClr val="phClr">
-                <a:tint val="80000"/>
-                <a:satMod val="300000"/>
-              </a:schemeClr>
-            </a:gs>
-            <a:gs pos="100000">
-              <a:schemeClr val="phClr">
-                <a:shade val="30000"/>
-                <a:satMod val="200000"/>
-              </a:schemeClr>
-            </a:gs>
-          </a:gsLst>
-          <a:path path="circle">
-            <a:fillToRect l="50000" t="50000" r="50000" b="50000"/>
-          </a:path>
+          <a:lin ang="5400000" scaled="0"/>
         </a:gradFill>
       </a:bgFillStyleLst>
     </a:fmtScheme>
   </a:themeElements>
   <a:objectDefaults>
-    <a:spDef>
-      <a:spPr/>
-      <a:bodyPr/>
-      <a:lstStyle/>
-      <a:style>
-        <a:lnRef idx="1">
-          <a:schemeClr val="accent1"/>
-        </a:lnRef>
-        <a:fillRef idx="3">
-          <a:schemeClr val="accent1"/>
-        </a:fillRef>
-        <a:effectRef idx="2">
-          <a:schemeClr val="accent1"/>
-        </a:effectRef>
-        <a:fontRef idx="minor">
-          <a:schemeClr val="lt1"/>
-        </a:fontRef>
-      </a:style>
-    </a:spDef>
     <a:lnDef>
       <a:spPr/>
       <a:bodyPr/>
@@ -11806,5 +15432,10 @@
     </a:lnDef>
   </a:objectDefaults>
   <a:extraClrSchemeLst/>
+  <a:extLst>
+    <a:ext uri="{05A4C25C-085E-4340-85A3-A5531E510DB2}">
+      <thm15:themeFamily xmlns:thm15="http://schemas.microsoft.com/office/thememl/2012/main" name="Office Theme" id="{2E142A2C-CD16-42D6-873A-C26D2A0506FA}" vid="{1BDDFF52-6CD6-40A5-AB3C-68EB2F1E4D0A}"/>
+    </a:ext>
+  </a:extLst>
 </a:theme>
 </file>